--- a/2025/LEC/06-2 Обнаружение аномалий.pptx
+++ b/2025/LEC/06-2 Обнаружение аномалий.pptx
@@ -32,13 +32,14 @@
     <p:sldId id="289" r:id="rId26"/>
     <p:sldId id="291" r:id="rId27"/>
     <p:sldId id="290" r:id="rId28"/>
-    <p:sldId id="299" r:id="rId29"/>
-    <p:sldId id="302" r:id="rId30"/>
-    <p:sldId id="303" r:id="rId31"/>
-    <p:sldId id="304" r:id="rId32"/>
-    <p:sldId id="305" r:id="rId33"/>
-    <p:sldId id="306" r:id="rId34"/>
-    <p:sldId id="307" r:id="rId35"/>
+    <p:sldId id="308" r:id="rId29"/>
+    <p:sldId id="299" r:id="rId30"/>
+    <p:sldId id="302" r:id="rId31"/>
+    <p:sldId id="303" r:id="rId32"/>
+    <p:sldId id="304" r:id="rId33"/>
+    <p:sldId id="305" r:id="rId34"/>
+    <p:sldId id="306" r:id="rId35"/>
+    <p:sldId id="307" r:id="rId36"/>
   </p:sldIdLst>
   <p:sldSz cx="12192000" cy="6858000"/>
   <p:notesSz cx="6858000" cy="9144000"/>
@@ -294,7 +295,7 @@
           <a:p>
             <a:fld id="{A76E1671-358D-4BAB-9EB2-DC8D65251B89}" type="datetimeFigureOut">
               <a:rPr lang="en-US" smtClean="0"/>
-              <a:t>8/11/2025</a:t>
+              <a:t>8/20/2025</a:t>
             </a:fld>
             <a:endParaRPr lang="en-US"/>
           </a:p>
@@ -494,7 +495,7 @@
           <a:p>
             <a:fld id="{A76E1671-358D-4BAB-9EB2-DC8D65251B89}" type="datetimeFigureOut">
               <a:rPr lang="en-US" smtClean="0"/>
-              <a:t>8/11/2025</a:t>
+              <a:t>8/20/2025</a:t>
             </a:fld>
             <a:endParaRPr lang="en-US"/>
           </a:p>
@@ -704,7 +705,7 @@
           <a:p>
             <a:fld id="{A76E1671-358D-4BAB-9EB2-DC8D65251B89}" type="datetimeFigureOut">
               <a:rPr lang="en-US" smtClean="0"/>
-              <a:t>8/11/2025</a:t>
+              <a:t>8/20/2025</a:t>
             </a:fld>
             <a:endParaRPr lang="en-US"/>
           </a:p>
@@ -904,7 +905,7 @@
           <a:p>
             <a:fld id="{A76E1671-358D-4BAB-9EB2-DC8D65251B89}" type="datetimeFigureOut">
               <a:rPr lang="en-US" smtClean="0"/>
-              <a:t>8/11/2025</a:t>
+              <a:t>8/20/2025</a:t>
             </a:fld>
             <a:endParaRPr lang="en-US"/>
           </a:p>
@@ -1180,7 +1181,7 @@
           <a:p>
             <a:fld id="{A76E1671-358D-4BAB-9EB2-DC8D65251B89}" type="datetimeFigureOut">
               <a:rPr lang="en-US" smtClean="0"/>
-              <a:t>8/11/2025</a:t>
+              <a:t>8/20/2025</a:t>
             </a:fld>
             <a:endParaRPr lang="en-US"/>
           </a:p>
@@ -1448,7 +1449,7 @@
           <a:p>
             <a:fld id="{A76E1671-358D-4BAB-9EB2-DC8D65251B89}" type="datetimeFigureOut">
               <a:rPr lang="en-US" smtClean="0"/>
-              <a:t>8/11/2025</a:t>
+              <a:t>8/20/2025</a:t>
             </a:fld>
             <a:endParaRPr lang="en-US"/>
           </a:p>
@@ -1863,7 +1864,7 @@
           <a:p>
             <a:fld id="{A76E1671-358D-4BAB-9EB2-DC8D65251B89}" type="datetimeFigureOut">
               <a:rPr lang="en-US" smtClean="0"/>
-              <a:t>8/11/2025</a:t>
+              <a:t>8/20/2025</a:t>
             </a:fld>
             <a:endParaRPr lang="en-US"/>
           </a:p>
@@ -2005,7 +2006,7 @@
           <a:p>
             <a:fld id="{A76E1671-358D-4BAB-9EB2-DC8D65251B89}" type="datetimeFigureOut">
               <a:rPr lang="en-US" smtClean="0"/>
-              <a:t>8/11/2025</a:t>
+              <a:t>8/20/2025</a:t>
             </a:fld>
             <a:endParaRPr lang="en-US"/>
           </a:p>
@@ -2118,7 +2119,7 @@
           <a:p>
             <a:fld id="{A76E1671-358D-4BAB-9EB2-DC8D65251B89}" type="datetimeFigureOut">
               <a:rPr lang="en-US" smtClean="0"/>
-              <a:t>8/11/2025</a:t>
+              <a:t>8/20/2025</a:t>
             </a:fld>
             <a:endParaRPr lang="en-US"/>
           </a:p>
@@ -2431,7 +2432,7 @@
           <a:p>
             <a:fld id="{A76E1671-358D-4BAB-9EB2-DC8D65251B89}" type="datetimeFigureOut">
               <a:rPr lang="en-US" smtClean="0"/>
-              <a:t>8/11/2025</a:t>
+              <a:t>8/20/2025</a:t>
             </a:fld>
             <a:endParaRPr lang="en-US"/>
           </a:p>
@@ -2720,7 +2721,7 @@
           <a:p>
             <a:fld id="{A76E1671-358D-4BAB-9EB2-DC8D65251B89}" type="datetimeFigureOut">
               <a:rPr lang="en-US" smtClean="0"/>
-              <a:t>8/11/2025</a:t>
+              <a:t>8/20/2025</a:t>
             </a:fld>
             <a:endParaRPr lang="en-US"/>
           </a:p>
@@ -2963,7 +2964,7 @@
           <a:p>
             <a:fld id="{A76E1671-358D-4BAB-9EB2-DC8D65251B89}" type="datetimeFigureOut">
               <a:rPr lang="en-US" smtClean="0"/>
-              <a:t>8/11/2025</a:t>
+              <a:t>8/20/2025</a:t>
             </a:fld>
             <a:endParaRPr lang="en-US"/>
           </a:p>
@@ -3484,7 +3485,7 @@
         </p:nvSpPr>
         <p:spPr>
           <a:xfrm>
-            <a:off x="838200" y="365125"/>
+            <a:off x="917575" y="158305"/>
             <a:ext cx="10515600" cy="711645"/>
           </a:xfrm>
         </p:spPr>
@@ -3494,144 +3495,20 @@
           </a:bodyPr>
           <a:lstStyle/>
           <a:p>
-            <a:pPr algn="l" rtl="0"/>
+            <a:pPr algn="ctr" rtl="0"/>
             <a:r>
               <a:rPr lang="en-US" b="1" dirty="0"/>
               <a:t>Обнаружение аномалий</a:t>
             </a:r>
             <a:r>
               <a:rPr lang="ru-RU" b="1" dirty="0"/>
-              <a:t>. </a:t>
-            </a:r>
-            <a:r>
-              <a:rPr lang="ru-RU" b="1" dirty="0"/>
-              <a:t>П</a:t>
+              <a:t>. П</a:t>
             </a:r>
             <a:r>
               <a:rPr lang="en-US" b="1" dirty="0" err="1" smtClean="0"/>
               <a:t>одходы</a:t>
             </a:r>
             <a:endParaRPr lang="en-US" b="1" dirty="0"/>
-          </a:p>
-        </p:txBody>
-      </p:sp>
-      <p:sp>
-        <p:nvSpPr>
-          <p:cNvPr id="5" name="AutoShape 3" descr="image.png"/>
-          <p:cNvSpPr>
-            <a:spLocks noChangeAspect="1" noChangeArrowheads="1"/>
-          </p:cNvSpPr>
-          <p:nvPr/>
-        </p:nvSpPr>
-        <p:spPr bwMode="auto">
-          <a:xfrm>
-            <a:off x="155575" y="-144463"/>
-            <a:ext cx="304800" cy="304801"/>
-          </a:xfrm>
-          <a:prstGeom prst="rect">
-            <a:avLst/>
-          </a:prstGeom>
-          <a:noFill/>
-          <a:extLst>
-            <a:ext uri="{909E8E84-426E-40DD-AFC4-6F175D3DCCD1}">
-              <a14:hiddenFill xmlns:a14="http://schemas.microsoft.com/office/drawing/2010/main">
-                <a:solidFill>
-                  <a:srgbClr val="FFFFFF"/>
-                </a:solidFill>
-              </a14:hiddenFill>
-            </a:ext>
-          </a:extLst>
-        </p:spPr>
-        <p:txBody>
-          <a:bodyPr vert="horz" wrap="square" lIns="91440" tIns="45720" rIns="91440" bIns="45720" numCol="1" anchor="t" anchorCtr="0" compatLnSpc="1">
-            <a:prstTxWarp prst="textNoShape">
-              <a:avLst/>
-            </a:prstTxWarp>
-          </a:bodyPr>
-          <a:lstStyle/>
-          <a:p>
-            <a:pPr algn="l" rtl="0"/>
-            <a:endParaRPr lang="ru-RU"/>
-          </a:p>
-        </p:txBody>
-      </p:sp>
-      <p:sp>
-        <p:nvSpPr>
-          <p:cNvPr id="4" name="AutoShape 2" descr="image.png"/>
-          <p:cNvSpPr>
-            <a:spLocks noChangeAspect="1" noChangeArrowheads="1"/>
-          </p:cNvSpPr>
-          <p:nvPr/>
-        </p:nvSpPr>
-        <p:spPr bwMode="auto">
-          <a:xfrm>
-            <a:off x="307975" y="7937"/>
-            <a:ext cx="304800" cy="304801"/>
-          </a:xfrm>
-          <a:prstGeom prst="rect">
-            <a:avLst/>
-          </a:prstGeom>
-          <a:noFill/>
-          <a:extLst>
-            <a:ext uri="{909E8E84-426E-40DD-AFC4-6F175D3DCCD1}">
-              <a14:hiddenFill xmlns:a14="http://schemas.microsoft.com/office/drawing/2010/main">
-                <a:solidFill>
-                  <a:srgbClr val="FFFFFF"/>
-                </a:solidFill>
-              </a14:hiddenFill>
-            </a:ext>
-          </a:extLst>
-        </p:spPr>
-        <p:txBody>
-          <a:bodyPr vert="horz" wrap="square" lIns="91440" tIns="45720" rIns="91440" bIns="45720" numCol="1" anchor="t" anchorCtr="0" compatLnSpc="1">
-            <a:prstTxWarp prst="textNoShape">
-              <a:avLst/>
-            </a:prstTxWarp>
-          </a:bodyPr>
-          <a:lstStyle/>
-          <a:p>
-            <a:pPr algn="l" rtl="0"/>
-            <a:endParaRPr lang="ru-RU"/>
-          </a:p>
-        </p:txBody>
-      </p:sp>
-      <p:sp>
-        <p:nvSpPr>
-          <p:cNvPr id="7" name="AutoShape 2" descr="image.png"/>
-          <p:cNvSpPr>
-            <a:spLocks noChangeAspect="1" noChangeArrowheads="1"/>
-          </p:cNvSpPr>
-          <p:nvPr/>
-        </p:nvSpPr>
-        <p:spPr bwMode="auto">
-          <a:xfrm>
-            <a:off x="460375" y="160337"/>
-            <a:ext cx="304800" cy="304801"/>
-          </a:xfrm>
-          <a:prstGeom prst="rect">
-            <a:avLst/>
-          </a:prstGeom>
-          <a:noFill/>
-          <a:extLst>
-            <a:ext uri="{909E8E84-426E-40DD-AFC4-6F175D3DCCD1}">
-              <a14:hiddenFill xmlns:a14="http://schemas.microsoft.com/office/drawing/2010/main">
-                <a:solidFill>
-                  <a:srgbClr val="FFFFFF"/>
-                </a:solidFill>
-              </a14:hiddenFill>
-            </a:ext>
-          </a:extLst>
-        </p:spPr>
-        <p:txBody>
-          <a:bodyPr vert="horz" wrap="square" lIns="91440" tIns="45720" rIns="91440" bIns="45720" numCol="1" anchor="t" anchorCtr="0" compatLnSpc="1">
-            <a:prstTxWarp prst="textNoShape">
-              <a:avLst/>
-            </a:prstTxWarp>
-          </a:bodyPr>
-          <a:lstStyle/>
-          <a:p>
-            <a:pPr algn="l" rtl="0"/>
-            <a:endParaRPr lang="ru-RU"/>
           </a:p>
         </p:txBody>
       </p:sp>
@@ -3647,8 +3524,8 @@
         </p:nvSpPr>
         <p:spPr>
           <a:xfrm>
-            <a:off x="460375" y="1022350"/>
-            <a:ext cx="10741025" cy="5100193"/>
+            <a:off x="260350" y="769937"/>
+            <a:ext cx="11064875" cy="6064250"/>
           </a:xfrm>
         </p:spPr>
         <p:txBody>
@@ -3662,11 +3539,11 @@
                 <a:spcPct val="100000"/>
               </a:lnSpc>
               <a:spcBef>
-                <a:spcPts val="600"/>
+                <a:spcPts val="300"/>
               </a:spcBef>
             </a:pPr>
             <a:r>
-              <a:rPr lang="ru-RU" sz="2200" dirty="0"/>
+              <a:rPr lang="ru-RU" sz="2400" dirty="0"/>
               <a:t>Можно выделить несколько подходов к обнаружению аномалий:</a:t>
             </a:r>
           </a:p>
@@ -3676,14 +3553,14 @@
                 <a:spcPct val="100000"/>
               </a:lnSpc>
               <a:spcBef>
-                <a:spcPts val="600"/>
+                <a:spcPts val="300"/>
               </a:spcBef>
             </a:pPr>
             <a:r>
-              <a:rPr lang="ru-RU" sz="2200" b="1" dirty="0"/>
+              <a:rPr lang="ru-RU" b="1" dirty="0"/>
               <a:t>Статистические + эвристические (экспертные, пороговые) правила </a:t>
             </a:r>
-            <a:endParaRPr lang="en-US" sz="2200" b="1" dirty="0"/>
+            <a:endParaRPr lang="en-US" b="1" dirty="0"/>
           </a:p>
           <a:p>
             <a:pPr lvl="1">
@@ -3691,15 +3568,15 @@
                 <a:spcPct val="100000"/>
               </a:lnSpc>
               <a:spcBef>
-                <a:spcPts val="600"/>
+                <a:spcPts val="300"/>
               </a:spcBef>
             </a:pPr>
             <a:r>
-              <a:rPr lang="ru-RU" sz="2200" b="1" dirty="0"/>
+              <a:rPr lang="ru-RU" b="1" dirty="0"/>
               <a:t>Обнаружение аномалий на основе ошибки прогноза </a:t>
             </a:r>
             <a:r>
-              <a:rPr lang="ru-RU" sz="2200" dirty="0"/>
+              <a:rPr lang="ru-RU" dirty="0"/>
               <a:t> временного ряда (и ее отклонения). – то есть правила/статистика для ошибки предсказания ВР (часто строим модель ВР.</a:t>
             </a:r>
           </a:p>
@@ -3709,11 +3586,11 @@
                 <a:spcPct val="100000"/>
               </a:lnSpc>
               <a:spcBef>
-                <a:spcPts val="600"/>
+                <a:spcPts val="300"/>
               </a:spcBef>
             </a:pPr>
             <a:r>
-              <a:rPr lang="ru-RU" sz="2200" b="1" dirty="0"/>
+              <a:rPr lang="ru-RU" b="1" dirty="0"/>
               <a:t>Обнаружение аномалий на основе метрик (метрические, изоляционный лес и другие)</a:t>
             </a:r>
           </a:p>
@@ -3723,28 +3600,22 @@
                 <a:spcPct val="100000"/>
               </a:lnSpc>
               <a:spcBef>
-                <a:spcPts val="600"/>
+                <a:spcPts val="300"/>
               </a:spcBef>
             </a:pPr>
             <a:r>
-              <a:rPr lang="ru-RU" sz="2200" b="1" dirty="0"/>
+              <a:rPr lang="ru-RU" b="1" dirty="0"/>
               <a:t>Обнаружение аномалий на основе реконструкции формы (закономерностей, поведения)</a:t>
             </a:r>
             <a:r>
-              <a:rPr lang="ru-RU" sz="2200" dirty="0"/>
-              <a:t>  временного ряда. (например сжатие - восстановление). При этом можно анализировать ошибку восстановления или сжатое пространство. Но саму задачу предсказания мы не решаем (модели не строим)</a:t>
-            </a:r>
-          </a:p>
-          <a:p>
-            <a:pPr lvl="1">
-              <a:lnSpc>
-                <a:spcPct val="100000"/>
-              </a:lnSpc>
-              <a:spcBef>
-                <a:spcPts val="600"/>
-              </a:spcBef>
-            </a:pPr>
-            <a:endParaRPr lang="ru-RU" sz="1200" dirty="0"/>
+              <a:rPr lang="ru-RU" dirty="0"/>
+              <a:t>  временного ряда. (например сжатие - восстановление). При этом можно анализировать ошибку восстановления или сжатое пространство. Но саму задачу предсказания мы не решаем (модели не строим</a:t>
+            </a:r>
+            <a:r>
+              <a:rPr lang="ru-RU" dirty="0" smtClean="0"/>
+              <a:t>)</a:t>
+            </a:r>
+            <a:endParaRPr lang="ru-RU" dirty="0"/>
           </a:p>
           <a:p>
             <a:pPr marL="800100" lvl="1" indent="-342900">
@@ -3752,23 +3623,23 @@
                 <a:spcPct val="100000"/>
               </a:lnSpc>
               <a:spcBef>
-                <a:spcPts val="600"/>
+                <a:spcPts val="300"/>
               </a:spcBef>
             </a:pPr>
             <a:r>
-              <a:rPr lang="ru-RU" sz="2600" i="1" dirty="0"/>
+              <a:rPr lang="ru-RU" i="1" dirty="0"/>
               <a:t>Отметим,</a:t>
             </a:r>
             <a:r>
-              <a:rPr lang="ru-RU" sz="2600" dirty="0"/>
+              <a:rPr lang="ru-RU" dirty="0"/>
               <a:t>  что поиск аномалии можно проводить как для полного временного ряда, так и по результатам его </a:t>
             </a:r>
             <a:r>
-              <a:rPr lang="ru-RU" sz="2600" b="1" dirty="0"/>
+              <a:rPr lang="ru-RU" b="1" dirty="0"/>
               <a:t>преобразования</a:t>
             </a:r>
             <a:r>
-              <a:rPr lang="ru-RU" sz="2600" dirty="0"/>
+              <a:rPr lang="ru-RU" dirty="0"/>
               <a:t>.</a:t>
             </a:r>
           </a:p>
@@ -3778,7 +3649,7 @@
                 <a:spcPct val="100000"/>
               </a:lnSpc>
               <a:spcBef>
-                <a:spcPts val="600"/>
+                <a:spcPts val="300"/>
               </a:spcBef>
             </a:pPr>
             <a:r>
@@ -3788,91 +3659,11 @@
           </a:p>
           <a:p>
             <a:pPr lvl="0"/>
-            <a:endParaRPr lang="ru-RU" sz="2000" dirty="0"/>
+            <a:endParaRPr lang="ru-RU" sz="2400" dirty="0"/>
           </a:p>
           <a:p>
             <a:pPr lvl="0"/>
-            <a:endParaRPr lang="ru-RU" sz="2000" dirty="0"/>
-          </a:p>
-        </p:txBody>
-      </p:sp>
-      <p:sp>
-        <p:nvSpPr>
-          <p:cNvPr id="9" name="AutoShape 2" descr="image.png"/>
-          <p:cNvSpPr>
-            <a:spLocks noChangeAspect="1" noChangeArrowheads="1"/>
-          </p:cNvSpPr>
-          <p:nvPr/>
-        </p:nvSpPr>
-        <p:spPr bwMode="auto">
-          <a:xfrm>
-            <a:off x="612775" y="312737"/>
-            <a:ext cx="304800" cy="304801"/>
-          </a:xfrm>
-          <a:prstGeom prst="rect">
-            <a:avLst/>
-          </a:prstGeom>
-          <a:noFill/>
-          <a:extLst>
-            <a:ext uri="{909E8E84-426E-40DD-AFC4-6F175D3DCCD1}">
-              <a14:hiddenFill xmlns:a14="http://schemas.microsoft.com/office/drawing/2010/main">
-                <a:solidFill>
-                  <a:srgbClr val="FFFFFF"/>
-                </a:solidFill>
-              </a14:hiddenFill>
-            </a:ext>
-          </a:extLst>
-        </p:spPr>
-        <p:txBody>
-          <a:bodyPr vert="horz" wrap="square" lIns="91440" tIns="45720" rIns="91440" bIns="45720" numCol="1" anchor="t" anchorCtr="0" compatLnSpc="1">
-            <a:prstTxWarp prst="textNoShape">
-              <a:avLst/>
-            </a:prstTxWarp>
-          </a:bodyPr>
-          <a:lstStyle/>
-          <a:p>
-            <a:pPr algn="l" rtl="0"/>
-            <a:endParaRPr lang="ru-RU" dirty="0"/>
-          </a:p>
-        </p:txBody>
-      </p:sp>
-      <p:sp>
-        <p:nvSpPr>
-          <p:cNvPr id="12" name="AutoShape 4" descr="image.png"/>
-          <p:cNvSpPr>
-            <a:spLocks noChangeAspect="1" noChangeArrowheads="1"/>
-          </p:cNvSpPr>
-          <p:nvPr/>
-        </p:nvSpPr>
-        <p:spPr bwMode="auto">
-          <a:xfrm>
-            <a:off x="765175" y="465137"/>
-            <a:ext cx="304800" cy="304801"/>
-          </a:xfrm>
-          <a:prstGeom prst="rect">
-            <a:avLst/>
-          </a:prstGeom>
-          <a:noFill/>
-          <a:extLst>
-            <a:ext uri="{909E8E84-426E-40DD-AFC4-6F175D3DCCD1}">
-              <a14:hiddenFill xmlns:a14="http://schemas.microsoft.com/office/drawing/2010/main">
-                <a:solidFill>
-                  <a:srgbClr val="FFFFFF"/>
-                </a:solidFill>
-              </a14:hiddenFill>
-            </a:ext>
-          </a:extLst>
-        </p:spPr>
-        <p:txBody>
-          <a:bodyPr vert="horz" wrap="square" lIns="91440" tIns="45720" rIns="91440" bIns="45720" numCol="1" anchor="t" anchorCtr="0" compatLnSpc="1">
-            <a:prstTxWarp prst="textNoShape">
-              <a:avLst/>
-            </a:prstTxWarp>
-          </a:bodyPr>
-          <a:lstStyle/>
-          <a:p>
-            <a:pPr algn="l" rtl="0"/>
-            <a:endParaRPr lang="ru-RU" dirty="0"/>
+            <a:endParaRPr lang="ru-RU" sz="2400" dirty="0"/>
           </a:p>
         </p:txBody>
       </p:sp>
@@ -4057,20 +3848,20 @@
         </p:spPr>
         <p:txBody>
           <a:bodyPr>
-            <a:normAutofit fontScale="90000"/>
+            <a:noAutofit/>
           </a:bodyPr>
           <a:lstStyle/>
           <a:p>
             <a:pPr algn="ctr"/>
             <a:r>
-              <a:rPr lang="ru-RU" dirty="0"/>
+              <a:rPr lang="ru-RU" b="1" dirty="0"/>
               <a:t>Метрики </a:t>
             </a:r>
             <a:r>
-              <a:rPr lang="ru-RU" dirty="0" smtClean="0"/>
+              <a:rPr lang="ru-RU" b="1" dirty="0" smtClean="0"/>
               <a:t>поиска аномалий</a:t>
             </a:r>
-            <a:endParaRPr lang="ru-RU" dirty="0"/>
+            <a:endParaRPr lang="ru-RU" b="1" dirty="0"/>
           </a:p>
         </p:txBody>
       </p:sp>
@@ -4106,10 +3897,10 @@
               <a:buNone/>
             </a:pPr>
             <a:r>
-              <a:rPr lang="ru-RU" sz="2200" dirty="0"/>
+              <a:rPr lang="ru-RU" sz="2200" b="1" dirty="0"/>
               <a:t>Метрики для поиска </a:t>
             </a:r>
-            <a:endParaRPr lang="ru-RU" sz="2200" dirty="0" smtClean="0"/>
+            <a:endParaRPr lang="ru-RU" sz="2200" b="1" dirty="0" smtClean="0"/>
           </a:p>
           <a:p>
             <a:r>
@@ -4138,17 +3929,22 @@
               <a:buNone/>
             </a:pPr>
             <a:r>
-              <a:rPr lang="ru-RU" sz="2200" dirty="0" smtClean="0"/>
+              <a:rPr lang="ru-RU" sz="2200" b="1" dirty="0" smtClean="0"/>
               <a:t>Проблемы </a:t>
             </a:r>
             <a:r>
-              <a:rPr lang="ru-RU" sz="2200" dirty="0"/>
-              <a:t>поиска аномалий могут быть </a:t>
+              <a:rPr lang="ru-RU" sz="2200" b="1" dirty="0"/>
+              <a:t>поиска аномалий могут </a:t>
+            </a:r>
+            <a:r>
+              <a:rPr lang="ru-RU" sz="2200" b="1" dirty="0" smtClean="0"/>
+              <a:t>быть</a:t>
             </a:r>
             <a:r>
               <a:rPr lang="ru-RU" sz="2200" dirty="0" smtClean="0"/>
               <a:t>:</a:t>
             </a:r>
+            <a:endParaRPr lang="ru-RU" sz="2200" dirty="0" smtClean="0"/>
           </a:p>
           <a:p>
             <a:r>
@@ -4172,7 +3968,7 @@
               <a:buNone/>
             </a:pPr>
             <a:r>
-              <a:rPr lang="ru-RU" sz="2200" dirty="0" smtClean="0"/>
+              <a:rPr lang="ru-RU" sz="2200" b="1" dirty="0" smtClean="0"/>
               <a:t>Метрики аномалий:</a:t>
             </a:r>
           </a:p>
@@ -4209,7 +4005,6 @@
               <a:rPr lang="ru-RU" sz="2200" dirty="0" smtClean="0"/>
               <a:t>ранжирования или кластеризации в заданный временной интервал, )</a:t>
             </a:r>
-            <a:endParaRPr lang="ru-RU" sz="2200" dirty="0" smtClean="0"/>
           </a:p>
           <a:p>
             <a:pPr marL="0" indent="0">
@@ -4666,11 +4461,11 @@
           <a:p>
             <a:pPr lvl="0" algn="l" rtl="0"/>
             <a:r>
-              <a:rPr lang="ru-RU" b="1" dirty="0"/>
+              <a:rPr lang="ru-RU" b="1" dirty="0" smtClean="0"/>
               <a:t>Обнаружение аномалий. </a:t>
             </a:r>
             <a:r>
-              <a:rPr lang="ru-RU" altLang="ru-RU" b="1" dirty="0">
+              <a:rPr lang="ru-RU" altLang="ru-RU" b="1" dirty="0" smtClean="0">
                 <a:solidFill>
                   <a:srgbClr val="000000"/>
                 </a:solidFill>
@@ -6580,11 +6375,7 @@
             </a:r>
             <a:r>
               <a:rPr lang="en-US" sz="2000" b="1" dirty="0" smtClean="0"/>
-              <a:t> </a:t>
-            </a:r>
-            <a:r>
-              <a:rPr lang="en-US" sz="2000" b="1" dirty="0" smtClean="0"/>
-              <a:t>(boxplot)</a:t>
+              <a:t> (boxplot)</a:t>
             </a:r>
             <a:r>
               <a:rPr lang="ru-RU" sz="2000" dirty="0" smtClean="0"/>
@@ -6682,7 +6473,6 @@
               <a:rPr lang="ru-RU" sz="2000" dirty="0"/>
               <a:t>Усы обычно увеличиваются на расстояние 1,5 * IQR</a:t>
             </a:r>
-            <a:endParaRPr lang="ru-RU" sz="2000" dirty="0"/>
           </a:p>
         </p:txBody>
       </p:sp>
@@ -8985,8 +8775,8 @@
           </a:p>
         </p:txBody>
       </p:sp>
-      <mc:AlternateContent xmlns:mc="http://schemas.openxmlformats.org/markup-compatibility/2006" xmlns:a14="http://schemas.microsoft.com/office/drawing/2010/main">
-        <mc:Choice Requires="a14">
+      <mc:AlternateContent xmlns:mc="http://schemas.openxmlformats.org/markup-compatibility/2006">
+        <mc:Choice xmlns:a14="http://schemas.microsoft.com/office/drawing/2010/main" Requires="a14">
           <p:sp>
             <p:nvSpPr>
               <p:cNvPr id="3" name="Объект 2"/>
@@ -9045,167 +8835,173 @@
                 <a:endParaRPr lang="ru-RU" sz="2000" dirty="0"/>
               </a:p>
               <a:p>
-                <a:pPr algn="l" rtl="0">
+                <a:pPr marL="0" indent="0" algn="l" rtl="0">
                   <a:lnSpc>
                     <a:spcPct val="100000"/>
                   </a:lnSpc>
+                  <a:buNone/>
                 </a:pPr>
                 <a14:m>
-                  <m:oMath xmlns:m="http://schemas.openxmlformats.org/officeDocument/2006/math">
-                    <m:r>
-                      <a:rPr lang="en-US" sz="2000" i="1">
-                        <a:latin typeface="Cambria Math" panose="02040503050406030204" pitchFamily="18" charset="0"/>
-                      </a:rPr>
-                      <m:t>𝑧</m:t>
-                    </m:r>
-                    <m:r>
-                      <a:rPr lang="en-US" sz="2000" i="1">
-                        <a:latin typeface="Cambria Math" panose="02040503050406030204" pitchFamily="18" charset="0"/>
-                      </a:rPr>
-                      <m:t>(</m:t>
-                    </m:r>
-                    <m:r>
-                      <a:rPr lang="en-US" sz="2000" i="1">
-                        <a:latin typeface="Cambria Math" panose="02040503050406030204" pitchFamily="18" charset="0"/>
-                      </a:rPr>
-                      <m:t>𝑛</m:t>
-                    </m:r>
-                    <m:r>
-                      <a:rPr lang="en-US" sz="2000" i="1">
-                        <a:latin typeface="Cambria Math" panose="02040503050406030204" pitchFamily="18" charset="0"/>
-                      </a:rPr>
-                      <m:t>)=</m:t>
-                    </m:r>
-                    <m:f>
-                      <m:fPr>
-                        <m:ctrlPr>
-                          <a:rPr lang="ru-RU" sz="2000" i="1">
-                            <a:latin typeface="Cambria Math" panose="02040503050406030204" pitchFamily="18" charset="0"/>
-                          </a:rPr>
-                        </m:ctrlPr>
-                      </m:fPr>
-                      <m:num>
-                        <m:r>
-                          <a:rPr lang="en-US" sz="2000" i="1">
-                            <a:latin typeface="Cambria Math" panose="02040503050406030204" pitchFamily="18" charset="0"/>
-                          </a:rPr>
-                          <m:t>𝑦</m:t>
-                        </m:r>
-                        <m:r>
-                          <a:rPr lang="en-US" sz="2000" i="1">
-                            <a:latin typeface="Cambria Math" panose="02040503050406030204" pitchFamily="18" charset="0"/>
-                          </a:rPr>
-                          <m:t>(</m:t>
-                        </m:r>
-                        <m:r>
-                          <a:rPr lang="en-US" sz="2000" i="1">
-                            <a:latin typeface="Cambria Math" panose="02040503050406030204" pitchFamily="18" charset="0"/>
-                          </a:rPr>
-                          <m:t>𝑛</m:t>
-                        </m:r>
-                        <m:r>
-                          <a:rPr lang="en-US" sz="2000" i="1">
-                            <a:latin typeface="Cambria Math" panose="02040503050406030204" pitchFamily="18" charset="0"/>
-                          </a:rPr>
-                          <m:t>)−</m:t>
-                        </m:r>
-                        <m:r>
-                          <a:rPr lang="en-US" sz="2000" i="1">
-                            <a:latin typeface="Cambria Math" panose="02040503050406030204" pitchFamily="18" charset="0"/>
-                          </a:rPr>
-                          <m:t>𝐸𝑉</m:t>
-                        </m:r>
-                        <m:r>
-                          <a:rPr lang="en-US" sz="2000" i="1">
-                            <a:latin typeface="Cambria Math" panose="02040503050406030204" pitchFamily="18" charset="0"/>
-                          </a:rPr>
-                          <m:t>(</m:t>
-                        </m:r>
-                        <m:sSub>
-                          <m:sSubPr>
-                            <m:ctrlPr>
-                              <a:rPr lang="ru-RU" sz="2000" i="1">
-                                <a:latin typeface="Cambria Math" panose="02040503050406030204" pitchFamily="18" charset="0"/>
-                              </a:rPr>
-                            </m:ctrlPr>
-                          </m:sSubPr>
-                          <m:e>
-                            <m:r>
-                              <a:rPr lang="en-US" sz="2000" i="1">
-                                <a:latin typeface="Cambria Math" panose="02040503050406030204" pitchFamily="18" charset="0"/>
-                              </a:rPr>
-                              <m:t>𝑦</m:t>
-                            </m:r>
-                          </m:e>
-                          <m:sub>
-                            <m:r>
-                              <a:rPr lang="en-US" sz="2000" i="1">
-                                <a:latin typeface="Cambria Math" panose="02040503050406030204" pitchFamily="18" charset="0"/>
-                              </a:rPr>
-                              <m:t>𝑛𝑜𝑟𝑚</m:t>
-                            </m:r>
-                          </m:sub>
-                        </m:sSub>
-                        <m:r>
-                          <a:rPr lang="en-US" sz="2000" i="1">
-                            <a:latin typeface="Cambria Math" panose="02040503050406030204" pitchFamily="18" charset="0"/>
-                          </a:rPr>
-                          <m:t>)</m:t>
-                        </m:r>
-                      </m:num>
-                      <m:den>
-                        <m:r>
-                          <a:rPr lang="en-US" sz="2000" i="1">
-                            <a:latin typeface="Cambria Math" panose="02040503050406030204" pitchFamily="18" charset="0"/>
-                          </a:rPr>
-                          <m:t>𝑠𝑡𝑑</m:t>
-                        </m:r>
-                        <m:r>
-                          <a:rPr lang="en-US" sz="2000" i="1">
-                            <a:latin typeface="Cambria Math" panose="02040503050406030204" pitchFamily="18" charset="0"/>
-                          </a:rPr>
-                          <m:t>(</m:t>
-                        </m:r>
-                        <m:sSub>
-                          <m:sSubPr>
-                            <m:ctrlPr>
-                              <a:rPr lang="ru-RU" sz="2000" i="1">
-                                <a:latin typeface="Cambria Math" panose="02040503050406030204" pitchFamily="18" charset="0"/>
-                              </a:rPr>
-                            </m:ctrlPr>
-                          </m:sSubPr>
-                          <m:e>
-                            <m:r>
-                              <a:rPr lang="en-US" sz="2000" i="1">
-                                <a:latin typeface="Cambria Math" panose="02040503050406030204" pitchFamily="18" charset="0"/>
-                              </a:rPr>
-                              <m:t>𝑦</m:t>
-                            </m:r>
-                          </m:e>
-                          <m:sub>
-                            <m:r>
-                              <a:rPr lang="en-US" sz="2000" i="1">
-                                <a:latin typeface="Cambria Math" panose="02040503050406030204" pitchFamily="18" charset="0"/>
-                              </a:rPr>
-                              <m:t>𝑛𝑜𝑟𝑚</m:t>
-                            </m:r>
-                          </m:sub>
-                        </m:sSub>
-                        <m:r>
-                          <a:rPr lang="en-US" sz="2000" i="1">
-                            <a:latin typeface="Cambria Math" panose="02040503050406030204" pitchFamily="18" charset="0"/>
-                          </a:rPr>
-                          <m:t>)</m:t>
-                        </m:r>
-                      </m:den>
-                    </m:f>
-                    <m:r>
-                      <a:rPr lang="en-US" sz="2000" i="1">
-                        <a:latin typeface="Cambria Math" panose="02040503050406030204" pitchFamily="18" charset="0"/>
-                      </a:rPr>
-                      <m:t>,</m:t>
-                    </m:r>
-                  </m:oMath>
+                  <m:oMathPara xmlns:m="http://schemas.openxmlformats.org/officeDocument/2006/math">
+                    <m:oMathParaPr>
+                      <m:jc m:val="centerGroup"/>
+                    </m:oMathParaPr>
+                    <m:oMath xmlns:m="http://schemas.openxmlformats.org/officeDocument/2006/math">
+                      <m:r>
+                        <a:rPr lang="en-US" sz="2000" i="1">
+                          <a:latin typeface="Cambria Math" panose="02040503050406030204" pitchFamily="18" charset="0"/>
+                        </a:rPr>
+                        <m:t>𝑧</m:t>
+                      </m:r>
+                      <m:r>
+                        <a:rPr lang="en-US" sz="2000" i="1">
+                          <a:latin typeface="Cambria Math" panose="02040503050406030204" pitchFamily="18" charset="0"/>
+                        </a:rPr>
+                        <m:t>(</m:t>
+                      </m:r>
+                      <m:r>
+                        <a:rPr lang="en-US" sz="2000" i="1">
+                          <a:latin typeface="Cambria Math" panose="02040503050406030204" pitchFamily="18" charset="0"/>
+                        </a:rPr>
+                        <m:t>𝑛</m:t>
+                      </m:r>
+                      <m:r>
+                        <a:rPr lang="en-US" sz="2000" i="1">
+                          <a:latin typeface="Cambria Math" panose="02040503050406030204" pitchFamily="18" charset="0"/>
+                        </a:rPr>
+                        <m:t>)=</m:t>
+                      </m:r>
+                      <m:f>
+                        <m:fPr>
+                          <m:ctrlPr>
+                            <a:rPr lang="ru-RU" sz="2000" i="1">
+                              <a:latin typeface="Cambria Math" panose="02040503050406030204" pitchFamily="18" charset="0"/>
+                            </a:rPr>
+                          </m:ctrlPr>
+                        </m:fPr>
+                        <m:num>
+                          <m:r>
+                            <a:rPr lang="en-US" sz="2000" i="1">
+                              <a:latin typeface="Cambria Math" panose="02040503050406030204" pitchFamily="18" charset="0"/>
+                            </a:rPr>
+                            <m:t>𝑦</m:t>
+                          </m:r>
+                          <m:r>
+                            <a:rPr lang="en-US" sz="2000" i="1">
+                              <a:latin typeface="Cambria Math" panose="02040503050406030204" pitchFamily="18" charset="0"/>
+                            </a:rPr>
+                            <m:t>(</m:t>
+                          </m:r>
+                          <m:r>
+                            <a:rPr lang="en-US" sz="2000" i="1">
+                              <a:latin typeface="Cambria Math" panose="02040503050406030204" pitchFamily="18" charset="0"/>
+                            </a:rPr>
+                            <m:t>𝑛</m:t>
+                          </m:r>
+                          <m:r>
+                            <a:rPr lang="en-US" sz="2000" i="1">
+                              <a:latin typeface="Cambria Math" panose="02040503050406030204" pitchFamily="18" charset="0"/>
+                            </a:rPr>
+                            <m:t>)−</m:t>
+                          </m:r>
+                          <m:r>
+                            <a:rPr lang="en-US" sz="2000" i="1">
+                              <a:latin typeface="Cambria Math" panose="02040503050406030204" pitchFamily="18" charset="0"/>
+                            </a:rPr>
+                            <m:t>𝐸𝑉</m:t>
+                          </m:r>
+                          <m:r>
+                            <a:rPr lang="en-US" sz="2000" i="1">
+                              <a:latin typeface="Cambria Math" panose="02040503050406030204" pitchFamily="18" charset="0"/>
+                            </a:rPr>
+                            <m:t>(</m:t>
+                          </m:r>
+                          <m:sSub>
+                            <m:sSubPr>
+                              <m:ctrlPr>
+                                <a:rPr lang="ru-RU" sz="2000" i="1">
+                                  <a:latin typeface="Cambria Math" panose="02040503050406030204" pitchFamily="18" charset="0"/>
+                                </a:rPr>
+                              </m:ctrlPr>
+                            </m:sSubPr>
+                            <m:e>
+                              <m:r>
+                                <a:rPr lang="en-US" sz="2000" i="1">
+                                  <a:latin typeface="Cambria Math" panose="02040503050406030204" pitchFamily="18" charset="0"/>
+                                </a:rPr>
+                                <m:t>𝑦</m:t>
+                              </m:r>
+                            </m:e>
+                            <m:sub>
+                              <m:r>
+                                <a:rPr lang="en-US" sz="2000" i="1">
+                                  <a:latin typeface="Cambria Math" panose="02040503050406030204" pitchFamily="18" charset="0"/>
+                                </a:rPr>
+                                <m:t>𝑛𝑜𝑟𝑚</m:t>
+                              </m:r>
+                            </m:sub>
+                          </m:sSub>
+                          <m:r>
+                            <a:rPr lang="en-US" sz="2000" i="1">
+                              <a:latin typeface="Cambria Math" panose="02040503050406030204" pitchFamily="18" charset="0"/>
+                            </a:rPr>
+                            <m:t>)</m:t>
+                          </m:r>
+                        </m:num>
+                        <m:den>
+                          <m:r>
+                            <a:rPr lang="en-US" sz="2000" i="1">
+                              <a:latin typeface="Cambria Math" panose="02040503050406030204" pitchFamily="18" charset="0"/>
+                            </a:rPr>
+                            <m:t>𝑠𝑡𝑑</m:t>
+                          </m:r>
+                          <m:r>
+                            <a:rPr lang="en-US" sz="2000" i="1">
+                              <a:latin typeface="Cambria Math" panose="02040503050406030204" pitchFamily="18" charset="0"/>
+                            </a:rPr>
+                            <m:t>(</m:t>
+                          </m:r>
+                          <m:sSub>
+                            <m:sSubPr>
+                              <m:ctrlPr>
+                                <a:rPr lang="ru-RU" sz="2000" i="1">
+                                  <a:latin typeface="Cambria Math" panose="02040503050406030204" pitchFamily="18" charset="0"/>
+                                </a:rPr>
+                              </m:ctrlPr>
+                            </m:sSubPr>
+                            <m:e>
+                              <m:r>
+                                <a:rPr lang="en-US" sz="2000" i="1">
+                                  <a:latin typeface="Cambria Math" panose="02040503050406030204" pitchFamily="18" charset="0"/>
+                                </a:rPr>
+                                <m:t>𝑦</m:t>
+                              </m:r>
+                            </m:e>
+                            <m:sub>
+                              <m:r>
+                                <a:rPr lang="en-US" sz="2000" i="1">
+                                  <a:latin typeface="Cambria Math" panose="02040503050406030204" pitchFamily="18" charset="0"/>
+                                </a:rPr>
+                                <m:t>𝑛𝑜𝑟𝑚</m:t>
+                              </m:r>
+                            </m:sub>
+                          </m:sSub>
+                          <m:r>
+                            <a:rPr lang="en-US" sz="2000" i="1">
+                              <a:latin typeface="Cambria Math" panose="02040503050406030204" pitchFamily="18" charset="0"/>
+                            </a:rPr>
+                            <m:t>)</m:t>
+                          </m:r>
+                        </m:den>
+                      </m:f>
+                      <m:r>
+                        <a:rPr lang="en-US" sz="2000" i="1">
+                          <a:latin typeface="Cambria Math" panose="02040503050406030204" pitchFamily="18" charset="0"/>
+                        </a:rPr>
+                        <m:t>,</m:t>
+                      </m:r>
+                    </m:oMath>
+                  </m:oMathPara>
                 </a14:m>
                 <a:endParaRPr lang="ru-RU" sz="2000" dirty="0"/>
               </a:p>
@@ -9401,174 +9197,180 @@
                 <a:endParaRPr lang="ru-RU" sz="2000" dirty="0"/>
               </a:p>
               <a:p>
-                <a:pPr algn="l" rtl="0">
+                <a:pPr marL="0" indent="0" algn="l" rtl="0">
                   <a:lnSpc>
                     <a:spcPct val="100000"/>
                   </a:lnSpc>
+                  <a:buNone/>
                 </a:pPr>
                 <a14:m>
-                  <m:oMath xmlns:m="http://schemas.openxmlformats.org/officeDocument/2006/math">
-                    <m:sSub>
-                      <m:sSubPr>
-                        <m:ctrlPr>
-                          <a:rPr lang="ru-RU" sz="2000" i="1">
-                            <a:latin typeface="Cambria Math" panose="02040503050406030204" pitchFamily="18" charset="0"/>
-                          </a:rPr>
-                        </m:ctrlPr>
-                      </m:sSubPr>
-                      <m:e>
-                        <m:r>
-                          <a:rPr lang="en-US" sz="2000" i="1">
-                            <a:latin typeface="Cambria Math" panose="02040503050406030204" pitchFamily="18" charset="0"/>
-                          </a:rPr>
-                          <m:t>𝑧</m:t>
-                        </m:r>
-                      </m:e>
-                      <m:sub>
-                        <m:r>
-                          <a:rPr lang="en-US" sz="2000" i="1">
-                            <a:latin typeface="Cambria Math" panose="02040503050406030204" pitchFamily="18" charset="0"/>
-                          </a:rPr>
-                          <m:t>𝑚𝑜𝑑𝑖𝑓</m:t>
-                        </m:r>
-                      </m:sub>
-                    </m:sSub>
-                    <m:r>
-                      <a:rPr lang="en-US" sz="2000" i="1">
-                        <a:latin typeface="Cambria Math" panose="02040503050406030204" pitchFamily="18" charset="0"/>
-                      </a:rPr>
-                      <m:t>=0.6745</m:t>
-                    </m:r>
-                    <m:f>
-                      <m:fPr>
-                        <m:ctrlPr>
-                          <a:rPr lang="ru-RU" sz="2000" i="1">
-                            <a:latin typeface="Cambria Math" panose="02040503050406030204" pitchFamily="18" charset="0"/>
-                          </a:rPr>
-                        </m:ctrlPr>
-                      </m:fPr>
-                      <m:num>
-                        <m:r>
-                          <a:rPr lang="en-US" sz="2000" i="1">
-                            <a:latin typeface="Cambria Math" panose="02040503050406030204" pitchFamily="18" charset="0"/>
-                          </a:rPr>
-                          <m:t>𝑦</m:t>
-                        </m:r>
-                        <m:r>
-                          <a:rPr lang="en-US" sz="2000" i="1">
-                            <a:latin typeface="Cambria Math" panose="02040503050406030204" pitchFamily="18" charset="0"/>
-                          </a:rPr>
-                          <m:t>(</m:t>
-                        </m:r>
-                        <m:r>
-                          <a:rPr lang="en-US" sz="2000" i="1">
-                            <a:latin typeface="Cambria Math" panose="02040503050406030204" pitchFamily="18" charset="0"/>
-                          </a:rPr>
-                          <m:t>𝑛</m:t>
-                        </m:r>
-                        <m:r>
-                          <a:rPr lang="en-US" sz="2000" i="1">
-                            <a:latin typeface="Cambria Math" panose="02040503050406030204" pitchFamily="18" charset="0"/>
-                          </a:rPr>
-                          <m:t>)−</m:t>
-                        </m:r>
-                        <m:r>
-                          <a:rPr lang="en-US" sz="2000" i="1">
-                            <a:latin typeface="Cambria Math" panose="02040503050406030204" pitchFamily="18" charset="0"/>
-                          </a:rPr>
-                          <m:t>𝑚𝑒𝑑𝑖𝑎𝑛</m:t>
-                        </m:r>
-                        <m:r>
-                          <a:rPr lang="en-US" sz="2000" i="1">
-                            <a:latin typeface="Cambria Math" panose="02040503050406030204" pitchFamily="18" charset="0"/>
-                          </a:rPr>
-                          <m:t>(</m:t>
-                        </m:r>
-                        <m:sSub>
-                          <m:sSubPr>
-                            <m:ctrlPr>
-                              <a:rPr lang="ru-RU" sz="2000" i="1">
-                                <a:latin typeface="Cambria Math" panose="02040503050406030204" pitchFamily="18" charset="0"/>
-                              </a:rPr>
-                            </m:ctrlPr>
-                          </m:sSubPr>
-                          <m:e>
-                            <m:r>
-                              <a:rPr lang="en-US" sz="2000" i="1">
-                                <a:latin typeface="Cambria Math" panose="02040503050406030204" pitchFamily="18" charset="0"/>
-                              </a:rPr>
-                              <m:t>𝑦</m:t>
-                            </m:r>
-                          </m:e>
-                          <m:sub>
-                            <m:r>
-                              <a:rPr lang="en-US" sz="2000" i="1">
-                                <a:latin typeface="Cambria Math" panose="02040503050406030204" pitchFamily="18" charset="0"/>
-                              </a:rPr>
-                              <m:t>𝑛𝑜𝑟𝑚</m:t>
-                            </m:r>
-                          </m:sub>
-                        </m:sSub>
-                        <m:r>
-                          <a:rPr lang="en-US" sz="2000" i="1">
-                            <a:latin typeface="Cambria Math" panose="02040503050406030204" pitchFamily="18" charset="0"/>
-                          </a:rPr>
-                          <m:t>)</m:t>
-                        </m:r>
-                      </m:num>
-                      <m:den>
-                        <m:r>
-                          <a:rPr lang="en-US" sz="2000" i="1">
-                            <a:latin typeface="Cambria Math" panose="02040503050406030204" pitchFamily="18" charset="0"/>
-                          </a:rPr>
-                          <m:t>𝑀𝐴𝐷</m:t>
-                        </m:r>
-                        <m:r>
-                          <a:rPr lang="en-US" sz="2000" i="1">
-                            <a:latin typeface="Cambria Math" panose="02040503050406030204" pitchFamily="18" charset="0"/>
-                          </a:rPr>
-                          <m:t>(</m:t>
-                        </m:r>
-                        <m:sSub>
-                          <m:sSubPr>
-                            <m:ctrlPr>
-                              <a:rPr lang="ru-RU" sz="2000" i="1">
-                                <a:latin typeface="Cambria Math" panose="02040503050406030204" pitchFamily="18" charset="0"/>
-                              </a:rPr>
-                            </m:ctrlPr>
-                          </m:sSubPr>
-                          <m:e>
-                            <m:r>
-                              <a:rPr lang="en-US" sz="2000" i="1">
-                                <a:latin typeface="Cambria Math" panose="02040503050406030204" pitchFamily="18" charset="0"/>
-                              </a:rPr>
-                              <m:t>𝑦</m:t>
-                            </m:r>
-                          </m:e>
-                          <m:sub>
-                            <m:r>
-                              <a:rPr lang="en-US" sz="2000" i="1">
-                                <a:latin typeface="Cambria Math" panose="02040503050406030204" pitchFamily="18" charset="0"/>
-                              </a:rPr>
-                              <m:t>𝑛𝑜𝑟𝑚</m:t>
-                            </m:r>
-                          </m:sub>
-                        </m:sSub>
-                        <m:r>
-                          <a:rPr lang="en-US" sz="2000" i="1">
-                            <a:latin typeface="Cambria Math" panose="02040503050406030204" pitchFamily="18" charset="0"/>
-                          </a:rPr>
-                          <m:t>)</m:t>
-                        </m:r>
-                      </m:den>
-                    </m:f>
-                    <m:r>
-                      <a:rPr lang="en-US" sz="2000" i="1">
-                        <a:latin typeface="Cambria Math" panose="02040503050406030204" pitchFamily="18" charset="0"/>
-                      </a:rPr>
-                      <m:t>,</m:t>
-                    </m:r>
-                  </m:oMath>
+                  <m:oMathPara xmlns:m="http://schemas.openxmlformats.org/officeDocument/2006/math">
+                    <m:oMathParaPr>
+                      <m:jc m:val="centerGroup"/>
+                    </m:oMathParaPr>
+                    <m:oMath xmlns:m="http://schemas.openxmlformats.org/officeDocument/2006/math">
+                      <m:sSub>
+                        <m:sSubPr>
+                          <m:ctrlPr>
+                            <a:rPr lang="ru-RU" sz="2000" i="1">
+                              <a:latin typeface="Cambria Math" panose="02040503050406030204" pitchFamily="18" charset="0"/>
+                            </a:rPr>
+                          </m:ctrlPr>
+                        </m:sSubPr>
+                        <m:e>
+                          <m:r>
+                            <a:rPr lang="en-US" sz="2000" i="1">
+                              <a:latin typeface="Cambria Math" panose="02040503050406030204" pitchFamily="18" charset="0"/>
+                            </a:rPr>
+                            <m:t>𝑧</m:t>
+                          </m:r>
+                        </m:e>
+                        <m:sub>
+                          <m:r>
+                            <a:rPr lang="en-US" sz="2000" i="1">
+                              <a:latin typeface="Cambria Math" panose="02040503050406030204" pitchFamily="18" charset="0"/>
+                            </a:rPr>
+                            <m:t>𝑚𝑜𝑑𝑖𝑓</m:t>
+                          </m:r>
+                        </m:sub>
+                      </m:sSub>
+                      <m:r>
+                        <a:rPr lang="en-US" sz="2000" i="1">
+                          <a:latin typeface="Cambria Math" panose="02040503050406030204" pitchFamily="18" charset="0"/>
+                        </a:rPr>
+                        <m:t>=0.6745</m:t>
+                      </m:r>
+                      <m:f>
+                        <m:fPr>
+                          <m:ctrlPr>
+                            <a:rPr lang="ru-RU" sz="2000" i="1">
+                              <a:latin typeface="Cambria Math" panose="02040503050406030204" pitchFamily="18" charset="0"/>
+                            </a:rPr>
+                          </m:ctrlPr>
+                        </m:fPr>
+                        <m:num>
+                          <m:r>
+                            <a:rPr lang="en-US" sz="2000" i="1">
+                              <a:latin typeface="Cambria Math" panose="02040503050406030204" pitchFamily="18" charset="0"/>
+                            </a:rPr>
+                            <m:t>𝑦</m:t>
+                          </m:r>
+                          <m:r>
+                            <a:rPr lang="en-US" sz="2000" i="1">
+                              <a:latin typeface="Cambria Math" panose="02040503050406030204" pitchFamily="18" charset="0"/>
+                            </a:rPr>
+                            <m:t>(</m:t>
+                          </m:r>
+                          <m:r>
+                            <a:rPr lang="en-US" sz="2000" i="1">
+                              <a:latin typeface="Cambria Math" panose="02040503050406030204" pitchFamily="18" charset="0"/>
+                            </a:rPr>
+                            <m:t>𝑛</m:t>
+                          </m:r>
+                          <m:r>
+                            <a:rPr lang="en-US" sz="2000" i="1">
+                              <a:latin typeface="Cambria Math" panose="02040503050406030204" pitchFamily="18" charset="0"/>
+                            </a:rPr>
+                            <m:t>)−</m:t>
+                          </m:r>
+                          <m:r>
+                            <a:rPr lang="en-US" sz="2000" i="1">
+                              <a:latin typeface="Cambria Math" panose="02040503050406030204" pitchFamily="18" charset="0"/>
+                            </a:rPr>
+                            <m:t>𝑚𝑒𝑑𝑖𝑎𝑛</m:t>
+                          </m:r>
+                          <m:r>
+                            <a:rPr lang="en-US" sz="2000" i="1">
+                              <a:latin typeface="Cambria Math" panose="02040503050406030204" pitchFamily="18" charset="0"/>
+                            </a:rPr>
+                            <m:t>(</m:t>
+                          </m:r>
+                          <m:sSub>
+                            <m:sSubPr>
+                              <m:ctrlPr>
+                                <a:rPr lang="ru-RU" sz="2000" i="1">
+                                  <a:latin typeface="Cambria Math" panose="02040503050406030204" pitchFamily="18" charset="0"/>
+                                </a:rPr>
+                              </m:ctrlPr>
+                            </m:sSubPr>
+                            <m:e>
+                              <m:r>
+                                <a:rPr lang="en-US" sz="2000" i="1">
+                                  <a:latin typeface="Cambria Math" panose="02040503050406030204" pitchFamily="18" charset="0"/>
+                                </a:rPr>
+                                <m:t>𝑦</m:t>
+                              </m:r>
+                            </m:e>
+                            <m:sub>
+                              <m:r>
+                                <a:rPr lang="en-US" sz="2000" i="1">
+                                  <a:latin typeface="Cambria Math" panose="02040503050406030204" pitchFamily="18" charset="0"/>
+                                </a:rPr>
+                                <m:t>𝑛𝑜𝑟𝑚</m:t>
+                              </m:r>
+                            </m:sub>
+                          </m:sSub>
+                          <m:r>
+                            <a:rPr lang="en-US" sz="2000" i="1">
+                              <a:latin typeface="Cambria Math" panose="02040503050406030204" pitchFamily="18" charset="0"/>
+                            </a:rPr>
+                            <m:t>)</m:t>
+                          </m:r>
+                        </m:num>
+                        <m:den>
+                          <m:r>
+                            <a:rPr lang="en-US" sz="2000" i="1">
+                              <a:latin typeface="Cambria Math" panose="02040503050406030204" pitchFamily="18" charset="0"/>
+                            </a:rPr>
+                            <m:t>𝑀𝐴𝐷</m:t>
+                          </m:r>
+                          <m:r>
+                            <a:rPr lang="en-US" sz="2000" i="1">
+                              <a:latin typeface="Cambria Math" panose="02040503050406030204" pitchFamily="18" charset="0"/>
+                            </a:rPr>
+                            <m:t>(</m:t>
+                          </m:r>
+                          <m:sSub>
+                            <m:sSubPr>
+                              <m:ctrlPr>
+                                <a:rPr lang="ru-RU" sz="2000" i="1">
+                                  <a:latin typeface="Cambria Math" panose="02040503050406030204" pitchFamily="18" charset="0"/>
+                                </a:rPr>
+                              </m:ctrlPr>
+                            </m:sSubPr>
+                            <m:e>
+                              <m:r>
+                                <a:rPr lang="en-US" sz="2000" i="1">
+                                  <a:latin typeface="Cambria Math" panose="02040503050406030204" pitchFamily="18" charset="0"/>
+                                </a:rPr>
+                                <m:t>𝑦</m:t>
+                              </m:r>
+                            </m:e>
+                            <m:sub>
+                              <m:r>
+                                <a:rPr lang="en-US" sz="2000" i="1">
+                                  <a:latin typeface="Cambria Math" panose="02040503050406030204" pitchFamily="18" charset="0"/>
+                                </a:rPr>
+                                <m:t>𝑛𝑜𝑟𝑚</m:t>
+                              </m:r>
+                            </m:sub>
+                          </m:sSub>
+                          <m:r>
+                            <a:rPr lang="en-US" sz="2000" i="1">
+                              <a:latin typeface="Cambria Math" panose="02040503050406030204" pitchFamily="18" charset="0"/>
+                            </a:rPr>
+                            <m:t>)</m:t>
+                          </m:r>
+                        </m:den>
+                      </m:f>
+                      <m:r>
+                        <a:rPr lang="en-US" sz="2000" i="1">
+                          <a:latin typeface="Cambria Math" panose="02040503050406030204" pitchFamily="18" charset="0"/>
+                        </a:rPr>
+                        <m:t>,</m:t>
+                      </m:r>
+                    </m:oMath>
+                  </m:oMathPara>
                 </a14:m>
                 <a:endParaRPr lang="ru-RU" sz="2000" dirty="0"/>
               </a:p>
@@ -9705,7 +9507,7 @@
             </p:txBody>
           </p:sp>
         </mc:Choice>
-        <mc:Fallback xmlns="">
+        <mc:Fallback>
           <p:sp>
             <p:nvSpPr>
               <p:cNvPr id="3" name="Объект 2"/>
@@ -11740,7 +11542,7 @@
           <a:bodyPr/>
           <a:lstStyle/>
           <a:p>
-            <a:pPr algn="l" rtl="0"/>
+            <a:pPr algn="ctr" rtl="0"/>
             <a:r>
               <a:rPr lang="en-US" b="1" dirty="0"/>
               <a:t>Обнаружение аномалий</a:t>
@@ -11811,46 +11613,6 @@
           <a:p>
             <a:pPr algn="l" rtl="0"/>
             <a:endParaRPr lang="ru-RU" sz="2000" dirty="0"/>
-          </a:p>
-        </p:txBody>
-      </p:sp>
-      <p:sp>
-        <p:nvSpPr>
-          <p:cNvPr id="5" name="AutoShape 3" descr="image.png"/>
-          <p:cNvSpPr>
-            <a:spLocks noChangeAspect="1" noChangeArrowheads="1"/>
-          </p:cNvSpPr>
-          <p:nvPr/>
-        </p:nvSpPr>
-        <p:spPr bwMode="auto">
-          <a:xfrm>
-            <a:off x="155575" y="-144463"/>
-            <a:ext cx="304800" cy="304801"/>
-          </a:xfrm>
-          <a:prstGeom prst="rect">
-            <a:avLst/>
-          </a:prstGeom>
-          <a:noFill/>
-          <a:extLst>
-            <a:ext uri="{909E8E84-426E-40DD-AFC4-6F175D3DCCD1}">
-              <a14:hiddenFill xmlns:a14="http://schemas.microsoft.com/office/drawing/2010/main">
-                <a:solidFill>
-                  <a:srgbClr val="FFFFFF"/>
-                </a:solidFill>
-              </a14:hiddenFill>
-            </a:ext>
-          </a:extLst>
-        </p:spPr>
-        <p:txBody>
-          <a:bodyPr vert="horz" wrap="square" lIns="91440" tIns="45720" rIns="91440" bIns="45720" numCol="1" anchor="t" anchorCtr="0" compatLnSpc="1">
-            <a:prstTxWarp prst="textNoShape">
-              <a:avLst/>
-            </a:prstTxWarp>
-          </a:bodyPr>
-          <a:lstStyle/>
-          <a:p>
-            <a:pPr algn="l" rtl="0"/>
-            <a:endParaRPr lang="ru-RU"/>
           </a:p>
         </p:txBody>
       </p:sp>
@@ -14161,7 +13923,7 @@
         <p:spPr>
           <a:xfrm>
             <a:off x="355600" y="1143000"/>
-            <a:ext cx="10998200" cy="5033963"/>
+            <a:ext cx="11207750" cy="5076825"/>
           </a:xfrm>
         </p:spPr>
         <p:txBody>
@@ -14589,7 +14351,7 @@
         </p:nvSpPr>
         <p:spPr>
           <a:xfrm>
-            <a:off x="838200" y="365125"/>
+            <a:off x="838200" y="201298"/>
             <a:ext cx="10515600" cy="777875"/>
           </a:xfrm>
         </p:spPr>
@@ -14599,24 +14361,24 @@
           </a:bodyPr>
           <a:lstStyle/>
           <a:p>
-            <a:pPr algn="l" rtl="0"/>
-            <a:r>
-              <a:rPr lang="en-US" sz="3600" b="1" dirty="0" err="1"/>
+            <a:pPr algn="ctr" rtl="0"/>
+            <a:r>
+              <a:rPr lang="en-US" b="1" dirty="0" err="1"/>
               <a:t>Полу-контролируемые</a:t>
             </a:r>
             <a:r>
-              <a:rPr lang="en-US" sz="3600" b="1" dirty="0"/>
+              <a:rPr lang="en-US" b="1" dirty="0"/>
               <a:t> методы. </a:t>
             </a:r>
             <a:r>
-              <a:rPr lang="ru-RU" altLang="ru-RU" sz="3600" b="1" dirty="0"/>
+              <a:rPr lang="ru-RU" altLang="ru-RU" b="1" dirty="0"/>
               <a:t> OSVM</a:t>
             </a:r>
             <a:r>
-              <a:rPr lang="en-US" sz="3600" b="1" dirty="0"/>
+              <a:rPr lang="en-US" b="1" dirty="0"/>
               <a:t> </a:t>
             </a:r>
-            <a:endParaRPr lang="ru-RU" sz="3600" b="1" dirty="0"/>
+            <a:endParaRPr lang="ru-RU" b="1" dirty="0"/>
           </a:p>
         </p:txBody>
       </p:sp>
@@ -14632,8 +14394,8 @@
         </p:nvSpPr>
         <p:spPr>
           <a:xfrm>
-            <a:off x="355600" y="1143000"/>
-            <a:ext cx="10998200" cy="5033963"/>
+            <a:off x="155575" y="867732"/>
+            <a:ext cx="11198225" cy="5253038"/>
           </a:xfrm>
         </p:spPr>
         <p:txBody>
@@ -14642,14 +14404,28 @@
           </a:bodyPr>
           <a:lstStyle/>
           <a:p>
-            <a:pPr lvl="0"/>
+            <a:pPr lvl="0">
+              <a:lnSpc>
+                <a:spcPct val="100000"/>
+              </a:lnSpc>
+              <a:spcBef>
+                <a:spcPts val="600"/>
+              </a:spcBef>
+            </a:pPr>
             <a:r>
               <a:rPr lang="ru-RU" sz="1800" dirty="0"/>
               <a:t>Этот метод основан на идее построения только одного опорного вектора (или одной нелинейной границы решения), который отделяет нормальные данные (помеченные как нормальные) от других.</a:t>
             </a:r>
           </a:p>
           <a:p>
-            <a:pPr lvl="0"/>
+            <a:pPr lvl="0">
+              <a:lnSpc>
+                <a:spcPct val="100000"/>
+              </a:lnSpc>
+              <a:spcBef>
+                <a:spcPts val="600"/>
+              </a:spcBef>
+            </a:pPr>
             <a:r>
               <a:rPr lang="ru-RU" sz="1800" dirty="0"/>
               <a:t>OSVM требует использования ядра </a:t>
@@ -14672,7 +14448,14 @@
             </a:r>
           </a:p>
           <a:p>
-            <a:pPr lvl="0"/>
+            <a:pPr lvl="0">
+              <a:lnSpc>
+                <a:spcPct val="100000"/>
+              </a:lnSpc>
+              <a:spcBef>
+                <a:spcPts val="600"/>
+              </a:spcBef>
+            </a:pPr>
             <a:r>
               <a:rPr lang="ru-RU" sz="1800" dirty="0"/>
               <a:t>Решением проблемы OSVM является гиперплоскость (опорный вектор), которая максимизирует расстояние от размеченных данных до исходной точки (нулевой точки). В этом случае объем этой </a:t>
@@ -14687,14 +14470,28 @@
             </a:r>
           </a:p>
           <a:p>
-            <a:pPr lvl="0"/>
+            <a:pPr lvl="0">
+              <a:lnSpc>
+                <a:spcPct val="100000"/>
+              </a:lnSpc>
+              <a:spcBef>
+                <a:spcPts val="600"/>
+              </a:spcBef>
+            </a:pPr>
             <a:r>
               <a:rPr lang="ru-RU" sz="1800" dirty="0"/>
               <a:t>Метод очень чувствителен к ошибкам в размеченных данных. Фактически метод можно рассматривать как задачу одного класса и остальных.</a:t>
             </a:r>
           </a:p>
           <a:p>
-            <a:pPr lvl="0"/>
+            <a:pPr lvl="0">
+              <a:lnSpc>
+                <a:spcPct val="100000"/>
+              </a:lnSpc>
+              <a:spcBef>
+                <a:spcPts val="600"/>
+              </a:spcBef>
+            </a:pPr>
             <a:r>
               <a:rPr lang="ru-RU" sz="1800" dirty="0"/>
               <a:t>В OSVM мы неявно предполагаем, что после ядра аномальные данные будут сильно распределены в области, близкой к нулю.</a:t>
@@ -14798,7 +14595,7 @@
         </p:blipFill>
         <p:spPr>
           <a:xfrm>
-            <a:off x="6251028" y="4188783"/>
+            <a:off x="7703902" y="4188783"/>
             <a:ext cx="4173773" cy="2498301"/>
           </a:xfrm>
           <a:prstGeom prst="rect">
@@ -15134,14 +14931,18 @@
           </a:bodyPr>
           <a:lstStyle/>
           <a:p>
-            <a:pPr algn="l" rtl="0"/>
-            <a:r>
-              <a:rPr lang="ru-RU" sz="3600" b="1" dirty="0"/>
-              <a:t>. </a:t>
+            <a:pPr algn="ctr" rtl="0"/>
+            <a:r>
+              <a:rPr lang="en-US" sz="3600" b="1" dirty="0" err="1" smtClean="0"/>
+              <a:t>Полу-контролируемые</a:t>
+            </a:r>
+            <a:r>
+              <a:rPr lang="en-US" sz="3600" b="1" dirty="0" smtClean="0"/>
+              <a:t> </a:t>
             </a:r>
             <a:r>
               <a:rPr lang="en-US" sz="3600" b="1" dirty="0"/>
-              <a:t>Полу-контролируемые методы. </a:t>
+              <a:t>методы. </a:t>
             </a:r>
             <a:r>
               <a:rPr lang="ru-RU" altLang="ru-RU" sz="3600" b="1" dirty="0"/>
@@ -15211,7 +15012,7 @@
         </p:nvSpPr>
         <p:spPr bwMode="auto">
           <a:xfrm>
-            <a:off x="295275" y="1192212"/>
+            <a:off x="228600" y="1095375"/>
             <a:ext cx="11029950" cy="5233988"/>
           </a:xfrm>
           <a:prstGeom prst="rect">
@@ -15269,7 +15070,7 @@
         </p:blipFill>
         <p:spPr>
           <a:xfrm>
-            <a:off x="6032500" y="3599053"/>
+            <a:off x="6232525" y="3189478"/>
             <a:ext cx="5715000" cy="2827147"/>
           </a:xfrm>
           <a:prstGeom prst="rect">
@@ -15293,7 +15094,7 @@
         </p:blipFill>
         <p:spPr>
           <a:xfrm>
-            <a:off x="295275" y="2038018"/>
+            <a:off x="307975" y="1951039"/>
             <a:ext cx="5543550" cy="3122069"/>
           </a:xfrm>
           <a:prstGeom prst="rect">
@@ -15309,8 +15110,8 @@
         </p:nvSpPr>
         <p:spPr>
           <a:xfrm>
-            <a:off x="307975" y="5169945"/>
-            <a:ext cx="5711825" cy="923330"/>
+            <a:off x="228601" y="5169945"/>
+            <a:ext cx="5908674" cy="1323439"/>
           </a:xfrm>
           <a:prstGeom prst="rect">
             <a:avLst/>
@@ -15324,7 +15125,7 @@
           <a:p>
             <a:pPr algn="l" rtl="0"/>
             <a:r>
-              <a:rPr lang="en-US" i="1" dirty="0">
+              <a:rPr lang="en-US" sz="2000" i="1" dirty="0">
                 <a:solidFill>
                   <a:srgbClr val="000000"/>
                 </a:solidFill>
@@ -15332,7 +15133,7 @@
               <a:t>Примечание</a:t>
             </a:r>
             <a:r>
-              <a:rPr lang="en-US" dirty="0">
+              <a:rPr lang="en-US" sz="2000" dirty="0">
                 <a:solidFill>
                   <a:srgbClr val="000000"/>
                 </a:solidFill>
@@ -15340,7 +15141,7 @@
               <a:t> В задаче обнаружения аномалий </a:t>
             </a:r>
             <a:r>
-              <a:rPr lang="en-US" dirty="0" err="1">
+              <a:rPr lang="en-US" sz="2000" dirty="0" err="1">
                 <a:solidFill>
                   <a:srgbClr val="000000"/>
                 </a:solidFill>
@@ -15348,14 +15149,14 @@
               <a:t>Автоэнкодер</a:t>
             </a:r>
             <a:r>
-              <a:rPr lang="en-US" dirty="0">
+              <a:rPr lang="en-US" sz="2000" dirty="0">
                 <a:solidFill>
                   <a:srgbClr val="000000"/>
                 </a:solidFill>
               </a:rPr>
               <a:t> можно рассматривать как частично контролируемую задачу, если обучение выполняется только на нормальных данных.</a:t>
             </a:r>
-            <a:endParaRPr lang="ru-RU" dirty="0"/>
+            <a:endParaRPr lang="ru-RU" sz="2000" dirty="0"/>
           </a:p>
         </p:txBody>
       </p:sp>
@@ -15408,7 +15209,7 @@
         </p:nvSpPr>
         <p:spPr>
           <a:xfrm>
-            <a:off x="838200" y="365125"/>
+            <a:off x="800100" y="165100"/>
             <a:ext cx="10515600" cy="777875"/>
           </a:xfrm>
         </p:spPr>
@@ -15418,14 +15219,10 @@
           </a:bodyPr>
           <a:lstStyle/>
           <a:p>
-            <a:pPr algn="l" rtl="0"/>
-            <a:r>
-              <a:rPr lang="ru-RU" sz="3600" b="1"/>
-              <a:t>Методы </a:t>
-            </a:r>
-            <a:r>
-              <a:rPr lang="ru-RU" sz="3600" b="1" dirty="0"/>
-              <a:t>с учителем</a:t>
+            <a:pPr algn="ctr" rtl="0"/>
+            <a:r>
+              <a:rPr lang="ru-RU" b="1" dirty="0"/>
+              <a:t>Методы с учителем</a:t>
             </a:r>
           </a:p>
         </p:txBody>
@@ -15482,8 +15279,8 @@
         </p:nvSpPr>
         <p:spPr bwMode="auto">
           <a:xfrm>
-            <a:off x="323850" y="942975"/>
-            <a:ext cx="11029950" cy="5233988"/>
+            <a:off x="307975" y="866775"/>
+            <a:ext cx="11963400" cy="5233988"/>
           </a:xfrm>
           <a:prstGeom prst="rect">
             <a:avLst/>
@@ -15504,85 +15301,85 @@
             <a:prstTxWarp prst="textNoShape">
               <a:avLst/>
             </a:prstTxWarp>
-            <a:normAutofit/>
+            <a:noAutofit/>
           </a:bodyPr>
           <a:lstStyle/>
           <a:p>
             <a:pPr algn="l" rtl="0"/>
             <a:r>
-              <a:rPr lang="ru-RU" sz="2000" b="1" dirty="0"/>
+              <a:rPr lang="ru-RU" sz="2400" b="1" dirty="0"/>
               <a:t>методы с учителем</a:t>
             </a:r>
-            <a:endParaRPr lang="en-US" sz="2000" b="1" dirty="0"/>
+            <a:endParaRPr lang="en-US" sz="2400" b="1" dirty="0"/>
           </a:p>
           <a:p>
             <a:pPr lvl="0"/>
             <a:r>
-              <a:rPr lang="ru-RU" sz="2000" b="1" dirty="0"/>
+              <a:rPr lang="ru-RU" sz="2400" b="1" dirty="0"/>
               <a:t>нейронная сеть и другое машинное обучение</a:t>
             </a:r>
-            <a:endParaRPr lang="ru-RU" sz="2000" dirty="0"/>
+            <a:endParaRPr lang="ru-RU" sz="2400" dirty="0"/>
           </a:p>
           <a:p>
             <a:pPr lvl="0"/>
             <a:r>
-              <a:rPr lang="ru-RU" sz="2000" dirty="0"/>
+              <a:rPr lang="ru-RU" sz="2400" dirty="0"/>
               <a:t>задача может быть решена двумя способами</a:t>
             </a:r>
           </a:p>
           <a:p>
             <a:pPr lvl="0"/>
             <a:r>
-              <a:rPr lang="ru-RU" sz="2000" dirty="0"/>
+              <a:rPr lang="ru-RU" sz="2400" dirty="0"/>
               <a:t>По отклонению все данные разделены на два класса - нормальные данные и аномальные данные.</a:t>
             </a:r>
           </a:p>
           <a:p>
             <a:pPr lvl="0"/>
             <a:r>
-              <a:rPr lang="ru-RU" sz="2000" dirty="0"/>
+              <a:rPr lang="ru-RU" sz="2400" dirty="0"/>
               <a:t>На основе задачи регрессии - путем оценки ошибки прогноза с использованием контролируемых выборок.</a:t>
             </a:r>
           </a:p>
           <a:p>
             <a:pPr lvl="0"/>
             <a:r>
-              <a:rPr lang="ru-RU" sz="2000" i="1" dirty="0"/>
+              <a:rPr lang="ru-RU" sz="2400" i="1" dirty="0"/>
               <a:t>Примечание: В случае, похожем на регрессию, обнаружение аномалии также можно рассматривать как частично контролируемую задачу. Популярные методы обнаружения аномалий на основе контролируемого машинного обучения:</a:t>
             </a:r>
-            <a:endParaRPr lang="ru-RU" sz="2000" dirty="0"/>
+            <a:endParaRPr lang="ru-RU" sz="2400" dirty="0"/>
           </a:p>
           <a:p>
             <a:pPr lvl="1"/>
             <a:r>
-              <a:rPr lang="ru-RU" sz="2000" i="1" dirty="0"/>
+              <a:rPr lang="ru-RU" i="1" dirty="0"/>
               <a:t>SVM</a:t>
             </a:r>
-            <a:endParaRPr lang="ru-RU" sz="2000" dirty="0"/>
+            <a:endParaRPr lang="ru-RU" dirty="0"/>
           </a:p>
           <a:p>
             <a:pPr lvl="1"/>
             <a:r>
-              <a:rPr lang="ru-RU" sz="2000" i="1" dirty="0"/>
+              <a:rPr lang="ru-RU" i="1" dirty="0"/>
               <a:t>Случайный лес</a:t>
             </a:r>
-            <a:endParaRPr lang="ru-RU" sz="2000" dirty="0"/>
+            <a:endParaRPr lang="ru-RU" dirty="0"/>
           </a:p>
           <a:p>
             <a:pPr lvl="1"/>
             <a:r>
-              <a:rPr lang="ru-RU" sz="2000" i="1" dirty="0"/>
+              <a:rPr lang="ru-RU" i="1" dirty="0"/>
               <a:t>k-Ближайшие соседи</a:t>
             </a:r>
-            <a:endParaRPr lang="ru-RU" sz="2000" dirty="0"/>
+            <a:endParaRPr lang="ru-RU" dirty="0"/>
           </a:p>
           <a:p>
             <a:pPr lvl="1"/>
             <a:r>
-              <a:rPr lang="ru-RU" sz="2000" i="1" dirty="0"/>
+              <a:rPr lang="ru-RU" i="1" dirty="0"/>
               <a:t>Нейронная сеть.</a:t>
             </a:r>
-            <a:endParaRPr lang="ru-RU" sz="2000" dirty="0"/>
+            <a:endParaRPr lang="ru-RU" dirty="0"/>
           </a:p>
         </p:txBody>
       </p:sp>
@@ -15625,13 +15422,7 @@
       </p:grpSpPr>
       <p:sp>
         <p:nvSpPr>
-          <p:cNvPr id="2" name="Заголовок 1">
-            <a:extLst>
-              <a:ext uri="{FF2B5EF4-FFF2-40B4-BE49-F238E27FC236}">
-                <a16:creationId xmlns:a16="http://schemas.microsoft.com/office/drawing/2014/main" id="{33185F48-3DE1-7DE8-983E-945C7EA5963C}"/>
-              </a:ext>
-            </a:extLst>
-          </p:cNvPr>
+          <p:cNvPr id="2" name="Заголовок 1"/>
           <p:cNvSpPr>
             <a:spLocks noGrp="1"/>
           </p:cNvSpPr>
@@ -15639,29 +15430,28 @@
             <p:ph type="title"/>
           </p:nvPr>
         </p:nvSpPr>
-        <p:spPr/>
-        <p:txBody>
-          <a:bodyPr>
-            <a:normAutofit/>
-          </a:bodyPr>
-          <a:lstStyle/>
-          <a:p>
-            <a:r>
-              <a:rPr lang="ru-RU" dirty="0"/>
-              <a:t>Полуавтоматические и интерактивные подходы</a:t>
-            </a:r>
-          </a:p>
-        </p:txBody>
-      </p:sp>
-      <p:sp>
-        <p:nvSpPr>
-          <p:cNvPr id="3" name="Объект 2">
-            <a:extLst>
-              <a:ext uri="{FF2B5EF4-FFF2-40B4-BE49-F238E27FC236}">
-                <a16:creationId xmlns:a16="http://schemas.microsoft.com/office/drawing/2014/main" id="{B6D79052-F15B-2C65-2F20-C34C1E14E93E}"/>
-              </a:ext>
-            </a:extLst>
-          </p:cNvPr>
+        <p:spPr>
+          <a:xfrm>
+            <a:off x="571500" y="222250"/>
+            <a:ext cx="10934700" cy="815975"/>
+          </a:xfrm>
+        </p:spPr>
+        <p:txBody>
+          <a:bodyPr/>
+          <a:lstStyle/>
+          <a:p>
+            <a:pPr algn="ctr"/>
+            <a:r>
+              <a:rPr lang="ru-RU" b="1" dirty="0" smtClean="0"/>
+              <a:t>Вопросы для самоконтроля</a:t>
+            </a:r>
+            <a:endParaRPr lang="ru-RU" b="1" dirty="0"/>
+          </a:p>
+        </p:txBody>
+      </p:sp>
+      <p:sp>
+        <p:nvSpPr>
+          <p:cNvPr id="3" name="Объект 2"/>
           <p:cNvSpPr>
             <a:spLocks noGrp="1"/>
           </p:cNvSpPr>
@@ -15669,45 +15459,67 @@
             <p:ph idx="1"/>
           </p:nvPr>
         </p:nvSpPr>
-        <p:spPr/>
+        <p:spPr>
+          <a:xfrm>
+            <a:off x="209550" y="1038225"/>
+            <a:ext cx="11658600" cy="5124449"/>
+          </a:xfrm>
+        </p:spPr>
         <p:txBody>
           <a:bodyPr/>
           <a:lstStyle/>
           <a:p>
-            <a:r>
-              <a:rPr lang="en" dirty="0"/>
-              <a:t>Active Learning: </a:t>
-            </a:r>
+            <a:pPr lvl="0"/>
             <a:r>
               <a:rPr lang="ru-RU" dirty="0"/>
-              <a:t>алгоритм просит разметить "спорные" участки</a:t>
-            </a:r>
-          </a:p>
-          <a:p>
-            <a:r>
-              <a:rPr lang="en" dirty="0"/>
-              <a:t>Weak Supervision (Snorkel): </a:t>
-            </a:r>
-            <a:r>
-              <a:rPr lang="ru-RU" dirty="0"/>
-              <a:t>используй правила экспертов как "слабые метки"</a:t>
-            </a:r>
-          </a:p>
-          <a:p>
-            <a:r>
-              <a:rPr lang="en" dirty="0"/>
-              <a:t>Human-in-the-loop: </a:t>
-            </a:r>
-            <a:r>
-              <a:rPr lang="ru-RU" dirty="0"/>
-              <a:t>система предлагает кандидатов, эксперт подтверждает</a:t>
-            </a:r>
-          </a:p>
-          <a:p>
-            <a:r>
-              <a:rPr lang="ru-RU" dirty="0"/>
-              <a:t> Особенно эффективно при очень редких аномалиях (0.01%). </a:t>
-            </a:r>
+              <a:t>Назовите основные типы аномалий во ВР. Приведите примеры корневых причин, сопутствующих этим аномалиям. Предложите подходы к выявлению таких аномалий. Какие можно использовать метрики для оценки качества таких систем</a:t>
+            </a:r>
+            <a:r>
+              <a:rPr lang="ru-RU" dirty="0" smtClean="0"/>
+              <a:t>?</a:t>
+            </a:r>
+          </a:p>
+          <a:p>
+            <a:pPr lvl="0"/>
+            <a:r>
+              <a:rPr lang="ru-RU" dirty="0" smtClean="0"/>
+              <a:t>Назовите в каких задачах можно использовать методы с полу-учителем, когда это невозможно. Обоснуйте ответ и уточните в каких случаях предпочтительно. Анализ проведите с точки зрения мониторинга. </a:t>
+            </a:r>
+          </a:p>
+          <a:p>
+            <a:pPr lvl="0"/>
+            <a:r>
+              <a:rPr lang="ru-RU" dirty="0" smtClean="0"/>
+              <a:t>Укажите на задачи в которых стоит использовать статистические методы поиска аномалий. Проведите анализ с точки зрения надёжности. </a:t>
+            </a:r>
+          </a:p>
+          <a:p>
+            <a:pPr lvl="0"/>
+            <a:r>
+              <a:rPr lang="ru-RU" dirty="0" smtClean="0"/>
+              <a:t>Смоделируйте </a:t>
+            </a:r>
+            <a:r>
+              <a:rPr lang="ru-RU" dirty="0" err="1" smtClean="0"/>
+              <a:t>пайплайн</a:t>
+            </a:r>
+            <a:r>
+              <a:rPr lang="ru-RU" dirty="0" smtClean="0"/>
+              <a:t> для выбранной задачи с поиском аномалий. Укажите на необходимость предварительной обработки данных при этом. </a:t>
+            </a:r>
+            <a:r>
+              <a:rPr lang="ru-RU" smtClean="0"/>
+              <a:t>Обоснуйте ответ. </a:t>
+            </a:r>
+            <a:endParaRPr lang="ru-RU" dirty="0" smtClean="0"/>
+          </a:p>
+          <a:p>
+            <a:pPr lvl="0"/>
+            <a:endParaRPr lang="ru-RU" dirty="0" smtClean="0"/>
+          </a:p>
+          <a:p>
+            <a:pPr lvl="0"/>
+            <a:endParaRPr lang="ru-RU" dirty="0"/>
           </a:p>
           <a:p>
             <a:endParaRPr lang="ru-RU" dirty="0"/>
@@ -15717,25 +15529,18 @@
     </p:spTree>
     <p:extLst>
       <p:ext uri="{BB962C8B-B14F-4D97-AF65-F5344CB8AC3E}">
-        <p14:creationId xmlns:p14="http://schemas.microsoft.com/office/powerpoint/2010/main" val="1411085046"/>
+        <p14:creationId xmlns:p14="http://schemas.microsoft.com/office/powerpoint/2010/main" val="2865241838"/>
       </p:ext>
     </p:extLst>
   </p:cSld>
   <p:clrMapOvr>
     <a:masterClrMapping/>
   </p:clrMapOvr>
-  <p:timing>
-    <p:tnLst>
-      <p:par>
-        <p:cTn id="1" dur="indefinite" restart="never" nodeType="tmRoot"/>
-      </p:par>
-    </p:tnLst>
-  </p:timing>
 </p:sld>
 </file>
 
 <file path=ppt/slides/slide29.xml><?xml version="1.0" encoding="utf-8"?>
-<p:sld xmlns:a="http://schemas.openxmlformats.org/drawingml/2006/main" xmlns:r="http://schemas.openxmlformats.org/officeDocument/2006/relationships" xmlns:p="http://schemas.openxmlformats.org/presentationml/2006/main" show="0">
+<p:sld xmlns:a="http://schemas.openxmlformats.org/drawingml/2006/main" xmlns:r="http://schemas.openxmlformats.org/officeDocument/2006/relationships" xmlns:p="http://schemas.openxmlformats.org/presentationml/2006/main">
   <p:cSld>
     <p:spTree>
       <p:nvGrpSpPr>
@@ -15753,7 +15558,13 @@
       </p:grpSpPr>
       <p:sp>
         <p:nvSpPr>
-          <p:cNvPr id="2" name="Заголовок 1"/>
+          <p:cNvPr id="2" name="Заголовок 1">
+            <a:extLst>
+              <a:ext uri="{FF2B5EF4-FFF2-40B4-BE49-F238E27FC236}">
+                <a16:creationId xmlns:a16="http://schemas.microsoft.com/office/drawing/2014/main" id="{33185F48-3DE1-7DE8-983E-945C7EA5963C}"/>
+              </a:ext>
+            </a:extLst>
+          </p:cNvPr>
           <p:cNvSpPr>
             <a:spLocks noGrp="1"/>
           </p:cNvSpPr>
@@ -15761,27 +15572,29 @@
             <p:ph type="title"/>
           </p:nvPr>
         </p:nvSpPr>
-        <p:spPr>
-          <a:xfrm>
-            <a:off x="838200" y="365125"/>
-            <a:ext cx="10515600" cy="711645"/>
-          </a:xfrm>
-        </p:spPr>
-        <p:txBody>
-          <a:bodyPr/>
-          <a:lstStyle/>
-          <a:p>
-            <a:pPr algn="l" rtl="0"/>
-            <a:r>
-              <a:rPr lang="en-US" b="1" dirty="0"/>
-              <a:t>Обнаружение аномалий</a:t>
-            </a:r>
-          </a:p>
-        </p:txBody>
-      </p:sp>
-      <p:sp>
-        <p:nvSpPr>
-          <p:cNvPr id="3" name="Объект 2"/>
+        <p:spPr/>
+        <p:txBody>
+          <a:bodyPr>
+            <a:normAutofit/>
+          </a:bodyPr>
+          <a:lstStyle/>
+          <a:p>
+            <a:r>
+              <a:rPr lang="ru-RU" dirty="0"/>
+              <a:t>Полуавтоматические и интерактивные подходы</a:t>
+            </a:r>
+          </a:p>
+        </p:txBody>
+      </p:sp>
+      <p:sp>
+        <p:nvSpPr>
+          <p:cNvPr id="3" name="Объект 2">
+            <a:extLst>
+              <a:ext uri="{FF2B5EF4-FFF2-40B4-BE49-F238E27FC236}">
+                <a16:creationId xmlns:a16="http://schemas.microsoft.com/office/drawing/2014/main" id="{B6D79052-F15B-2C65-2F20-C34C1E14E93E}"/>
+              </a:ext>
+            </a:extLst>
+          </p:cNvPr>
           <p:cNvSpPr>
             <a:spLocks noGrp="1"/>
           </p:cNvSpPr>
@@ -15789,205 +15602,61 @@
             <p:ph idx="1"/>
           </p:nvPr>
         </p:nvSpPr>
-        <p:spPr>
-          <a:xfrm>
-            <a:off x="341831" y="948583"/>
-            <a:ext cx="11263357" cy="5811139"/>
-          </a:xfrm>
-        </p:spPr>
-        <p:txBody>
-          <a:bodyPr>
-            <a:normAutofit/>
-          </a:bodyPr>
-          <a:lstStyle/>
-          <a:p>
-            <a:pPr lvl="0"/>
-            <a:r>
-              <a:rPr lang="ru-RU" sz="2200" b="1" dirty="0"/>
-              <a:t>Причины аномалий в данных временных рядов</a:t>
-            </a:r>
-            <a:endParaRPr lang="ru-RU" sz="2200" dirty="0"/>
-          </a:p>
-          <a:p>
-            <a:pPr lvl="1">
-              <a:lnSpc>
-                <a:spcPct val="100000"/>
-              </a:lnSpc>
-            </a:pPr>
-            <a:r>
-              <a:rPr lang="ru-RU" sz="2200" dirty="0"/>
-              <a:t>Нерегулярные события (которые могут закончится в историческом контексте) </a:t>
-            </a:r>
-          </a:p>
-          <a:p>
-            <a:pPr lvl="2">
-              <a:lnSpc>
-                <a:spcPct val="100000"/>
-              </a:lnSpc>
-            </a:pPr>
-            <a:r>
-              <a:rPr lang="ru-RU" sz="2200" dirty="0"/>
-              <a:t>Выявление локальных отклонений;</a:t>
-            </a:r>
-          </a:p>
-          <a:p>
-            <a:pPr lvl="2">
-              <a:lnSpc>
-                <a:spcPct val="100000"/>
-              </a:lnSpc>
-            </a:pPr>
-            <a:r>
-              <a:rPr lang="ru-RU" sz="2200" dirty="0"/>
-              <a:t>обнаружение глобальных выбросов;</a:t>
-            </a:r>
-          </a:p>
-          <a:p>
-            <a:pPr lvl="1">
-              <a:lnSpc>
-                <a:spcPct val="100000"/>
-              </a:lnSpc>
-            </a:pPr>
-            <a:r>
-              <a:rPr lang="ru-RU" sz="2200" dirty="0"/>
-              <a:t>Обнаружение новизны (возникает как новое поведение в продолжительном и неизвестном контексте), например </a:t>
-            </a:r>
-          </a:p>
-          <a:p>
-            <a:pPr lvl="2">
-              <a:lnSpc>
-                <a:spcPct val="100000"/>
-              </a:lnSpc>
-            </a:pPr>
-            <a:r>
-              <a:rPr lang="ru-RU" sz="2200" dirty="0"/>
-              <a:t>точки смены поведения, </a:t>
-            </a:r>
-          </a:p>
-          <a:p>
-            <a:pPr lvl="2">
-              <a:lnSpc>
-                <a:spcPct val="100000"/>
-              </a:lnSpc>
-            </a:pPr>
-            <a:r>
-              <a:rPr lang="ru-RU" sz="2200" dirty="0"/>
-              <a:t>Появление новых признаков</a:t>
-            </a:r>
-          </a:p>
-          <a:p>
-            <a:pPr lvl="1">
-              <a:lnSpc>
-                <a:spcPct val="100000"/>
-              </a:lnSpc>
-            </a:pPr>
-            <a:r>
-              <a:rPr lang="ru-RU" sz="2200" dirty="0"/>
-              <a:t>Точки перегиба, </a:t>
-            </a:r>
-          </a:p>
-          <a:p>
-            <a:pPr lvl="2">
-              <a:lnSpc>
-                <a:spcPct val="100000"/>
-              </a:lnSpc>
-            </a:pPr>
-            <a:r>
-              <a:rPr lang="ru-RU" sz="2200" dirty="0"/>
-              <a:t>точки значительного влияния;</a:t>
-            </a:r>
-          </a:p>
-          <a:p>
-            <a:pPr lvl="1">
-              <a:lnSpc>
-                <a:spcPct val="100000"/>
-              </a:lnSpc>
-            </a:pPr>
-            <a:endParaRPr lang="ru-RU" sz="2200" dirty="0"/>
-          </a:p>
-        </p:txBody>
-      </p:sp>
-      <p:sp>
-        <p:nvSpPr>
-          <p:cNvPr id="5" name="AutoShape 3" descr="image.png"/>
-          <p:cNvSpPr>
-            <a:spLocks noChangeAspect="1" noChangeArrowheads="1"/>
-          </p:cNvSpPr>
-          <p:nvPr/>
-        </p:nvSpPr>
-        <p:spPr bwMode="auto">
-          <a:xfrm>
-            <a:off x="155575" y="-144463"/>
-            <a:ext cx="304800" cy="304801"/>
-          </a:xfrm>
-          <a:prstGeom prst="rect">
-            <a:avLst/>
-          </a:prstGeom>
-          <a:noFill/>
-          <a:extLst>
-            <a:ext uri="{909E8E84-426E-40DD-AFC4-6F175D3DCCD1}">
-              <a14:hiddenFill xmlns:a14="http://schemas.microsoft.com/office/drawing/2010/main">
-                <a:solidFill>
-                  <a:srgbClr val="FFFFFF"/>
-                </a:solidFill>
-              </a14:hiddenFill>
-            </a:ext>
-          </a:extLst>
-        </p:spPr>
-        <p:txBody>
-          <a:bodyPr vert="horz" wrap="square" lIns="91440" tIns="45720" rIns="91440" bIns="45720" numCol="1" anchor="t" anchorCtr="0" compatLnSpc="1">
-            <a:prstTxWarp prst="textNoShape">
-              <a:avLst/>
-            </a:prstTxWarp>
-          </a:bodyPr>
-          <a:lstStyle/>
-          <a:p>
-            <a:pPr algn="l" rtl="0"/>
-            <a:endParaRPr lang="ru-RU"/>
-          </a:p>
-        </p:txBody>
-      </p:sp>
-      <p:pic>
-        <p:nvPicPr>
-          <p:cNvPr id="8" name="Рисунок 7"/>
-          <p:cNvPicPr>
-            <a:picLocks noChangeAspect="1"/>
-          </p:cNvPicPr>
-          <p:nvPr/>
-        </p:nvPicPr>
-        <p:blipFill>
-          <a:blip r:embed="rId2"/>
-          <a:stretch>
-            <a:fillRect/>
-          </a:stretch>
-        </p:blipFill>
-        <p:spPr>
-          <a:xfrm>
-            <a:off x="6733924" y="2938425"/>
-            <a:ext cx="4619876" cy="3821297"/>
-          </a:xfrm>
-          <a:prstGeom prst="rect">
-            <a:avLst/>
-          </a:prstGeom>
-        </p:spPr>
-      </p:pic>
+        <p:spPr/>
+        <p:txBody>
+          <a:bodyPr/>
+          <a:lstStyle/>
+          <a:p>
+            <a:r>
+              <a:rPr lang="en" dirty="0"/>
+              <a:t>Active Learning: </a:t>
+            </a:r>
+            <a:r>
+              <a:rPr lang="ru-RU" dirty="0"/>
+              <a:t>алгоритм просит разметить "спорные" участки</a:t>
+            </a:r>
+          </a:p>
+          <a:p>
+            <a:r>
+              <a:rPr lang="en" dirty="0"/>
+              <a:t>Weak Supervision (Snorkel): </a:t>
+            </a:r>
+            <a:r>
+              <a:rPr lang="ru-RU" dirty="0"/>
+              <a:t>используй правила экспертов как "слабые метки"</a:t>
+            </a:r>
+          </a:p>
+          <a:p>
+            <a:r>
+              <a:rPr lang="en" dirty="0"/>
+              <a:t>Human-in-the-loop: </a:t>
+            </a:r>
+            <a:r>
+              <a:rPr lang="ru-RU" dirty="0"/>
+              <a:t>система предлагает кандидатов, эксперт подтверждает</a:t>
+            </a:r>
+          </a:p>
+          <a:p>
+            <a:r>
+              <a:rPr lang="ru-RU" dirty="0"/>
+              <a:t> Особенно эффективно при очень редких аномалиях (0.01%). </a:t>
+            </a:r>
+          </a:p>
+          <a:p>
+            <a:endParaRPr lang="ru-RU" dirty="0"/>
+          </a:p>
+        </p:txBody>
+      </p:sp>
     </p:spTree>
     <p:extLst>
       <p:ext uri="{BB962C8B-B14F-4D97-AF65-F5344CB8AC3E}">
-        <p14:creationId xmlns:p14="http://schemas.microsoft.com/office/powerpoint/2010/main" val="1989167017"/>
+        <p14:creationId xmlns:p14="http://schemas.microsoft.com/office/powerpoint/2010/main" val="1411085046"/>
       </p:ext>
     </p:extLst>
   </p:cSld>
   <p:clrMapOvr>
     <a:masterClrMapping/>
   </p:clrMapOvr>
-  <mc:AlternateContent xmlns:mc="http://schemas.openxmlformats.org/markup-compatibility/2006">
-    <mc:Choice xmlns:p14="http://schemas.microsoft.com/office/powerpoint/2010/main" Requires="p14">
-      <p:transition spd="slow" p14:dur="2000"/>
-    </mc:Choice>
-    <mc:Fallback>
-      <p:transition spd="slow"/>
-    </mc:Fallback>
-  </mc:AlternateContent>
   <p:timing>
     <p:tnLst>
       <p:par>
@@ -16035,7 +15704,7 @@
           <a:bodyPr/>
           <a:lstStyle/>
           <a:p>
-            <a:pPr algn="l" rtl="0"/>
+            <a:pPr algn="ctr" rtl="0"/>
             <a:r>
               <a:rPr lang="en-US" b="1" dirty="0"/>
               <a:t>Обнаружение аномалий</a:t>
@@ -16306,46 +15975,6 @@
               </a:spcAft>
             </a:pPr>
             <a:endParaRPr lang="ru-RU" sz="2200" dirty="0"/>
-          </a:p>
-        </p:txBody>
-      </p:sp>
-      <p:sp>
-        <p:nvSpPr>
-          <p:cNvPr id="5" name="AutoShape 3" descr="image.png"/>
-          <p:cNvSpPr>
-            <a:spLocks noChangeAspect="1" noChangeArrowheads="1"/>
-          </p:cNvSpPr>
-          <p:nvPr/>
-        </p:nvSpPr>
-        <p:spPr bwMode="auto">
-          <a:xfrm>
-            <a:off x="155575" y="-144463"/>
-            <a:ext cx="304800" cy="304801"/>
-          </a:xfrm>
-          <a:prstGeom prst="rect">
-            <a:avLst/>
-          </a:prstGeom>
-          <a:noFill/>
-          <a:extLst>
-            <a:ext uri="{909E8E84-426E-40DD-AFC4-6F175D3DCCD1}">
-              <a14:hiddenFill xmlns:a14="http://schemas.microsoft.com/office/drawing/2010/main">
-                <a:solidFill>
-                  <a:srgbClr val="FFFFFF"/>
-                </a:solidFill>
-              </a14:hiddenFill>
-            </a:ext>
-          </a:extLst>
-        </p:spPr>
-        <p:txBody>
-          <a:bodyPr vert="horz" wrap="square" lIns="91440" tIns="45720" rIns="91440" bIns="45720" numCol="1" anchor="t" anchorCtr="0" compatLnSpc="1">
-            <a:prstTxWarp prst="textNoShape">
-              <a:avLst/>
-            </a:prstTxWarp>
-          </a:bodyPr>
-          <a:lstStyle/>
-          <a:p>
-            <a:pPr algn="l" rtl="0"/>
-            <a:endParaRPr lang="ru-RU"/>
           </a:p>
         </p:txBody>
       </p:sp>
@@ -17305,13 +16934,7 @@
       </p:grpSpPr>
       <p:sp>
         <p:nvSpPr>
-          <p:cNvPr id="2" name="Заголовок 1">
-            <a:extLst>
-              <a:ext uri="{FF2B5EF4-FFF2-40B4-BE49-F238E27FC236}">
-                <a16:creationId xmlns:a16="http://schemas.microsoft.com/office/drawing/2014/main" id="{214AA6FD-0791-3A60-D1D0-CF6D9F4AEAEE}"/>
-              </a:ext>
-            </a:extLst>
-          </p:cNvPr>
+          <p:cNvPr id="2" name="Заголовок 1"/>
           <p:cNvSpPr>
             <a:spLocks noGrp="1"/>
           </p:cNvSpPr>
@@ -17321,33 +16944,25 @@
         </p:nvSpPr>
         <p:spPr>
           <a:xfrm>
-            <a:off x="148281" y="365126"/>
-            <a:ext cx="3842951" cy="932333"/>
-          </a:xfrm>
-        </p:spPr>
-        <p:txBody>
-          <a:bodyPr>
-            <a:normAutofit fontScale="90000"/>
-          </a:bodyPr>
-          <a:lstStyle/>
-          <a:p>
-            <a:r>
-              <a:rPr lang="en" b="1" dirty="0"/>
-              <a:t>Taxonomy of AD metrics</a:t>
-            </a:r>
-            <a:endParaRPr lang="ru-RU" dirty="0"/>
-          </a:p>
-        </p:txBody>
-      </p:sp>
-      <p:sp>
-        <p:nvSpPr>
-          <p:cNvPr id="3" name="Объект 2">
-            <a:extLst>
-              <a:ext uri="{FF2B5EF4-FFF2-40B4-BE49-F238E27FC236}">
-                <a16:creationId xmlns:a16="http://schemas.microsoft.com/office/drawing/2014/main" id="{CEDAA5AE-C478-23FC-E405-D7FC6CFFCCB0}"/>
-              </a:ext>
-            </a:extLst>
-          </p:cNvPr>
+            <a:off x="838200" y="365125"/>
+            <a:ext cx="10515600" cy="711645"/>
+          </a:xfrm>
+        </p:spPr>
+        <p:txBody>
+          <a:bodyPr/>
+          <a:lstStyle/>
+          <a:p>
+            <a:pPr algn="l" rtl="0"/>
+            <a:r>
+              <a:rPr lang="en-US" b="1" dirty="0"/>
+              <a:t>Обнаружение аномалий</a:t>
+            </a:r>
+          </a:p>
+        </p:txBody>
+      </p:sp>
+      <p:sp>
+        <p:nvSpPr>
+          <p:cNvPr id="3" name="Объект 2"/>
           <p:cNvSpPr>
             <a:spLocks noGrp="1"/>
           </p:cNvSpPr>
@@ -17357,127 +16972,200 @@
         </p:nvSpPr>
         <p:spPr>
           <a:xfrm>
-            <a:off x="148281" y="1493964"/>
-            <a:ext cx="4170799" cy="4998909"/>
-          </a:xfrm>
-        </p:spPr>
-        <p:txBody>
-          <a:bodyPr/>
-          <a:lstStyle/>
-          <a:p>
-            <a:endParaRPr lang="ru-RU" dirty="0"/>
+            <a:off x="341831" y="948583"/>
+            <a:ext cx="11263357" cy="5811139"/>
+          </a:xfrm>
+        </p:spPr>
+        <p:txBody>
+          <a:bodyPr>
+            <a:normAutofit/>
+          </a:bodyPr>
+          <a:lstStyle/>
+          <a:p>
+            <a:pPr lvl="0"/>
+            <a:r>
+              <a:rPr lang="ru-RU" sz="2200" b="1" dirty="0"/>
+              <a:t>Причины аномалий в данных временных рядов</a:t>
+            </a:r>
+            <a:endParaRPr lang="ru-RU" sz="2200" dirty="0"/>
+          </a:p>
+          <a:p>
+            <a:pPr lvl="1">
+              <a:lnSpc>
+                <a:spcPct val="100000"/>
+              </a:lnSpc>
+            </a:pPr>
+            <a:r>
+              <a:rPr lang="ru-RU" sz="2200" dirty="0"/>
+              <a:t>Нерегулярные события (которые могут закончится в историческом контексте) </a:t>
+            </a:r>
+          </a:p>
+          <a:p>
+            <a:pPr lvl="2">
+              <a:lnSpc>
+                <a:spcPct val="100000"/>
+              </a:lnSpc>
+            </a:pPr>
+            <a:r>
+              <a:rPr lang="ru-RU" sz="2200" dirty="0"/>
+              <a:t>Выявление локальных отклонений;</a:t>
+            </a:r>
+          </a:p>
+          <a:p>
+            <a:pPr lvl="2">
+              <a:lnSpc>
+                <a:spcPct val="100000"/>
+              </a:lnSpc>
+            </a:pPr>
+            <a:r>
+              <a:rPr lang="ru-RU" sz="2200" dirty="0"/>
+              <a:t>обнаружение глобальных выбросов;</a:t>
+            </a:r>
+          </a:p>
+          <a:p>
+            <a:pPr lvl="1">
+              <a:lnSpc>
+                <a:spcPct val="100000"/>
+              </a:lnSpc>
+            </a:pPr>
+            <a:r>
+              <a:rPr lang="ru-RU" sz="2200" dirty="0"/>
+              <a:t>Обнаружение новизны (возникает как новое поведение в продолжительном и неизвестном контексте), например </a:t>
+            </a:r>
+          </a:p>
+          <a:p>
+            <a:pPr lvl="2">
+              <a:lnSpc>
+                <a:spcPct val="100000"/>
+              </a:lnSpc>
+            </a:pPr>
+            <a:r>
+              <a:rPr lang="ru-RU" sz="2200" dirty="0"/>
+              <a:t>точки смены поведения, </a:t>
+            </a:r>
+          </a:p>
+          <a:p>
+            <a:pPr lvl="2">
+              <a:lnSpc>
+                <a:spcPct val="100000"/>
+              </a:lnSpc>
+            </a:pPr>
+            <a:r>
+              <a:rPr lang="ru-RU" sz="2200" dirty="0"/>
+              <a:t>Появление новых признаков</a:t>
+            </a:r>
+          </a:p>
+          <a:p>
+            <a:pPr lvl="1">
+              <a:lnSpc>
+                <a:spcPct val="100000"/>
+              </a:lnSpc>
+            </a:pPr>
+            <a:r>
+              <a:rPr lang="ru-RU" sz="2200" dirty="0"/>
+              <a:t>Точки перегиба, </a:t>
+            </a:r>
+          </a:p>
+          <a:p>
+            <a:pPr lvl="2">
+              <a:lnSpc>
+                <a:spcPct val="100000"/>
+              </a:lnSpc>
+            </a:pPr>
+            <a:r>
+              <a:rPr lang="ru-RU" sz="2200" dirty="0"/>
+              <a:t>точки значительного влияния;</a:t>
+            </a:r>
+          </a:p>
+          <a:p>
+            <a:pPr lvl="1">
+              <a:lnSpc>
+                <a:spcPct val="100000"/>
+              </a:lnSpc>
+            </a:pPr>
+            <a:endParaRPr lang="ru-RU" sz="2200" dirty="0"/>
+          </a:p>
+        </p:txBody>
+      </p:sp>
+      <p:sp>
+        <p:nvSpPr>
+          <p:cNvPr id="5" name="AutoShape 3" descr="image.png"/>
+          <p:cNvSpPr>
+            <a:spLocks noChangeAspect="1" noChangeArrowheads="1"/>
+          </p:cNvSpPr>
+          <p:nvPr/>
+        </p:nvSpPr>
+        <p:spPr bwMode="auto">
+          <a:xfrm>
+            <a:off x="155575" y="-144463"/>
+            <a:ext cx="304800" cy="304801"/>
+          </a:xfrm>
+          <a:prstGeom prst="rect">
+            <a:avLst/>
+          </a:prstGeom>
+          <a:noFill/>
+          <a:extLst>
+            <a:ext uri="{909E8E84-426E-40DD-AFC4-6F175D3DCCD1}">
+              <a14:hiddenFill xmlns:a14="http://schemas.microsoft.com/office/drawing/2010/main">
+                <a:solidFill>
+                  <a:srgbClr val="FFFFFF"/>
+                </a:solidFill>
+              </a14:hiddenFill>
+            </a:ext>
+          </a:extLst>
+        </p:spPr>
+        <p:txBody>
+          <a:bodyPr vert="horz" wrap="square" lIns="91440" tIns="45720" rIns="91440" bIns="45720" numCol="1" anchor="t" anchorCtr="0" compatLnSpc="1">
+            <a:prstTxWarp prst="textNoShape">
+              <a:avLst/>
+            </a:prstTxWarp>
+          </a:bodyPr>
+          <a:lstStyle/>
+          <a:p>
+            <a:pPr algn="l" rtl="0"/>
+            <a:endParaRPr lang="ru-RU"/>
           </a:p>
         </p:txBody>
       </p:sp>
       <p:pic>
         <p:nvPicPr>
-          <p:cNvPr id="3074" name="Picture 2">
-            <a:extLst>
-              <a:ext uri="{FF2B5EF4-FFF2-40B4-BE49-F238E27FC236}">
-                <a16:creationId xmlns:a16="http://schemas.microsoft.com/office/drawing/2014/main" id="{D6A60824-D0B8-F87D-5CA8-8D72ED6BDF6E}"/>
-              </a:ext>
-            </a:extLst>
-          </p:cNvPr>
+          <p:cNvPr id="8" name="Рисунок 7"/>
           <p:cNvPicPr>
-            <a:picLocks noChangeAspect="1" noChangeArrowheads="1"/>
+            <a:picLocks noChangeAspect="1"/>
           </p:cNvPicPr>
           <p:nvPr/>
         </p:nvPicPr>
         <p:blipFill>
-          <a:blip r:embed="rId2">
-            <a:extLst>
-              <a:ext uri="{28A0092B-C50C-407E-A947-70E740481C1C}">
-                <a14:useLocalDpi xmlns:a14="http://schemas.microsoft.com/office/drawing/2010/main" val="0"/>
-              </a:ext>
-            </a:extLst>
-          </a:blip>
-          <a:srcRect/>
+          <a:blip r:embed="rId2"/>
           <a:stretch>
             <a:fillRect/>
           </a:stretch>
         </p:blipFill>
-        <p:spPr bwMode="auto">
-          <a:xfrm>
-            <a:off x="4451178" y="365126"/>
-            <a:ext cx="7592541" cy="5931243"/>
-          </a:xfrm>
-          <a:prstGeom prst="rect">
-            <a:avLst/>
-          </a:prstGeom>
-          <a:noFill/>
-          <a:extLst>
-            <a:ext uri="{909E8E84-426E-40DD-AFC4-6F175D3DCCD1}">
-              <a14:hiddenFill xmlns:a14="http://schemas.microsoft.com/office/drawing/2010/main">
-                <a:solidFill>
-                  <a:srgbClr val="FFFFFF"/>
-                </a:solidFill>
-              </a14:hiddenFill>
-            </a:ext>
-          </a:extLst>
+        <p:spPr>
+          <a:xfrm>
+            <a:off x="6733924" y="2938425"/>
+            <a:ext cx="4619876" cy="3821297"/>
+          </a:xfrm>
+          <a:prstGeom prst="rect">
+            <a:avLst/>
+          </a:prstGeom>
         </p:spPr>
       </p:pic>
-      <p:sp>
-        <p:nvSpPr>
-          <p:cNvPr id="4" name="TextBox 3">
-            <a:extLst>
-              <a:ext uri="{FF2B5EF4-FFF2-40B4-BE49-F238E27FC236}">
-                <a16:creationId xmlns:a16="http://schemas.microsoft.com/office/drawing/2014/main" id="{36B941A0-0C91-6B75-56E5-30613EBA1A77}"/>
-              </a:ext>
-            </a:extLst>
-          </p:cNvPr>
-          <p:cNvSpPr txBox="1"/>
-          <p:nvPr/>
-        </p:nvSpPr>
-        <p:spPr>
-          <a:xfrm>
-            <a:off x="436418" y="6492874"/>
-            <a:ext cx="8306666" cy="276999"/>
-          </a:xfrm>
-          <a:prstGeom prst="rect">
-            <a:avLst/>
-          </a:prstGeom>
-          <a:noFill/>
-        </p:spPr>
-        <p:txBody>
-          <a:bodyPr wrap="square">
-            <a:spAutoFit/>
-          </a:bodyPr>
-          <a:lstStyle/>
-          <a:p>
-            <a:r>
-              <a:rPr lang="ru-RU" sz="1200" dirty="0" err="1"/>
-              <a:t>https</a:t>
-            </a:r>
-            <a:r>
-              <a:rPr lang="ru-RU" sz="1200" dirty="0"/>
-              <a:t>://</a:t>
-            </a:r>
-            <a:r>
-              <a:rPr lang="ru-RU" sz="1200" dirty="0" err="1"/>
-              <a:t>readmedium.com</a:t>
-            </a:r>
-            <a:r>
-              <a:rPr lang="ru-RU" sz="1200" dirty="0"/>
-              <a:t>/a-review-of-anomaly-detection-metrics-with-a-lot-of-related-information-736d88774712</a:t>
-            </a:r>
-          </a:p>
-        </p:txBody>
-      </p:sp>
     </p:spTree>
     <p:extLst>
       <p:ext uri="{BB962C8B-B14F-4D97-AF65-F5344CB8AC3E}">
-        <p14:creationId xmlns:p14="http://schemas.microsoft.com/office/powerpoint/2010/main" val="3242277760"/>
+        <p14:creationId xmlns:p14="http://schemas.microsoft.com/office/powerpoint/2010/main" val="1989167017"/>
       </p:ext>
     </p:extLst>
   </p:cSld>
   <p:clrMapOvr>
     <a:masterClrMapping/>
   </p:clrMapOvr>
-  <mc:AlternateContent xmlns:mc="http://schemas.openxmlformats.org/markup-compatibility/2006">
-    <mc:Choice xmlns:p14="http://schemas.microsoft.com/office/powerpoint/2010/main" Requires="p14">
+  <mc:AlternateContent xmlns:mc="http://schemas.openxmlformats.org/markup-compatibility/2006" xmlns:p14="http://schemas.microsoft.com/office/powerpoint/2010/main">
+    <mc:Choice Requires="p14">
       <p:transition spd="slow" p14:dur="2000"/>
     </mc:Choice>
-    <mc:Fallback>
+    <mc:Fallback xmlns="">
       <p:transition spd="slow"/>
     </mc:Fallback>
   </mc:AlternateContent>
@@ -17510,7 +17198,13 @@
       </p:grpSpPr>
       <p:sp>
         <p:nvSpPr>
-          <p:cNvPr id="2" name="Заголовок 1"/>
+          <p:cNvPr id="2" name="Заголовок 1">
+            <a:extLst>
+              <a:ext uri="{FF2B5EF4-FFF2-40B4-BE49-F238E27FC236}">
+                <a16:creationId xmlns:a16="http://schemas.microsoft.com/office/drawing/2014/main" id="{214AA6FD-0791-3A60-D1D0-CF6D9F4AEAEE}"/>
+              </a:ext>
+            </a:extLst>
+          </p:cNvPr>
           <p:cNvSpPr>
             <a:spLocks noGrp="1"/>
           </p:cNvSpPr>
@@ -17520,44 +17214,85 @@
         </p:nvSpPr>
         <p:spPr>
           <a:xfrm>
-            <a:off x="838200" y="365125"/>
-            <a:ext cx="10515600" cy="711645"/>
+            <a:off x="148281" y="365126"/>
+            <a:ext cx="3842951" cy="932333"/>
           </a:xfrm>
         </p:spPr>
         <p:txBody>
           <a:bodyPr>
-            <a:normAutofit/>
-          </a:bodyPr>
-          <a:lstStyle/>
-          <a:p>
-            <a:pPr algn="l" rtl="0"/>
-            <a:r>
-              <a:rPr lang="en-US" b="1" dirty="0"/>
-              <a:t>Обнаружение аномалий</a:t>
-            </a:r>
-            <a:r>
-              <a:rPr lang="ru-RU" b="1" dirty="0"/>
-              <a:t>. </a:t>
-            </a:r>
-            <a:r>
-              <a:rPr lang="en-US" b="1" dirty="0"/>
-              <a:t>подходы</a:t>
-            </a:r>
-          </a:p>
-        </p:txBody>
-      </p:sp>
-      <p:sp>
-        <p:nvSpPr>
-          <p:cNvPr id="5" name="AutoShape 3" descr="image.png"/>
-          <p:cNvSpPr>
-            <a:spLocks noChangeAspect="1" noChangeArrowheads="1"/>
-          </p:cNvSpPr>
-          <p:nvPr/>
-        </p:nvSpPr>
+            <a:normAutofit fontScale="90000"/>
+          </a:bodyPr>
+          <a:lstStyle/>
+          <a:p>
+            <a:r>
+              <a:rPr lang="en" b="1" dirty="0"/>
+              <a:t>Taxonomy of AD metrics</a:t>
+            </a:r>
+            <a:endParaRPr lang="ru-RU" dirty="0"/>
+          </a:p>
+        </p:txBody>
+      </p:sp>
+      <p:sp>
+        <p:nvSpPr>
+          <p:cNvPr id="3" name="Объект 2">
+            <a:extLst>
+              <a:ext uri="{FF2B5EF4-FFF2-40B4-BE49-F238E27FC236}">
+                <a16:creationId xmlns:a16="http://schemas.microsoft.com/office/drawing/2014/main" id="{CEDAA5AE-C478-23FC-E405-D7FC6CFFCCB0}"/>
+              </a:ext>
+            </a:extLst>
+          </p:cNvPr>
+          <p:cNvSpPr>
+            <a:spLocks noGrp="1"/>
+          </p:cNvSpPr>
+          <p:nvPr>
+            <p:ph idx="1"/>
+          </p:nvPr>
+        </p:nvSpPr>
+        <p:spPr>
+          <a:xfrm>
+            <a:off x="148281" y="1493964"/>
+            <a:ext cx="4170799" cy="4998909"/>
+          </a:xfrm>
+        </p:spPr>
+        <p:txBody>
+          <a:bodyPr/>
+          <a:lstStyle/>
+          <a:p>
+            <a:endParaRPr lang="ru-RU" dirty="0"/>
+          </a:p>
+        </p:txBody>
+      </p:sp>
+      <p:pic>
+        <p:nvPicPr>
+          <p:cNvPr id="3074" name="Picture 2">
+            <a:extLst>
+              <a:ext uri="{FF2B5EF4-FFF2-40B4-BE49-F238E27FC236}">
+                <a16:creationId xmlns:a16="http://schemas.microsoft.com/office/drawing/2014/main" id="{D6A60824-D0B8-F87D-5CA8-8D72ED6BDF6E}"/>
+              </a:ext>
+            </a:extLst>
+          </p:cNvPr>
+          <p:cNvPicPr>
+            <a:picLocks noChangeAspect="1" noChangeArrowheads="1"/>
+          </p:cNvPicPr>
+          <p:nvPr/>
+        </p:nvPicPr>
+        <p:blipFill>
+          <a:blip r:embed="rId2">
+            <a:extLst>
+              <a:ext uri="{28A0092B-C50C-407E-A947-70E740481C1C}">
+                <a14:useLocalDpi xmlns:a14="http://schemas.microsoft.com/office/drawing/2010/main" val="0"/>
+              </a:ext>
+            </a:extLst>
+          </a:blip>
+          <a:srcRect/>
+          <a:stretch>
+            <a:fillRect/>
+          </a:stretch>
+        </p:blipFill>
         <p:spPr bwMode="auto">
           <a:xfrm>
-            <a:off x="155575" y="-144463"/>
-            <a:ext cx="304800" cy="304801"/>
+            <a:off x="4451178" y="365126"/>
+            <a:ext cx="7592541" cy="5931243"/>
           </a:xfrm>
           <a:prstGeom prst="rect">
             <a:avLst/>
@@ -17573,455 +17308,79 @@
             </a:ext>
           </a:extLst>
         </p:spPr>
-        <p:txBody>
-          <a:bodyPr vert="horz" wrap="square" lIns="91440" tIns="45720" rIns="91440" bIns="45720" numCol="1" anchor="t" anchorCtr="0" compatLnSpc="1">
-            <a:prstTxWarp prst="textNoShape">
-              <a:avLst/>
-            </a:prstTxWarp>
-          </a:bodyPr>
-          <a:lstStyle/>
-          <a:p>
-            <a:pPr algn="l" rtl="0"/>
-            <a:endParaRPr lang="ru-RU"/>
-          </a:p>
-        </p:txBody>
-      </p:sp>
-      <p:sp>
-        <p:nvSpPr>
-          <p:cNvPr id="4" name="AutoShape 2" descr="image.png"/>
-          <p:cNvSpPr>
-            <a:spLocks noChangeAspect="1" noChangeArrowheads="1"/>
-          </p:cNvSpPr>
-          <p:nvPr/>
-        </p:nvSpPr>
-        <p:spPr bwMode="auto">
-          <a:xfrm>
-            <a:off x="307975" y="7937"/>
-            <a:ext cx="304800" cy="304801"/>
+      </p:pic>
+      <p:sp>
+        <p:nvSpPr>
+          <p:cNvPr id="4" name="TextBox 3">
+            <a:extLst>
+              <a:ext uri="{FF2B5EF4-FFF2-40B4-BE49-F238E27FC236}">
+                <a16:creationId xmlns:a16="http://schemas.microsoft.com/office/drawing/2014/main" id="{36B941A0-0C91-6B75-56E5-30613EBA1A77}"/>
+              </a:ext>
+            </a:extLst>
+          </p:cNvPr>
+          <p:cNvSpPr txBox="1"/>
+          <p:nvPr/>
+        </p:nvSpPr>
+        <p:spPr>
+          <a:xfrm>
+            <a:off x="436418" y="6492874"/>
+            <a:ext cx="8306666" cy="276999"/>
           </a:xfrm>
           <a:prstGeom prst="rect">
             <a:avLst/>
           </a:prstGeom>
           <a:noFill/>
-          <a:extLst>
-            <a:ext uri="{909E8E84-426E-40DD-AFC4-6F175D3DCCD1}">
-              <a14:hiddenFill xmlns:a14="http://schemas.microsoft.com/office/drawing/2010/main">
-                <a:solidFill>
-                  <a:srgbClr val="FFFFFF"/>
-                </a:solidFill>
-              </a14:hiddenFill>
-            </a:ext>
-          </a:extLst>
-        </p:spPr>
-        <p:txBody>
-          <a:bodyPr vert="horz" wrap="square" lIns="91440" tIns="45720" rIns="91440" bIns="45720" numCol="1" anchor="t" anchorCtr="0" compatLnSpc="1">
-            <a:prstTxWarp prst="textNoShape">
-              <a:avLst/>
-            </a:prstTxWarp>
-          </a:bodyPr>
-          <a:lstStyle/>
-          <a:p>
-            <a:pPr algn="l" rtl="0"/>
-            <a:endParaRPr lang="ru-RU"/>
-          </a:p>
-        </p:txBody>
-      </p:sp>
-      <p:sp>
-        <p:nvSpPr>
-          <p:cNvPr id="7" name="AutoShape 2" descr="image.png"/>
-          <p:cNvSpPr>
-            <a:spLocks noChangeAspect="1" noChangeArrowheads="1"/>
-          </p:cNvSpPr>
-          <p:nvPr/>
-        </p:nvSpPr>
-        <p:spPr bwMode="auto">
-          <a:xfrm>
-            <a:off x="460375" y="160337"/>
-            <a:ext cx="304800" cy="304801"/>
-          </a:xfrm>
-          <a:prstGeom prst="rect">
-            <a:avLst/>
-          </a:prstGeom>
-          <a:noFill/>
-          <a:extLst>
-            <a:ext uri="{909E8E84-426E-40DD-AFC4-6F175D3DCCD1}">
-              <a14:hiddenFill xmlns:a14="http://schemas.microsoft.com/office/drawing/2010/main">
-                <a:solidFill>
-                  <a:srgbClr val="FFFFFF"/>
-                </a:solidFill>
-              </a14:hiddenFill>
-            </a:ext>
-          </a:extLst>
-        </p:spPr>
-        <p:txBody>
-          <a:bodyPr vert="horz" wrap="square" lIns="91440" tIns="45720" rIns="91440" bIns="45720" numCol="1" anchor="t" anchorCtr="0" compatLnSpc="1">
-            <a:prstTxWarp prst="textNoShape">
-              <a:avLst/>
-            </a:prstTxWarp>
-          </a:bodyPr>
-          <a:lstStyle/>
-          <a:p>
-            <a:pPr algn="l" rtl="0"/>
-            <a:endParaRPr lang="ru-RU"/>
-          </a:p>
-        </p:txBody>
-      </p:sp>
-      <p:sp>
-        <p:nvSpPr>
-          <p:cNvPr id="8" name="Объект 7"/>
-          <p:cNvSpPr>
-            <a:spLocks noGrp="1"/>
-          </p:cNvSpPr>
-          <p:nvPr>
-            <p:ph idx="1"/>
-          </p:nvPr>
-        </p:nvSpPr>
-        <p:spPr>
-          <a:xfrm>
-            <a:off x="307975" y="1022350"/>
-            <a:ext cx="11277889" cy="5470525"/>
-          </a:xfrm>
-        </p:spPr>
-        <p:txBody>
-          <a:bodyPr>
-            <a:noAutofit/>
-          </a:bodyPr>
-          <a:lstStyle/>
-          <a:p>
-            <a:pPr marL="342900" lvl="0" indent="-342900"/>
-            <a:r>
-              <a:rPr lang="ru-RU" sz="2200" dirty="0"/>
-              <a:t>В каждом подходе мы должны ввести некоторую метрику для обнаружения аномалий </a:t>
-            </a:r>
-            <a:br>
-              <a:rPr lang="ru-RU" sz="2200" dirty="0"/>
-            </a:br>
-            <a:r>
-              <a:rPr lang="ru-RU" sz="2200" dirty="0"/>
-              <a:t>(в классических статистических термин отклонение). </a:t>
-            </a:r>
-          </a:p>
-          <a:p>
-            <a:pPr marL="800100" lvl="1" indent="-342900"/>
-            <a:r>
-              <a:rPr lang="ru-RU" sz="2200" dirty="0"/>
-              <a:t>То есть мы должны формально описать что такое аномалия.</a:t>
-            </a:r>
-          </a:p>
-          <a:p>
-            <a:pPr marL="800100" lvl="1" indent="-342900"/>
-            <a:r>
-              <a:rPr lang="ru-RU" sz="2200" dirty="0"/>
-              <a:t>Такой метрикой может быть, например:</a:t>
-            </a:r>
-          </a:p>
-          <a:p>
-            <a:pPr marL="1257300" lvl="2" indent="-342900"/>
-            <a:r>
-              <a:rPr lang="ru-RU" sz="2200" dirty="0"/>
-              <a:t>Евклидово расстояние,</a:t>
-            </a:r>
-          </a:p>
-          <a:p>
-            <a:pPr marL="1257300" lvl="2" indent="-342900"/>
-            <a:r>
-              <a:rPr lang="ru-RU" sz="2200" dirty="0"/>
-              <a:t>MAPE (средняя абсолютная ошибка в процентах),</a:t>
-            </a:r>
-          </a:p>
-          <a:p>
-            <a:pPr marL="1257300" lvl="2" indent="-342900"/>
-            <a:r>
-              <a:rPr lang="ru-RU" sz="2200" dirty="0"/>
-              <a:t>Некоторая метрика статистической информации, такая как энтропия или расхождение </a:t>
-            </a:r>
-            <a:r>
-              <a:rPr lang="ru-RU" sz="2200" dirty="0" err="1"/>
-              <a:t>Кульбака-Лейблера</a:t>
-            </a:r>
-            <a:r>
-              <a:rPr lang="ru-RU" sz="2200" dirty="0"/>
-              <a:t>.</a:t>
-            </a:r>
-          </a:p>
-          <a:p>
-            <a:pPr marL="342900" lvl="0" indent="-342900"/>
-            <a:r>
-              <a:rPr lang="ru-RU" sz="2200" dirty="0"/>
-              <a:t>Во всех случаях предполагаемое отклонение, то есть значение ошибки, пропорционально относительной оценки аномалии.</a:t>
-            </a:r>
-          </a:p>
-          <a:p>
-            <a:pPr marL="800100" lvl="1" indent="-342900"/>
-            <a:r>
-              <a:rPr lang="ru-RU" sz="2200" dirty="0"/>
-              <a:t>Если оценка аномалии превышает некоторый установленный порог, это отмечается как аномалия</a:t>
-            </a:r>
-          </a:p>
-          <a:p>
-            <a:pPr marL="1257300" lvl="2" indent="-342900">
-              <a:lnSpc>
-                <a:spcPct val="100000"/>
-              </a:lnSpc>
-              <a:spcBef>
-                <a:spcPts val="600"/>
-              </a:spcBef>
-            </a:pPr>
-            <a:r>
-              <a:rPr lang="ru-RU" sz="2200" i="1" dirty="0"/>
-              <a:t>Отметим,</a:t>
-            </a:r>
-            <a:r>
-              <a:rPr lang="ru-RU" sz="2200" dirty="0"/>
-              <a:t>  что поиск аномалии можно проводить как для полного временного ряда, так и по результатам его </a:t>
-            </a:r>
-            <a:r>
-              <a:rPr lang="ru-RU" sz="2200" b="1" dirty="0"/>
-              <a:t>преобразования</a:t>
-            </a:r>
-            <a:r>
-              <a:rPr lang="ru-RU" sz="2200" dirty="0"/>
-              <a:t>.</a:t>
-            </a:r>
-          </a:p>
-          <a:p>
-            <a:pPr marL="1714500" lvl="3" indent="-342900">
-              <a:lnSpc>
-                <a:spcPct val="100000"/>
-              </a:lnSpc>
-              <a:spcBef>
-                <a:spcPts val="600"/>
-              </a:spcBef>
-            </a:pPr>
-            <a:r>
-              <a:rPr lang="ru-RU" sz="2200" dirty="0"/>
-              <a:t>Пример поиска аномалии в остатках декомпозиции.</a:t>
-            </a:r>
-          </a:p>
-          <a:p>
-            <a:pPr marL="800100" lvl="1" indent="-342900"/>
-            <a:endParaRPr lang="ru-RU" sz="2200" dirty="0"/>
-          </a:p>
-        </p:txBody>
-      </p:sp>
-      <p:sp>
-        <p:nvSpPr>
-          <p:cNvPr id="9" name="AutoShape 2" descr="image.png"/>
-          <p:cNvSpPr>
-            <a:spLocks noChangeAspect="1" noChangeArrowheads="1"/>
-          </p:cNvSpPr>
-          <p:nvPr/>
-        </p:nvSpPr>
-        <p:spPr bwMode="auto">
-          <a:xfrm>
-            <a:off x="612775" y="312737"/>
-            <a:ext cx="304800" cy="304801"/>
-          </a:xfrm>
-          <a:prstGeom prst="rect">
-            <a:avLst/>
-          </a:prstGeom>
-          <a:noFill/>
-          <a:extLst>
-            <a:ext uri="{909E8E84-426E-40DD-AFC4-6F175D3DCCD1}">
-              <a14:hiddenFill xmlns:a14="http://schemas.microsoft.com/office/drawing/2010/main">
-                <a:solidFill>
-                  <a:srgbClr val="FFFFFF"/>
-                </a:solidFill>
-              </a14:hiddenFill>
-            </a:ext>
-          </a:extLst>
-        </p:spPr>
-        <p:txBody>
-          <a:bodyPr vert="horz" wrap="square" lIns="91440" tIns="45720" rIns="91440" bIns="45720" numCol="1" anchor="t" anchorCtr="0" compatLnSpc="1">
-            <a:prstTxWarp prst="textNoShape">
-              <a:avLst/>
-            </a:prstTxWarp>
-          </a:bodyPr>
-          <a:lstStyle/>
-          <a:p>
-            <a:pPr algn="l" rtl="0"/>
-            <a:endParaRPr lang="ru-RU" dirty="0"/>
-          </a:p>
-        </p:txBody>
-      </p:sp>
-      <p:sp>
-        <p:nvSpPr>
-          <p:cNvPr id="12" name="AutoShape 4" descr="image.png"/>
-          <p:cNvSpPr>
-            <a:spLocks noChangeAspect="1" noChangeArrowheads="1"/>
-          </p:cNvSpPr>
-          <p:nvPr/>
-        </p:nvSpPr>
-        <p:spPr bwMode="auto">
-          <a:xfrm>
-            <a:off x="765175" y="465137"/>
-            <a:ext cx="304800" cy="304801"/>
-          </a:xfrm>
-          <a:prstGeom prst="rect">
-            <a:avLst/>
-          </a:prstGeom>
-          <a:noFill/>
-          <a:extLst>
-            <a:ext uri="{909E8E84-426E-40DD-AFC4-6F175D3DCCD1}">
-              <a14:hiddenFill xmlns:a14="http://schemas.microsoft.com/office/drawing/2010/main">
-                <a:solidFill>
-                  <a:srgbClr val="FFFFFF"/>
-                </a:solidFill>
-              </a14:hiddenFill>
-            </a:ext>
-          </a:extLst>
-        </p:spPr>
-        <p:txBody>
-          <a:bodyPr vert="horz" wrap="square" lIns="91440" tIns="45720" rIns="91440" bIns="45720" numCol="1" anchor="t" anchorCtr="0" compatLnSpc="1">
-            <a:prstTxWarp prst="textNoShape">
-              <a:avLst/>
-            </a:prstTxWarp>
-          </a:bodyPr>
-          <a:lstStyle/>
-          <a:p>
-            <a:pPr algn="l" rtl="0"/>
-            <a:endParaRPr lang="ru-RU" dirty="0"/>
-          </a:p>
-        </p:txBody>
-      </p:sp>
-      <p:sp>
-        <p:nvSpPr>
-          <p:cNvPr id="3" name="AutoShape 2" descr="image.png"/>
-          <p:cNvSpPr>
-            <a:spLocks noChangeAspect="1" noChangeArrowheads="1"/>
-          </p:cNvSpPr>
-          <p:nvPr/>
-        </p:nvSpPr>
-        <p:spPr bwMode="auto">
-          <a:xfrm>
-            <a:off x="917575" y="617537"/>
-            <a:ext cx="304800" cy="304801"/>
-          </a:xfrm>
-          <a:prstGeom prst="rect">
-            <a:avLst/>
-          </a:prstGeom>
-          <a:noFill/>
-          <a:extLst>
-            <a:ext uri="{909E8E84-426E-40DD-AFC4-6F175D3DCCD1}">
-              <a14:hiddenFill xmlns:a14="http://schemas.microsoft.com/office/drawing/2010/main">
-                <a:solidFill>
-                  <a:srgbClr val="FFFFFF"/>
-                </a:solidFill>
-              </a14:hiddenFill>
-            </a:ext>
-          </a:extLst>
-        </p:spPr>
-        <p:txBody>
-          <a:bodyPr vert="horz" wrap="square" lIns="91440" tIns="45720" rIns="91440" bIns="45720" numCol="1" anchor="t" anchorCtr="0" compatLnSpc="1">
-            <a:prstTxWarp prst="textNoShape">
-              <a:avLst/>
-            </a:prstTxWarp>
-          </a:bodyPr>
-          <a:lstStyle/>
-          <a:p>
-            <a:pPr algn="l" rtl="0"/>
-            <a:endParaRPr lang="ru-RU" dirty="0"/>
-          </a:p>
-        </p:txBody>
-      </p:sp>
-      <p:sp>
-        <p:nvSpPr>
-          <p:cNvPr id="15" name="AutoShape 4" descr="image.png"/>
-          <p:cNvSpPr>
-            <a:spLocks noChangeAspect="1" noChangeArrowheads="1"/>
-          </p:cNvSpPr>
-          <p:nvPr/>
-        </p:nvSpPr>
-        <p:spPr bwMode="auto">
-          <a:xfrm>
-            <a:off x="1069975" y="769937"/>
-            <a:ext cx="304800" cy="304801"/>
-          </a:xfrm>
-          <a:prstGeom prst="rect">
-            <a:avLst/>
-          </a:prstGeom>
-          <a:noFill/>
-          <a:extLst>
-            <a:ext uri="{909E8E84-426E-40DD-AFC4-6F175D3DCCD1}">
-              <a14:hiddenFill xmlns:a14="http://schemas.microsoft.com/office/drawing/2010/main">
-                <a:solidFill>
-                  <a:srgbClr val="FFFFFF"/>
-                </a:solidFill>
-              </a14:hiddenFill>
-            </a:ext>
-          </a:extLst>
-        </p:spPr>
-        <p:txBody>
-          <a:bodyPr vert="horz" wrap="square" lIns="91440" tIns="45720" rIns="91440" bIns="45720" numCol="1" anchor="t" anchorCtr="0" compatLnSpc="1">
-            <a:prstTxWarp prst="textNoShape">
-              <a:avLst/>
-            </a:prstTxWarp>
-          </a:bodyPr>
-          <a:lstStyle/>
-          <a:p>
-            <a:pPr algn="l" rtl="0"/>
-            <a:endParaRPr lang="ru-RU" dirty="0"/>
-          </a:p>
-        </p:txBody>
-      </p:sp>
-      <p:sp>
-        <p:nvSpPr>
-          <p:cNvPr id="10" name="AutoShape 2" descr="image-3.png"/>
-          <p:cNvSpPr>
-            <a:spLocks noChangeAspect="1" noChangeArrowheads="1"/>
-          </p:cNvSpPr>
-          <p:nvPr/>
-        </p:nvSpPr>
-        <p:spPr bwMode="auto">
-          <a:xfrm>
-            <a:off x="1222375" y="922337"/>
-            <a:ext cx="304800" cy="304801"/>
-          </a:xfrm>
-          <a:prstGeom prst="rect">
-            <a:avLst/>
-          </a:prstGeom>
-          <a:noFill/>
-          <a:extLst>
-            <a:ext uri="{909E8E84-426E-40DD-AFC4-6F175D3DCCD1}">
-              <a14:hiddenFill xmlns:a14="http://schemas.microsoft.com/office/drawing/2010/main">
-                <a:solidFill>
-                  <a:srgbClr val="FFFFFF"/>
-                </a:solidFill>
-              </a14:hiddenFill>
-            </a:ext>
-          </a:extLst>
-        </p:spPr>
-        <p:txBody>
-          <a:bodyPr vert="horz" wrap="square" lIns="91440" tIns="45720" rIns="91440" bIns="45720" numCol="1" anchor="t" anchorCtr="0" compatLnSpc="1">
-            <a:prstTxWarp prst="textNoShape">
-              <a:avLst/>
-            </a:prstTxWarp>
-          </a:bodyPr>
-          <a:lstStyle/>
-          <a:p>
-            <a:pPr algn="l" rtl="0"/>
-            <a:endParaRPr lang="ru-RU" dirty="0"/>
+        </p:spPr>
+        <p:txBody>
+          <a:bodyPr wrap="square">
+            <a:spAutoFit/>
+          </a:bodyPr>
+          <a:lstStyle/>
+          <a:p>
+            <a:r>
+              <a:rPr lang="ru-RU" sz="1200" dirty="0" err="1"/>
+              <a:t>https</a:t>
+            </a:r>
+            <a:r>
+              <a:rPr lang="ru-RU" sz="1200" dirty="0"/>
+              <a:t>://</a:t>
+            </a:r>
+            <a:r>
+              <a:rPr lang="ru-RU" sz="1200" dirty="0" err="1"/>
+              <a:t>readmedium.com</a:t>
+            </a:r>
+            <a:r>
+              <a:rPr lang="ru-RU" sz="1200" dirty="0"/>
+              <a:t>/a-review-of-anomaly-detection-metrics-with-a-lot-of-related-information-736d88774712</a:t>
+            </a:r>
           </a:p>
         </p:txBody>
       </p:sp>
     </p:spTree>
     <p:extLst>
       <p:ext uri="{BB962C8B-B14F-4D97-AF65-F5344CB8AC3E}">
-        <p14:creationId xmlns:p14="http://schemas.microsoft.com/office/powerpoint/2010/main" val="2357197079"/>
+        <p14:creationId xmlns:p14="http://schemas.microsoft.com/office/powerpoint/2010/main" val="3242277760"/>
       </p:ext>
     </p:extLst>
   </p:cSld>
   <p:clrMapOvr>
     <a:masterClrMapping/>
   </p:clrMapOvr>
-  <mc:AlternateContent xmlns:mc="http://schemas.openxmlformats.org/markup-compatibility/2006">
-    <mc:Choice xmlns:p14="http://schemas.microsoft.com/office/powerpoint/2010/main" Requires="p14">
+  <mc:AlternateContent xmlns:mc="http://schemas.openxmlformats.org/markup-compatibility/2006" xmlns:p14="http://schemas.microsoft.com/office/powerpoint/2010/main">
+    <mc:Choice Requires="p14">
       <p:transition spd="slow" p14:dur="2000"/>
     </mc:Choice>
-    <mc:Fallback>
+    <mc:Fallback xmlns="">
       <p:transition spd="slow"/>
     </mc:Fallback>
   </mc:AlternateContent>
+  <p:timing>
+    <p:tnLst>
+      <p:par>
+        <p:cTn id="1" dur="indefinite" restart="never" nodeType="tmRoot"/>
+      </p:par>
+    </p:tnLst>
+  </p:timing>
 </p:sld>
 </file>
 
@@ -18059,7 +17418,9 @@
           </a:xfrm>
         </p:spPr>
         <p:txBody>
-          <a:bodyPr/>
+          <a:bodyPr>
+            <a:normAutofit/>
+          </a:bodyPr>
           <a:lstStyle/>
           <a:p>
             <a:pPr algn="l" rtl="0"/>
@@ -18067,216 +17428,14 @@
               <a:rPr lang="en-US" b="1" dirty="0"/>
               <a:t>Обнаружение аномалий</a:t>
             </a:r>
-          </a:p>
-        </p:txBody>
-      </p:sp>
-      <p:sp>
-        <p:nvSpPr>
-          <p:cNvPr id="3" name="Объект 2"/>
-          <p:cNvSpPr>
-            <a:spLocks noGrp="1"/>
-          </p:cNvSpPr>
-          <p:nvPr>
-            <p:ph idx="1"/>
-          </p:nvPr>
-        </p:nvSpPr>
-        <p:spPr>
-          <a:xfrm>
-            <a:off x="341831" y="948583"/>
-            <a:ext cx="11263357" cy="5811139"/>
-          </a:xfrm>
-        </p:spPr>
-        <p:txBody>
-          <a:bodyPr>
-            <a:normAutofit/>
-          </a:bodyPr>
-          <a:lstStyle/>
-          <a:p>
-            <a:pPr algn="l" rtl="0"/>
-            <a:r>
-              <a:rPr lang="en-US" sz="2200" dirty="0"/>
-              <a:t>Различают локальные и глобальные аномалии.</a:t>
-            </a:r>
-          </a:p>
-          <a:p>
-            <a:pPr algn="l" rtl="0"/>
-            <a:r>
-              <a:rPr lang="en-US" sz="2200" b="1" dirty="0" err="1"/>
-              <a:t>локальная</a:t>
-            </a:r>
-            <a:r>
-              <a:rPr lang="en-US" sz="2200" b="1" dirty="0"/>
-              <a:t> </a:t>
-            </a:r>
-            <a:r>
-              <a:rPr lang="en-US" sz="2200" b="1" dirty="0" err="1"/>
-              <a:t>аномалия</a:t>
-            </a:r>
-            <a:r>
-              <a:rPr lang="en-US" sz="2200" dirty="0"/>
-              <a:t> </a:t>
-            </a:r>
-            <a:r>
-              <a:rPr lang="en-US" sz="2200" dirty="0" err="1"/>
-              <a:t>предполагае</a:t>
-            </a:r>
-            <a:r>
-              <a:rPr lang="ru-RU" sz="2200" dirty="0"/>
-              <a:t>т</a:t>
-            </a:r>
-            <a:r>
-              <a:rPr lang="en-US" sz="2200" dirty="0"/>
-              <a:t>, </a:t>
-            </a:r>
-            <a:r>
-              <a:rPr lang="en-US" sz="2200" dirty="0" err="1"/>
-              <a:t>что</a:t>
-            </a:r>
-            <a:r>
-              <a:rPr lang="en-US" sz="2200" dirty="0"/>
-              <a:t> </a:t>
-            </a:r>
-            <a:r>
-              <a:rPr lang="en-US" sz="2200" dirty="0" err="1"/>
-              <a:t>значени</a:t>
-            </a:r>
-            <a:r>
-              <a:rPr lang="ru-RU" sz="2200" dirty="0"/>
-              <a:t>я</a:t>
-            </a:r>
-            <a:r>
-              <a:rPr lang="en-US" sz="2200" dirty="0"/>
-              <a:t> </a:t>
-            </a:r>
-            <a:r>
-              <a:rPr lang="en-US" sz="2200" dirty="0" err="1"/>
-              <a:t>не</a:t>
-            </a:r>
-            <a:r>
-              <a:rPr lang="en-US" sz="2200" dirty="0"/>
-              <a:t> </a:t>
-            </a:r>
-            <a:r>
-              <a:rPr lang="en-US" sz="2200" dirty="0" err="1"/>
-              <a:t>превыша</a:t>
-            </a:r>
-            <a:r>
-              <a:rPr lang="ru-RU" sz="2200" dirty="0"/>
-              <a:t>ю</a:t>
-            </a:r>
-            <a:r>
-              <a:rPr lang="en-US" sz="2200" dirty="0"/>
-              <a:t>т общий диапазон </a:t>
-            </a:r>
-            <a:r>
-              <a:rPr lang="en-US" sz="2200" dirty="0" err="1"/>
-              <a:t>значений</a:t>
-            </a:r>
-            <a:r>
-              <a:rPr lang="en-US" sz="2200" dirty="0"/>
-              <a:t>.</a:t>
-            </a:r>
-            <a:r>
-              <a:rPr lang="ru-RU" sz="2200" dirty="0"/>
-              <a:t> (также называют контекстуальные)</a:t>
-            </a:r>
-            <a:endParaRPr lang="en-US" sz="2200" dirty="0"/>
-          </a:p>
-          <a:p>
-            <a:pPr algn="l" rtl="0"/>
-            <a:r>
-              <a:rPr lang="en-US" sz="2200" b="1" dirty="0" err="1"/>
-              <a:t>глобальная</a:t>
-            </a:r>
-            <a:r>
-              <a:rPr lang="en-US" sz="2200" b="1" dirty="0"/>
-              <a:t> </a:t>
-            </a:r>
-            <a:r>
-              <a:rPr lang="en-US" sz="2200" b="1" dirty="0" err="1"/>
-              <a:t>аномалия</a:t>
-            </a:r>
-            <a:r>
-              <a:rPr lang="en-US" sz="2200" dirty="0"/>
-              <a:t> </a:t>
-            </a:r>
-            <a:r>
-              <a:rPr lang="en-US" sz="2200" dirty="0" err="1"/>
-              <a:t>предполагае</a:t>
-            </a:r>
-            <a:r>
-              <a:rPr lang="ru-RU" sz="2200" dirty="0"/>
-              <a:t>т</a:t>
-            </a:r>
-            <a:r>
-              <a:rPr lang="en-US" sz="2200" dirty="0"/>
-              <a:t>, </a:t>
-            </a:r>
-            <a:r>
-              <a:rPr lang="en-US" sz="2200" dirty="0" err="1"/>
-              <a:t>что</a:t>
-            </a:r>
-            <a:r>
-              <a:rPr lang="en-US" sz="2200" dirty="0"/>
-              <a:t> е</a:t>
-            </a:r>
-            <a:r>
-              <a:rPr lang="ru-RU" sz="2200" dirty="0"/>
-              <a:t>е</a:t>
-            </a:r>
-            <a:r>
-              <a:rPr lang="en-US" sz="2200" dirty="0"/>
-              <a:t> </a:t>
-            </a:r>
-            <a:r>
-              <a:rPr lang="en-US" sz="2200" dirty="0" err="1"/>
-              <a:t>значени</a:t>
-            </a:r>
-            <a:r>
-              <a:rPr lang="ru-RU" sz="2200" dirty="0"/>
-              <a:t>я</a:t>
-            </a:r>
-            <a:r>
-              <a:rPr lang="en-US" sz="2200" dirty="0"/>
-              <a:t> </a:t>
-            </a:r>
-            <a:r>
-              <a:rPr lang="en-US" sz="2200" dirty="0" err="1"/>
-              <a:t>значительно</a:t>
-            </a:r>
-            <a:r>
-              <a:rPr lang="en-US" sz="2200" dirty="0"/>
-              <a:t> </a:t>
-            </a:r>
-            <a:r>
-              <a:rPr lang="en-US" sz="2200" dirty="0" err="1"/>
-              <a:t>превыша</a:t>
-            </a:r>
-            <a:r>
-              <a:rPr lang="ru-RU" sz="2200" dirty="0"/>
-              <a:t>ю</a:t>
-            </a:r>
-            <a:r>
-              <a:rPr lang="en-US" sz="2200" dirty="0"/>
-              <a:t>т общий диапазон значений.</a:t>
-            </a:r>
-            <a:endParaRPr lang="ru-RU" sz="2200" dirty="0"/>
-          </a:p>
-          <a:p>
-            <a:pPr algn="l" rtl="0"/>
-            <a:r>
-              <a:rPr lang="en-US" sz="2200" dirty="0"/>
-              <a:t>Пример локальных и глобальных точечных </a:t>
-            </a:r>
-            <a:r>
-              <a:rPr lang="en-US" sz="2200" dirty="0" err="1"/>
-              <a:t>аномалий</a:t>
-            </a:r>
-            <a:r>
-              <a:rPr lang="en-US" sz="2200" dirty="0"/>
-              <a:t>.</a:t>
-            </a:r>
-            <a:endParaRPr lang="ru-RU" sz="2200" dirty="0"/>
+            <a:r>
+              <a:rPr lang="ru-RU" b="1" dirty="0"/>
+              <a:t>. </a:t>
+            </a:r>
+            <a:r>
+              <a:rPr lang="en-US" b="1" dirty="0"/>
+              <a:t>подходы</a:t>
+            </a:r>
           </a:p>
         </p:txBody>
       </p:sp>
@@ -18400,45 +17559,359 @@
           </a:p>
         </p:txBody>
       </p:sp>
-      <p:pic>
-        <p:nvPicPr>
-          <p:cNvPr id="8" name="Рисунок 7"/>
-          <p:cNvPicPr>
-            <a:picLocks noChangeAspect="1"/>
-          </p:cNvPicPr>
-          <p:nvPr/>
-        </p:nvPicPr>
-        <p:blipFill>
-          <a:blip r:embed="rId2"/>
-          <a:stretch>
-            <a:fillRect/>
-          </a:stretch>
-        </p:blipFill>
+      <p:sp>
+        <p:nvSpPr>
+          <p:cNvPr id="8" name="Объект 7"/>
+          <p:cNvSpPr>
+            <a:spLocks noGrp="1"/>
+          </p:cNvSpPr>
+          <p:nvPr>
+            <p:ph idx="1"/>
+          </p:nvPr>
+        </p:nvSpPr>
         <p:spPr>
           <a:xfrm>
-            <a:off x="529219" y="3605430"/>
-            <a:ext cx="11291531" cy="3000321"/>
-          </a:xfrm>
-          <a:prstGeom prst="rect">
-            <a:avLst/>
-          </a:prstGeom>
-        </p:spPr>
-      </p:pic>
+            <a:off x="307975" y="1022350"/>
+            <a:ext cx="11277889" cy="5470525"/>
+          </a:xfrm>
+        </p:spPr>
+        <p:txBody>
+          <a:bodyPr>
+            <a:noAutofit/>
+          </a:bodyPr>
+          <a:lstStyle/>
+          <a:p>
+            <a:pPr marL="342900" lvl="0" indent="-342900"/>
+            <a:r>
+              <a:rPr lang="ru-RU" sz="2200" dirty="0"/>
+              <a:t>В каждом подходе мы должны ввести некоторую метрику для обнаружения аномалий </a:t>
+            </a:r>
+            <a:br>
+              <a:rPr lang="ru-RU" sz="2200" dirty="0"/>
+            </a:br>
+            <a:r>
+              <a:rPr lang="ru-RU" sz="2200" dirty="0"/>
+              <a:t>(в классических статистических термин отклонение). </a:t>
+            </a:r>
+          </a:p>
+          <a:p>
+            <a:pPr marL="800100" lvl="1" indent="-342900"/>
+            <a:r>
+              <a:rPr lang="ru-RU" sz="2200" dirty="0"/>
+              <a:t>То есть мы должны формально описать что такое аномалия.</a:t>
+            </a:r>
+          </a:p>
+          <a:p>
+            <a:pPr marL="800100" lvl="1" indent="-342900"/>
+            <a:r>
+              <a:rPr lang="ru-RU" sz="2200" dirty="0"/>
+              <a:t>Такой метрикой может быть, например:</a:t>
+            </a:r>
+          </a:p>
+          <a:p>
+            <a:pPr marL="1257300" lvl="2" indent="-342900"/>
+            <a:r>
+              <a:rPr lang="ru-RU" sz="2200" dirty="0"/>
+              <a:t>Евклидово расстояние,</a:t>
+            </a:r>
+          </a:p>
+          <a:p>
+            <a:pPr marL="1257300" lvl="2" indent="-342900"/>
+            <a:r>
+              <a:rPr lang="ru-RU" sz="2200" dirty="0"/>
+              <a:t>MAPE (средняя абсолютная ошибка в процентах),</a:t>
+            </a:r>
+          </a:p>
+          <a:p>
+            <a:pPr marL="1257300" lvl="2" indent="-342900"/>
+            <a:r>
+              <a:rPr lang="ru-RU" sz="2200" dirty="0"/>
+              <a:t>Некоторая метрика статистической информации, такая как энтропия или расхождение </a:t>
+            </a:r>
+            <a:r>
+              <a:rPr lang="ru-RU" sz="2200" dirty="0" err="1"/>
+              <a:t>Кульбака-Лейблера</a:t>
+            </a:r>
+            <a:r>
+              <a:rPr lang="ru-RU" sz="2200" dirty="0"/>
+              <a:t>.</a:t>
+            </a:r>
+          </a:p>
+          <a:p>
+            <a:pPr marL="342900" lvl="0" indent="-342900"/>
+            <a:r>
+              <a:rPr lang="ru-RU" sz="2200" dirty="0"/>
+              <a:t>Во всех случаях предполагаемое отклонение, то есть значение ошибки, пропорционально относительной оценки аномалии.</a:t>
+            </a:r>
+          </a:p>
+          <a:p>
+            <a:pPr marL="800100" lvl="1" indent="-342900"/>
+            <a:r>
+              <a:rPr lang="ru-RU" sz="2200" dirty="0"/>
+              <a:t>Если оценка аномалии превышает некоторый установленный порог, это отмечается как аномалия</a:t>
+            </a:r>
+          </a:p>
+          <a:p>
+            <a:pPr marL="1257300" lvl="2" indent="-342900">
+              <a:lnSpc>
+                <a:spcPct val="100000"/>
+              </a:lnSpc>
+              <a:spcBef>
+                <a:spcPts val="600"/>
+              </a:spcBef>
+            </a:pPr>
+            <a:r>
+              <a:rPr lang="ru-RU" sz="2200" i="1" dirty="0"/>
+              <a:t>Отметим,</a:t>
+            </a:r>
+            <a:r>
+              <a:rPr lang="ru-RU" sz="2200" dirty="0"/>
+              <a:t>  что поиск аномалии можно проводить как для полного временного ряда, так и по результатам его </a:t>
+            </a:r>
+            <a:r>
+              <a:rPr lang="ru-RU" sz="2200" b="1" dirty="0"/>
+              <a:t>преобразования</a:t>
+            </a:r>
+            <a:r>
+              <a:rPr lang="ru-RU" sz="2200" dirty="0"/>
+              <a:t>.</a:t>
+            </a:r>
+          </a:p>
+          <a:p>
+            <a:pPr marL="1714500" lvl="3" indent="-342900">
+              <a:lnSpc>
+                <a:spcPct val="100000"/>
+              </a:lnSpc>
+              <a:spcBef>
+                <a:spcPts val="600"/>
+              </a:spcBef>
+            </a:pPr>
+            <a:r>
+              <a:rPr lang="ru-RU" sz="2200" dirty="0"/>
+              <a:t>Пример поиска аномалии в остатках декомпозиции.</a:t>
+            </a:r>
+          </a:p>
+          <a:p>
+            <a:pPr marL="800100" lvl="1" indent="-342900"/>
+            <a:endParaRPr lang="ru-RU" sz="2200" dirty="0"/>
+          </a:p>
+        </p:txBody>
+      </p:sp>
+      <p:sp>
+        <p:nvSpPr>
+          <p:cNvPr id="9" name="AutoShape 2" descr="image.png"/>
+          <p:cNvSpPr>
+            <a:spLocks noChangeAspect="1" noChangeArrowheads="1"/>
+          </p:cNvSpPr>
+          <p:nvPr/>
+        </p:nvSpPr>
+        <p:spPr bwMode="auto">
+          <a:xfrm>
+            <a:off x="612775" y="312737"/>
+            <a:ext cx="304800" cy="304801"/>
+          </a:xfrm>
+          <a:prstGeom prst="rect">
+            <a:avLst/>
+          </a:prstGeom>
+          <a:noFill/>
+          <a:extLst>
+            <a:ext uri="{909E8E84-426E-40DD-AFC4-6F175D3DCCD1}">
+              <a14:hiddenFill xmlns:a14="http://schemas.microsoft.com/office/drawing/2010/main">
+                <a:solidFill>
+                  <a:srgbClr val="FFFFFF"/>
+                </a:solidFill>
+              </a14:hiddenFill>
+            </a:ext>
+          </a:extLst>
+        </p:spPr>
+        <p:txBody>
+          <a:bodyPr vert="horz" wrap="square" lIns="91440" tIns="45720" rIns="91440" bIns="45720" numCol="1" anchor="t" anchorCtr="0" compatLnSpc="1">
+            <a:prstTxWarp prst="textNoShape">
+              <a:avLst/>
+            </a:prstTxWarp>
+          </a:bodyPr>
+          <a:lstStyle/>
+          <a:p>
+            <a:pPr algn="l" rtl="0"/>
+            <a:endParaRPr lang="ru-RU" dirty="0"/>
+          </a:p>
+        </p:txBody>
+      </p:sp>
+      <p:sp>
+        <p:nvSpPr>
+          <p:cNvPr id="12" name="AutoShape 4" descr="image.png"/>
+          <p:cNvSpPr>
+            <a:spLocks noChangeAspect="1" noChangeArrowheads="1"/>
+          </p:cNvSpPr>
+          <p:nvPr/>
+        </p:nvSpPr>
+        <p:spPr bwMode="auto">
+          <a:xfrm>
+            <a:off x="765175" y="465137"/>
+            <a:ext cx="304800" cy="304801"/>
+          </a:xfrm>
+          <a:prstGeom prst="rect">
+            <a:avLst/>
+          </a:prstGeom>
+          <a:noFill/>
+          <a:extLst>
+            <a:ext uri="{909E8E84-426E-40DD-AFC4-6F175D3DCCD1}">
+              <a14:hiddenFill xmlns:a14="http://schemas.microsoft.com/office/drawing/2010/main">
+                <a:solidFill>
+                  <a:srgbClr val="FFFFFF"/>
+                </a:solidFill>
+              </a14:hiddenFill>
+            </a:ext>
+          </a:extLst>
+        </p:spPr>
+        <p:txBody>
+          <a:bodyPr vert="horz" wrap="square" lIns="91440" tIns="45720" rIns="91440" bIns="45720" numCol="1" anchor="t" anchorCtr="0" compatLnSpc="1">
+            <a:prstTxWarp prst="textNoShape">
+              <a:avLst/>
+            </a:prstTxWarp>
+          </a:bodyPr>
+          <a:lstStyle/>
+          <a:p>
+            <a:pPr algn="l" rtl="0"/>
+            <a:endParaRPr lang="ru-RU" dirty="0"/>
+          </a:p>
+        </p:txBody>
+      </p:sp>
+      <p:sp>
+        <p:nvSpPr>
+          <p:cNvPr id="3" name="AutoShape 2" descr="image.png"/>
+          <p:cNvSpPr>
+            <a:spLocks noChangeAspect="1" noChangeArrowheads="1"/>
+          </p:cNvSpPr>
+          <p:nvPr/>
+        </p:nvSpPr>
+        <p:spPr bwMode="auto">
+          <a:xfrm>
+            <a:off x="917575" y="617537"/>
+            <a:ext cx="304800" cy="304801"/>
+          </a:xfrm>
+          <a:prstGeom prst="rect">
+            <a:avLst/>
+          </a:prstGeom>
+          <a:noFill/>
+          <a:extLst>
+            <a:ext uri="{909E8E84-426E-40DD-AFC4-6F175D3DCCD1}">
+              <a14:hiddenFill xmlns:a14="http://schemas.microsoft.com/office/drawing/2010/main">
+                <a:solidFill>
+                  <a:srgbClr val="FFFFFF"/>
+                </a:solidFill>
+              </a14:hiddenFill>
+            </a:ext>
+          </a:extLst>
+        </p:spPr>
+        <p:txBody>
+          <a:bodyPr vert="horz" wrap="square" lIns="91440" tIns="45720" rIns="91440" bIns="45720" numCol="1" anchor="t" anchorCtr="0" compatLnSpc="1">
+            <a:prstTxWarp prst="textNoShape">
+              <a:avLst/>
+            </a:prstTxWarp>
+          </a:bodyPr>
+          <a:lstStyle/>
+          <a:p>
+            <a:pPr algn="l" rtl="0"/>
+            <a:endParaRPr lang="ru-RU" dirty="0"/>
+          </a:p>
+        </p:txBody>
+      </p:sp>
+      <p:sp>
+        <p:nvSpPr>
+          <p:cNvPr id="15" name="AutoShape 4" descr="image.png"/>
+          <p:cNvSpPr>
+            <a:spLocks noChangeAspect="1" noChangeArrowheads="1"/>
+          </p:cNvSpPr>
+          <p:nvPr/>
+        </p:nvSpPr>
+        <p:spPr bwMode="auto">
+          <a:xfrm>
+            <a:off x="1069975" y="769937"/>
+            <a:ext cx="304800" cy="304801"/>
+          </a:xfrm>
+          <a:prstGeom prst="rect">
+            <a:avLst/>
+          </a:prstGeom>
+          <a:noFill/>
+          <a:extLst>
+            <a:ext uri="{909E8E84-426E-40DD-AFC4-6F175D3DCCD1}">
+              <a14:hiddenFill xmlns:a14="http://schemas.microsoft.com/office/drawing/2010/main">
+                <a:solidFill>
+                  <a:srgbClr val="FFFFFF"/>
+                </a:solidFill>
+              </a14:hiddenFill>
+            </a:ext>
+          </a:extLst>
+        </p:spPr>
+        <p:txBody>
+          <a:bodyPr vert="horz" wrap="square" lIns="91440" tIns="45720" rIns="91440" bIns="45720" numCol="1" anchor="t" anchorCtr="0" compatLnSpc="1">
+            <a:prstTxWarp prst="textNoShape">
+              <a:avLst/>
+            </a:prstTxWarp>
+          </a:bodyPr>
+          <a:lstStyle/>
+          <a:p>
+            <a:pPr algn="l" rtl="0"/>
+            <a:endParaRPr lang="ru-RU" dirty="0"/>
+          </a:p>
+        </p:txBody>
+      </p:sp>
+      <p:sp>
+        <p:nvSpPr>
+          <p:cNvPr id="10" name="AutoShape 2" descr="image-3.png"/>
+          <p:cNvSpPr>
+            <a:spLocks noChangeAspect="1" noChangeArrowheads="1"/>
+          </p:cNvSpPr>
+          <p:nvPr/>
+        </p:nvSpPr>
+        <p:spPr bwMode="auto">
+          <a:xfrm>
+            <a:off x="1222375" y="922337"/>
+            <a:ext cx="304800" cy="304801"/>
+          </a:xfrm>
+          <a:prstGeom prst="rect">
+            <a:avLst/>
+          </a:prstGeom>
+          <a:noFill/>
+          <a:extLst>
+            <a:ext uri="{909E8E84-426E-40DD-AFC4-6F175D3DCCD1}">
+              <a14:hiddenFill xmlns:a14="http://schemas.microsoft.com/office/drawing/2010/main">
+                <a:solidFill>
+                  <a:srgbClr val="FFFFFF"/>
+                </a:solidFill>
+              </a14:hiddenFill>
+            </a:ext>
+          </a:extLst>
+        </p:spPr>
+        <p:txBody>
+          <a:bodyPr vert="horz" wrap="square" lIns="91440" tIns="45720" rIns="91440" bIns="45720" numCol="1" anchor="t" anchorCtr="0" compatLnSpc="1">
+            <a:prstTxWarp prst="textNoShape">
+              <a:avLst/>
+            </a:prstTxWarp>
+          </a:bodyPr>
+          <a:lstStyle/>
+          <a:p>
+            <a:pPr algn="l" rtl="0"/>
+            <a:endParaRPr lang="ru-RU" dirty="0"/>
+          </a:p>
+        </p:txBody>
+      </p:sp>
     </p:spTree>
     <p:extLst>
       <p:ext uri="{BB962C8B-B14F-4D97-AF65-F5344CB8AC3E}">
-        <p14:creationId xmlns:p14="http://schemas.microsoft.com/office/powerpoint/2010/main" val="3626538763"/>
+        <p14:creationId xmlns:p14="http://schemas.microsoft.com/office/powerpoint/2010/main" val="2357197079"/>
       </p:ext>
     </p:extLst>
   </p:cSld>
   <p:clrMapOvr>
     <a:masterClrMapping/>
   </p:clrMapOvr>
-  <mc:AlternateContent xmlns:mc="http://schemas.openxmlformats.org/markup-compatibility/2006">
-    <mc:Choice xmlns:p14="http://schemas.microsoft.com/office/powerpoint/2010/main" Requires="p14">
+  <mc:AlternateContent xmlns:mc="http://schemas.openxmlformats.org/markup-compatibility/2006" xmlns:p14="http://schemas.microsoft.com/office/powerpoint/2010/main">
+    <mc:Choice Requires="p14">
       <p:transition spd="slow" p14:dur="2000"/>
     </mc:Choice>
-    <mc:Fallback>
+    <mc:Fallback xmlns="">
       <p:transition spd="slow"/>
     </mc:Fallback>
   </mc:AlternateContent>
@@ -18484,13 +17957,219 @@
           <a:p>
             <a:pPr algn="l" rtl="0"/>
             <a:r>
-              <a:rPr lang="ru-RU" b="1" dirty="0"/>
-              <a:t>Обнаружение аномалий. </a:t>
-            </a:r>
-            <a:r>
               <a:rPr lang="en-US" b="1" dirty="0"/>
-              <a:t>Пример</a:t>
-            </a:r>
+              <a:t>Обнаружение аномалий</a:t>
+            </a:r>
+          </a:p>
+        </p:txBody>
+      </p:sp>
+      <p:sp>
+        <p:nvSpPr>
+          <p:cNvPr id="3" name="Объект 2"/>
+          <p:cNvSpPr>
+            <a:spLocks noGrp="1"/>
+          </p:cNvSpPr>
+          <p:nvPr>
+            <p:ph idx="1"/>
+          </p:nvPr>
+        </p:nvSpPr>
+        <p:spPr>
+          <a:xfrm>
+            <a:off x="341831" y="948583"/>
+            <a:ext cx="11263357" cy="5811139"/>
+          </a:xfrm>
+        </p:spPr>
+        <p:txBody>
+          <a:bodyPr>
+            <a:normAutofit/>
+          </a:bodyPr>
+          <a:lstStyle/>
+          <a:p>
+            <a:pPr algn="l" rtl="0"/>
+            <a:r>
+              <a:rPr lang="en-US" sz="2200" dirty="0"/>
+              <a:t>Различают локальные и глобальные аномалии.</a:t>
+            </a:r>
+          </a:p>
+          <a:p>
+            <a:pPr algn="l" rtl="0"/>
+            <a:r>
+              <a:rPr lang="en-US" sz="2200" b="1" dirty="0" err="1"/>
+              <a:t>локальная</a:t>
+            </a:r>
+            <a:r>
+              <a:rPr lang="en-US" sz="2200" b="1" dirty="0"/>
+              <a:t> </a:t>
+            </a:r>
+            <a:r>
+              <a:rPr lang="en-US" sz="2200" b="1" dirty="0" err="1"/>
+              <a:t>аномалия</a:t>
+            </a:r>
+            <a:r>
+              <a:rPr lang="en-US" sz="2200" dirty="0"/>
+              <a:t> </a:t>
+            </a:r>
+            <a:r>
+              <a:rPr lang="en-US" sz="2200" dirty="0" err="1"/>
+              <a:t>предполагае</a:t>
+            </a:r>
+            <a:r>
+              <a:rPr lang="ru-RU" sz="2200" dirty="0"/>
+              <a:t>т</a:t>
+            </a:r>
+            <a:r>
+              <a:rPr lang="en-US" sz="2200" dirty="0"/>
+              <a:t>, </a:t>
+            </a:r>
+            <a:r>
+              <a:rPr lang="en-US" sz="2200" dirty="0" err="1"/>
+              <a:t>что</a:t>
+            </a:r>
+            <a:r>
+              <a:rPr lang="en-US" sz="2200" dirty="0"/>
+              <a:t> </a:t>
+            </a:r>
+            <a:r>
+              <a:rPr lang="en-US" sz="2200" dirty="0" err="1"/>
+              <a:t>значени</a:t>
+            </a:r>
+            <a:r>
+              <a:rPr lang="ru-RU" sz="2200" dirty="0"/>
+              <a:t>я</a:t>
+            </a:r>
+            <a:r>
+              <a:rPr lang="en-US" sz="2200" dirty="0"/>
+              <a:t> </a:t>
+            </a:r>
+            <a:r>
+              <a:rPr lang="en-US" sz="2200" dirty="0" err="1"/>
+              <a:t>не</a:t>
+            </a:r>
+            <a:r>
+              <a:rPr lang="en-US" sz="2200" dirty="0"/>
+              <a:t> </a:t>
+            </a:r>
+            <a:r>
+              <a:rPr lang="en-US" sz="2200" dirty="0" err="1"/>
+              <a:t>превыша</a:t>
+            </a:r>
+            <a:r>
+              <a:rPr lang="ru-RU" sz="2200" dirty="0"/>
+              <a:t>ю</a:t>
+            </a:r>
+            <a:r>
+              <a:rPr lang="en-US" sz="2200" dirty="0"/>
+              <a:t>т общий диапазон </a:t>
+            </a:r>
+            <a:r>
+              <a:rPr lang="en-US" sz="2200" dirty="0" err="1"/>
+              <a:t>значений</a:t>
+            </a:r>
+            <a:r>
+              <a:rPr lang="en-US" sz="2200" dirty="0"/>
+              <a:t>.</a:t>
+            </a:r>
+            <a:r>
+              <a:rPr lang="ru-RU" sz="2200" dirty="0"/>
+              <a:t> (также называют контекстуальные)</a:t>
+            </a:r>
+            <a:endParaRPr lang="en-US" sz="2200" dirty="0"/>
+          </a:p>
+          <a:p>
+            <a:pPr algn="l" rtl="0"/>
+            <a:r>
+              <a:rPr lang="en-US" sz="2200" b="1" dirty="0" err="1"/>
+              <a:t>глобальная</a:t>
+            </a:r>
+            <a:r>
+              <a:rPr lang="en-US" sz="2200" b="1" dirty="0"/>
+              <a:t> </a:t>
+            </a:r>
+            <a:r>
+              <a:rPr lang="en-US" sz="2200" b="1" dirty="0" err="1"/>
+              <a:t>аномалия</a:t>
+            </a:r>
+            <a:r>
+              <a:rPr lang="en-US" sz="2200" dirty="0"/>
+              <a:t> </a:t>
+            </a:r>
+            <a:r>
+              <a:rPr lang="en-US" sz="2200" dirty="0" err="1"/>
+              <a:t>предполагае</a:t>
+            </a:r>
+            <a:r>
+              <a:rPr lang="ru-RU" sz="2200" dirty="0"/>
+              <a:t>т</a:t>
+            </a:r>
+            <a:r>
+              <a:rPr lang="en-US" sz="2200" dirty="0"/>
+              <a:t>, </a:t>
+            </a:r>
+            <a:r>
+              <a:rPr lang="en-US" sz="2200" dirty="0" err="1"/>
+              <a:t>что</a:t>
+            </a:r>
+            <a:r>
+              <a:rPr lang="en-US" sz="2200" dirty="0"/>
+              <a:t> е</a:t>
+            </a:r>
+            <a:r>
+              <a:rPr lang="ru-RU" sz="2200" dirty="0"/>
+              <a:t>е</a:t>
+            </a:r>
+            <a:r>
+              <a:rPr lang="en-US" sz="2200" dirty="0"/>
+              <a:t> </a:t>
+            </a:r>
+            <a:r>
+              <a:rPr lang="en-US" sz="2200" dirty="0" err="1"/>
+              <a:t>значени</a:t>
+            </a:r>
+            <a:r>
+              <a:rPr lang="ru-RU" sz="2200" dirty="0"/>
+              <a:t>я</a:t>
+            </a:r>
+            <a:r>
+              <a:rPr lang="en-US" sz="2200" dirty="0"/>
+              <a:t> </a:t>
+            </a:r>
+            <a:r>
+              <a:rPr lang="en-US" sz="2200" dirty="0" err="1"/>
+              <a:t>значительно</a:t>
+            </a:r>
+            <a:r>
+              <a:rPr lang="en-US" sz="2200" dirty="0"/>
+              <a:t> </a:t>
+            </a:r>
+            <a:r>
+              <a:rPr lang="en-US" sz="2200" dirty="0" err="1"/>
+              <a:t>превыша</a:t>
+            </a:r>
+            <a:r>
+              <a:rPr lang="ru-RU" sz="2200" dirty="0"/>
+              <a:t>ю</a:t>
+            </a:r>
+            <a:r>
+              <a:rPr lang="en-US" sz="2200" dirty="0"/>
+              <a:t>т общий диапазон значений.</a:t>
+            </a:r>
+            <a:endParaRPr lang="ru-RU" sz="2200" dirty="0"/>
+          </a:p>
+          <a:p>
+            <a:pPr algn="l" rtl="0"/>
+            <a:r>
+              <a:rPr lang="en-US" sz="2200" dirty="0"/>
+              <a:t>Пример локальных и глобальных точечных </a:t>
+            </a:r>
+            <a:r>
+              <a:rPr lang="en-US" sz="2200" dirty="0" err="1"/>
+              <a:t>аномалий</a:t>
+            </a:r>
+            <a:r>
+              <a:rPr lang="en-US" sz="2200" dirty="0"/>
+              <a:t>.</a:t>
+            </a:r>
+            <a:endParaRPr lang="ru-RU" sz="2200" dirty="0"/>
           </a:p>
         </p:txBody>
       </p:sp>
@@ -18614,253 +18293,9 @@
           </a:p>
         </p:txBody>
       </p:sp>
-      <p:sp>
-        <p:nvSpPr>
-          <p:cNvPr id="8" name="Объект 7"/>
-          <p:cNvSpPr>
-            <a:spLocks noGrp="1"/>
-          </p:cNvSpPr>
-          <p:nvPr>
-            <p:ph idx="1"/>
-          </p:nvPr>
-        </p:nvSpPr>
-        <p:spPr>
-          <a:xfrm>
-            <a:off x="765175" y="1254570"/>
-            <a:ext cx="10741025" cy="5100193"/>
-          </a:xfrm>
-        </p:spPr>
-        <p:txBody>
-          <a:bodyPr/>
-          <a:lstStyle/>
-          <a:p>
-            <a:pPr algn="l" rtl="0"/>
-            <a:r>
-              <a:rPr lang="en-US" dirty="0"/>
-              <a:t>Пример внезапного отсутствия сезонности и </a:t>
-            </a:r>
-            <a:r>
-              <a:rPr lang="ru-RU" dirty="0"/>
-              <a:t>изменение </a:t>
-            </a:r>
-            <a:r>
-              <a:rPr lang="en-US" dirty="0" err="1"/>
-              <a:t>уровн</a:t>
-            </a:r>
-            <a:r>
-              <a:rPr lang="ru-RU" dirty="0"/>
-              <a:t>я</a:t>
-            </a:r>
-            <a:r>
-              <a:rPr lang="en-US" dirty="0"/>
-              <a:t> аномалия сдвига.</a:t>
-            </a:r>
-          </a:p>
-        </p:txBody>
-      </p:sp>
-      <p:sp>
-        <p:nvSpPr>
-          <p:cNvPr id="9" name="AutoShape 2" descr="image.png"/>
-          <p:cNvSpPr>
-            <a:spLocks noChangeAspect="1" noChangeArrowheads="1"/>
-          </p:cNvSpPr>
-          <p:nvPr/>
-        </p:nvSpPr>
-        <p:spPr bwMode="auto">
-          <a:xfrm>
-            <a:off x="612775" y="312737"/>
-            <a:ext cx="304800" cy="304801"/>
-          </a:xfrm>
-          <a:prstGeom prst="rect">
-            <a:avLst/>
-          </a:prstGeom>
-          <a:noFill/>
-          <a:extLst>
-            <a:ext uri="{909E8E84-426E-40DD-AFC4-6F175D3DCCD1}">
-              <a14:hiddenFill xmlns:a14="http://schemas.microsoft.com/office/drawing/2010/main">
-                <a:solidFill>
-                  <a:srgbClr val="FFFFFF"/>
-                </a:solidFill>
-              </a14:hiddenFill>
-            </a:ext>
-          </a:extLst>
-        </p:spPr>
-        <p:txBody>
-          <a:bodyPr vert="horz" wrap="square" lIns="91440" tIns="45720" rIns="91440" bIns="45720" numCol="1" anchor="t" anchorCtr="0" compatLnSpc="1">
-            <a:prstTxWarp prst="textNoShape">
-              <a:avLst/>
-            </a:prstTxWarp>
-          </a:bodyPr>
-          <a:lstStyle/>
-          <a:p>
-            <a:pPr algn="l" rtl="0"/>
-            <a:endParaRPr lang="ru-RU"/>
-          </a:p>
-        </p:txBody>
-      </p:sp>
-      <p:sp>
-        <p:nvSpPr>
-          <p:cNvPr id="12" name="AutoShape 4" descr="image.png"/>
-          <p:cNvSpPr>
-            <a:spLocks noChangeAspect="1" noChangeArrowheads="1"/>
-          </p:cNvSpPr>
-          <p:nvPr/>
-        </p:nvSpPr>
-        <p:spPr bwMode="auto">
-          <a:xfrm>
-            <a:off x="765175" y="465137"/>
-            <a:ext cx="304800" cy="304801"/>
-          </a:xfrm>
-          <a:prstGeom prst="rect">
-            <a:avLst/>
-          </a:prstGeom>
-          <a:noFill/>
-          <a:extLst>
-            <a:ext uri="{909E8E84-426E-40DD-AFC4-6F175D3DCCD1}">
-              <a14:hiddenFill xmlns:a14="http://schemas.microsoft.com/office/drawing/2010/main">
-                <a:solidFill>
-                  <a:srgbClr val="FFFFFF"/>
-                </a:solidFill>
-              </a14:hiddenFill>
-            </a:ext>
-          </a:extLst>
-        </p:spPr>
-        <p:txBody>
-          <a:bodyPr vert="horz" wrap="square" lIns="91440" tIns="45720" rIns="91440" bIns="45720" numCol="1" anchor="t" anchorCtr="0" compatLnSpc="1">
-            <a:prstTxWarp prst="textNoShape">
-              <a:avLst/>
-            </a:prstTxWarp>
-          </a:bodyPr>
-          <a:lstStyle/>
-          <a:p>
-            <a:pPr algn="l" rtl="0"/>
-            <a:endParaRPr lang="ru-RU"/>
-          </a:p>
-        </p:txBody>
-      </p:sp>
-      <p:sp>
-        <p:nvSpPr>
-          <p:cNvPr id="3" name="AutoShape 2" descr="image.png"/>
-          <p:cNvSpPr>
-            <a:spLocks noChangeAspect="1" noChangeArrowheads="1"/>
-          </p:cNvSpPr>
-          <p:nvPr/>
-        </p:nvSpPr>
-        <p:spPr bwMode="auto">
-          <a:xfrm>
-            <a:off x="917575" y="617537"/>
-            <a:ext cx="304800" cy="304801"/>
-          </a:xfrm>
-          <a:prstGeom prst="rect">
-            <a:avLst/>
-          </a:prstGeom>
-          <a:noFill/>
-          <a:extLst>
-            <a:ext uri="{909E8E84-426E-40DD-AFC4-6F175D3DCCD1}">
-              <a14:hiddenFill xmlns:a14="http://schemas.microsoft.com/office/drawing/2010/main">
-                <a:solidFill>
-                  <a:srgbClr val="FFFFFF"/>
-                </a:solidFill>
-              </a14:hiddenFill>
-            </a:ext>
-          </a:extLst>
-        </p:spPr>
-        <p:txBody>
-          <a:bodyPr vert="horz" wrap="square" lIns="91440" tIns="45720" rIns="91440" bIns="45720" numCol="1" anchor="t" anchorCtr="0" compatLnSpc="1">
-            <a:prstTxWarp prst="textNoShape">
-              <a:avLst/>
-            </a:prstTxWarp>
-          </a:bodyPr>
-          <a:lstStyle/>
-          <a:p>
-            <a:pPr algn="l" rtl="0"/>
-            <a:endParaRPr lang="ru-RU"/>
-          </a:p>
-        </p:txBody>
-      </p:sp>
-      <p:sp>
-        <p:nvSpPr>
-          <p:cNvPr id="15" name="AutoShape 4" descr="image.png"/>
-          <p:cNvSpPr>
-            <a:spLocks noChangeAspect="1" noChangeArrowheads="1"/>
-          </p:cNvSpPr>
-          <p:nvPr/>
-        </p:nvSpPr>
-        <p:spPr bwMode="auto">
-          <a:xfrm>
-            <a:off x="1069975" y="769937"/>
-            <a:ext cx="304800" cy="304801"/>
-          </a:xfrm>
-          <a:prstGeom prst="rect">
-            <a:avLst/>
-          </a:prstGeom>
-          <a:noFill/>
-          <a:extLst>
-            <a:ext uri="{909E8E84-426E-40DD-AFC4-6F175D3DCCD1}">
-              <a14:hiddenFill xmlns:a14="http://schemas.microsoft.com/office/drawing/2010/main">
-                <a:solidFill>
-                  <a:srgbClr val="FFFFFF"/>
-                </a:solidFill>
-              </a14:hiddenFill>
-            </a:ext>
-          </a:extLst>
-        </p:spPr>
-        <p:txBody>
-          <a:bodyPr vert="horz" wrap="square" lIns="91440" tIns="45720" rIns="91440" bIns="45720" numCol="1" anchor="t" anchorCtr="0" compatLnSpc="1">
-            <a:prstTxWarp prst="textNoShape">
-              <a:avLst/>
-            </a:prstTxWarp>
-          </a:bodyPr>
-          <a:lstStyle/>
-          <a:p>
-            <a:pPr algn="l" rtl="0"/>
-            <a:endParaRPr lang="ru-RU"/>
-          </a:p>
-        </p:txBody>
-      </p:sp>
-      <p:sp>
-        <p:nvSpPr>
-          <p:cNvPr id="10" name="AutoShape 2" descr="image-3.png"/>
-          <p:cNvSpPr>
-            <a:spLocks noChangeAspect="1" noChangeArrowheads="1"/>
-          </p:cNvSpPr>
-          <p:nvPr/>
-        </p:nvSpPr>
-        <p:spPr bwMode="auto">
-          <a:xfrm>
-            <a:off x="1222375" y="922337"/>
-            <a:ext cx="304800" cy="304801"/>
-          </a:xfrm>
-          <a:prstGeom prst="rect">
-            <a:avLst/>
-          </a:prstGeom>
-          <a:noFill/>
-          <a:extLst>
-            <a:ext uri="{909E8E84-426E-40DD-AFC4-6F175D3DCCD1}">
-              <a14:hiddenFill xmlns:a14="http://schemas.microsoft.com/office/drawing/2010/main">
-                <a:solidFill>
-                  <a:srgbClr val="FFFFFF"/>
-                </a:solidFill>
-              </a14:hiddenFill>
-            </a:ext>
-          </a:extLst>
-        </p:spPr>
-        <p:txBody>
-          <a:bodyPr vert="horz" wrap="square" lIns="91440" tIns="45720" rIns="91440" bIns="45720" numCol="1" anchor="t" anchorCtr="0" compatLnSpc="1">
-            <a:prstTxWarp prst="textNoShape">
-              <a:avLst/>
-            </a:prstTxWarp>
-          </a:bodyPr>
-          <a:lstStyle/>
-          <a:p>
-            <a:pPr algn="l" rtl="0"/>
-            <a:endParaRPr lang="ru-RU"/>
-          </a:p>
-        </p:txBody>
-      </p:sp>
       <p:pic>
         <p:nvPicPr>
-          <p:cNvPr id="11" name="Рисунок 10"/>
+          <p:cNvPr id="8" name="Рисунок 7"/>
           <p:cNvPicPr>
             <a:picLocks noChangeAspect="1"/>
           </p:cNvPicPr>
@@ -18874,8 +18309,8 @@
         </p:blipFill>
         <p:spPr>
           <a:xfrm>
-            <a:off x="307975" y="1784350"/>
-            <a:ext cx="6690186" cy="4370387"/>
+            <a:off x="529219" y="3605430"/>
+            <a:ext cx="11291531" cy="3000321"/>
           </a:xfrm>
           <a:prstGeom prst="rect">
             <a:avLst/>
@@ -18885,28 +18320,21 @@
     </p:spTree>
     <p:extLst>
       <p:ext uri="{BB962C8B-B14F-4D97-AF65-F5344CB8AC3E}">
-        <p14:creationId xmlns:p14="http://schemas.microsoft.com/office/powerpoint/2010/main" val="2557801481"/>
+        <p14:creationId xmlns:p14="http://schemas.microsoft.com/office/powerpoint/2010/main" val="3626538763"/>
       </p:ext>
     </p:extLst>
   </p:cSld>
   <p:clrMapOvr>
     <a:masterClrMapping/>
   </p:clrMapOvr>
-  <mc:AlternateContent xmlns:mc="http://schemas.openxmlformats.org/markup-compatibility/2006">
-    <mc:Choice xmlns:p14="http://schemas.microsoft.com/office/powerpoint/2010/main" Requires="p14">
+  <mc:AlternateContent xmlns:mc="http://schemas.openxmlformats.org/markup-compatibility/2006" xmlns:p14="http://schemas.microsoft.com/office/powerpoint/2010/main">
+    <mc:Choice Requires="p14">
       <p:transition spd="slow" p14:dur="2000"/>
     </mc:Choice>
-    <mc:Fallback>
+    <mc:Fallback xmlns="">
       <p:transition spd="slow"/>
     </mc:Fallback>
   </mc:AlternateContent>
-  <p:timing>
-    <p:tnLst>
-      <p:par>
-        <p:cTn id="1" dur="indefinite" restart="never" nodeType="tmRoot"/>
-      </p:par>
-    </p:tnLst>
-  </p:timing>
 </p:sld>
 </file>
 
@@ -18944,6 +18372,471 @@
           </a:xfrm>
         </p:spPr>
         <p:txBody>
+          <a:bodyPr/>
+          <a:lstStyle/>
+          <a:p>
+            <a:pPr algn="l" rtl="0"/>
+            <a:r>
+              <a:rPr lang="ru-RU" b="1" dirty="0"/>
+              <a:t>Обнаружение аномалий. </a:t>
+            </a:r>
+            <a:r>
+              <a:rPr lang="en-US" b="1" dirty="0"/>
+              <a:t>Пример</a:t>
+            </a:r>
+          </a:p>
+        </p:txBody>
+      </p:sp>
+      <p:sp>
+        <p:nvSpPr>
+          <p:cNvPr id="5" name="AutoShape 3" descr="image.png"/>
+          <p:cNvSpPr>
+            <a:spLocks noChangeAspect="1" noChangeArrowheads="1"/>
+          </p:cNvSpPr>
+          <p:nvPr/>
+        </p:nvSpPr>
+        <p:spPr bwMode="auto">
+          <a:xfrm>
+            <a:off x="155575" y="-144463"/>
+            <a:ext cx="304800" cy="304801"/>
+          </a:xfrm>
+          <a:prstGeom prst="rect">
+            <a:avLst/>
+          </a:prstGeom>
+          <a:noFill/>
+          <a:extLst>
+            <a:ext uri="{909E8E84-426E-40DD-AFC4-6F175D3DCCD1}">
+              <a14:hiddenFill xmlns:a14="http://schemas.microsoft.com/office/drawing/2010/main">
+                <a:solidFill>
+                  <a:srgbClr val="FFFFFF"/>
+                </a:solidFill>
+              </a14:hiddenFill>
+            </a:ext>
+          </a:extLst>
+        </p:spPr>
+        <p:txBody>
+          <a:bodyPr vert="horz" wrap="square" lIns="91440" tIns="45720" rIns="91440" bIns="45720" numCol="1" anchor="t" anchorCtr="0" compatLnSpc="1">
+            <a:prstTxWarp prst="textNoShape">
+              <a:avLst/>
+            </a:prstTxWarp>
+          </a:bodyPr>
+          <a:lstStyle/>
+          <a:p>
+            <a:pPr algn="l" rtl="0"/>
+            <a:endParaRPr lang="ru-RU"/>
+          </a:p>
+        </p:txBody>
+      </p:sp>
+      <p:sp>
+        <p:nvSpPr>
+          <p:cNvPr id="4" name="AutoShape 2" descr="image.png"/>
+          <p:cNvSpPr>
+            <a:spLocks noChangeAspect="1" noChangeArrowheads="1"/>
+          </p:cNvSpPr>
+          <p:nvPr/>
+        </p:nvSpPr>
+        <p:spPr bwMode="auto">
+          <a:xfrm>
+            <a:off x="307975" y="7937"/>
+            <a:ext cx="304800" cy="304801"/>
+          </a:xfrm>
+          <a:prstGeom prst="rect">
+            <a:avLst/>
+          </a:prstGeom>
+          <a:noFill/>
+          <a:extLst>
+            <a:ext uri="{909E8E84-426E-40DD-AFC4-6F175D3DCCD1}">
+              <a14:hiddenFill xmlns:a14="http://schemas.microsoft.com/office/drawing/2010/main">
+                <a:solidFill>
+                  <a:srgbClr val="FFFFFF"/>
+                </a:solidFill>
+              </a14:hiddenFill>
+            </a:ext>
+          </a:extLst>
+        </p:spPr>
+        <p:txBody>
+          <a:bodyPr vert="horz" wrap="square" lIns="91440" tIns="45720" rIns="91440" bIns="45720" numCol="1" anchor="t" anchorCtr="0" compatLnSpc="1">
+            <a:prstTxWarp prst="textNoShape">
+              <a:avLst/>
+            </a:prstTxWarp>
+          </a:bodyPr>
+          <a:lstStyle/>
+          <a:p>
+            <a:pPr algn="l" rtl="0"/>
+            <a:endParaRPr lang="ru-RU"/>
+          </a:p>
+        </p:txBody>
+      </p:sp>
+      <p:sp>
+        <p:nvSpPr>
+          <p:cNvPr id="7" name="AutoShape 2" descr="image.png"/>
+          <p:cNvSpPr>
+            <a:spLocks noChangeAspect="1" noChangeArrowheads="1"/>
+          </p:cNvSpPr>
+          <p:nvPr/>
+        </p:nvSpPr>
+        <p:spPr bwMode="auto">
+          <a:xfrm>
+            <a:off x="460375" y="160337"/>
+            <a:ext cx="304800" cy="304801"/>
+          </a:xfrm>
+          <a:prstGeom prst="rect">
+            <a:avLst/>
+          </a:prstGeom>
+          <a:noFill/>
+          <a:extLst>
+            <a:ext uri="{909E8E84-426E-40DD-AFC4-6F175D3DCCD1}">
+              <a14:hiddenFill xmlns:a14="http://schemas.microsoft.com/office/drawing/2010/main">
+                <a:solidFill>
+                  <a:srgbClr val="FFFFFF"/>
+                </a:solidFill>
+              </a14:hiddenFill>
+            </a:ext>
+          </a:extLst>
+        </p:spPr>
+        <p:txBody>
+          <a:bodyPr vert="horz" wrap="square" lIns="91440" tIns="45720" rIns="91440" bIns="45720" numCol="1" anchor="t" anchorCtr="0" compatLnSpc="1">
+            <a:prstTxWarp prst="textNoShape">
+              <a:avLst/>
+            </a:prstTxWarp>
+          </a:bodyPr>
+          <a:lstStyle/>
+          <a:p>
+            <a:pPr algn="l" rtl="0"/>
+            <a:endParaRPr lang="ru-RU"/>
+          </a:p>
+        </p:txBody>
+      </p:sp>
+      <p:sp>
+        <p:nvSpPr>
+          <p:cNvPr id="8" name="Объект 7"/>
+          <p:cNvSpPr>
+            <a:spLocks noGrp="1"/>
+          </p:cNvSpPr>
+          <p:nvPr>
+            <p:ph idx="1"/>
+          </p:nvPr>
+        </p:nvSpPr>
+        <p:spPr>
+          <a:xfrm>
+            <a:off x="765175" y="1254570"/>
+            <a:ext cx="10741025" cy="5100193"/>
+          </a:xfrm>
+        </p:spPr>
+        <p:txBody>
+          <a:bodyPr/>
+          <a:lstStyle/>
+          <a:p>
+            <a:pPr algn="l" rtl="0"/>
+            <a:r>
+              <a:rPr lang="en-US" dirty="0"/>
+              <a:t>Пример внезапного отсутствия сезонности и </a:t>
+            </a:r>
+            <a:r>
+              <a:rPr lang="ru-RU" dirty="0"/>
+              <a:t>изменение </a:t>
+            </a:r>
+            <a:r>
+              <a:rPr lang="en-US" dirty="0" err="1"/>
+              <a:t>уровн</a:t>
+            </a:r>
+            <a:r>
+              <a:rPr lang="ru-RU" dirty="0"/>
+              <a:t>я</a:t>
+            </a:r>
+            <a:r>
+              <a:rPr lang="en-US" dirty="0"/>
+              <a:t> аномалия сдвига.</a:t>
+            </a:r>
+          </a:p>
+        </p:txBody>
+      </p:sp>
+      <p:sp>
+        <p:nvSpPr>
+          <p:cNvPr id="9" name="AutoShape 2" descr="image.png"/>
+          <p:cNvSpPr>
+            <a:spLocks noChangeAspect="1" noChangeArrowheads="1"/>
+          </p:cNvSpPr>
+          <p:nvPr/>
+        </p:nvSpPr>
+        <p:spPr bwMode="auto">
+          <a:xfrm>
+            <a:off x="612775" y="312737"/>
+            <a:ext cx="304800" cy="304801"/>
+          </a:xfrm>
+          <a:prstGeom prst="rect">
+            <a:avLst/>
+          </a:prstGeom>
+          <a:noFill/>
+          <a:extLst>
+            <a:ext uri="{909E8E84-426E-40DD-AFC4-6F175D3DCCD1}">
+              <a14:hiddenFill xmlns:a14="http://schemas.microsoft.com/office/drawing/2010/main">
+                <a:solidFill>
+                  <a:srgbClr val="FFFFFF"/>
+                </a:solidFill>
+              </a14:hiddenFill>
+            </a:ext>
+          </a:extLst>
+        </p:spPr>
+        <p:txBody>
+          <a:bodyPr vert="horz" wrap="square" lIns="91440" tIns="45720" rIns="91440" bIns="45720" numCol="1" anchor="t" anchorCtr="0" compatLnSpc="1">
+            <a:prstTxWarp prst="textNoShape">
+              <a:avLst/>
+            </a:prstTxWarp>
+          </a:bodyPr>
+          <a:lstStyle/>
+          <a:p>
+            <a:pPr algn="l" rtl="0"/>
+            <a:endParaRPr lang="ru-RU"/>
+          </a:p>
+        </p:txBody>
+      </p:sp>
+      <p:sp>
+        <p:nvSpPr>
+          <p:cNvPr id="12" name="AutoShape 4" descr="image.png"/>
+          <p:cNvSpPr>
+            <a:spLocks noChangeAspect="1" noChangeArrowheads="1"/>
+          </p:cNvSpPr>
+          <p:nvPr/>
+        </p:nvSpPr>
+        <p:spPr bwMode="auto">
+          <a:xfrm>
+            <a:off x="765175" y="465137"/>
+            <a:ext cx="304800" cy="304801"/>
+          </a:xfrm>
+          <a:prstGeom prst="rect">
+            <a:avLst/>
+          </a:prstGeom>
+          <a:noFill/>
+          <a:extLst>
+            <a:ext uri="{909E8E84-426E-40DD-AFC4-6F175D3DCCD1}">
+              <a14:hiddenFill xmlns:a14="http://schemas.microsoft.com/office/drawing/2010/main">
+                <a:solidFill>
+                  <a:srgbClr val="FFFFFF"/>
+                </a:solidFill>
+              </a14:hiddenFill>
+            </a:ext>
+          </a:extLst>
+        </p:spPr>
+        <p:txBody>
+          <a:bodyPr vert="horz" wrap="square" lIns="91440" tIns="45720" rIns="91440" bIns="45720" numCol="1" anchor="t" anchorCtr="0" compatLnSpc="1">
+            <a:prstTxWarp prst="textNoShape">
+              <a:avLst/>
+            </a:prstTxWarp>
+          </a:bodyPr>
+          <a:lstStyle/>
+          <a:p>
+            <a:pPr algn="l" rtl="0"/>
+            <a:endParaRPr lang="ru-RU"/>
+          </a:p>
+        </p:txBody>
+      </p:sp>
+      <p:sp>
+        <p:nvSpPr>
+          <p:cNvPr id="3" name="AutoShape 2" descr="image.png"/>
+          <p:cNvSpPr>
+            <a:spLocks noChangeAspect="1" noChangeArrowheads="1"/>
+          </p:cNvSpPr>
+          <p:nvPr/>
+        </p:nvSpPr>
+        <p:spPr bwMode="auto">
+          <a:xfrm>
+            <a:off x="917575" y="617537"/>
+            <a:ext cx="304800" cy="304801"/>
+          </a:xfrm>
+          <a:prstGeom prst="rect">
+            <a:avLst/>
+          </a:prstGeom>
+          <a:noFill/>
+          <a:extLst>
+            <a:ext uri="{909E8E84-426E-40DD-AFC4-6F175D3DCCD1}">
+              <a14:hiddenFill xmlns:a14="http://schemas.microsoft.com/office/drawing/2010/main">
+                <a:solidFill>
+                  <a:srgbClr val="FFFFFF"/>
+                </a:solidFill>
+              </a14:hiddenFill>
+            </a:ext>
+          </a:extLst>
+        </p:spPr>
+        <p:txBody>
+          <a:bodyPr vert="horz" wrap="square" lIns="91440" tIns="45720" rIns="91440" bIns="45720" numCol="1" anchor="t" anchorCtr="0" compatLnSpc="1">
+            <a:prstTxWarp prst="textNoShape">
+              <a:avLst/>
+            </a:prstTxWarp>
+          </a:bodyPr>
+          <a:lstStyle/>
+          <a:p>
+            <a:pPr algn="l" rtl="0"/>
+            <a:endParaRPr lang="ru-RU"/>
+          </a:p>
+        </p:txBody>
+      </p:sp>
+      <p:sp>
+        <p:nvSpPr>
+          <p:cNvPr id="15" name="AutoShape 4" descr="image.png"/>
+          <p:cNvSpPr>
+            <a:spLocks noChangeAspect="1" noChangeArrowheads="1"/>
+          </p:cNvSpPr>
+          <p:nvPr/>
+        </p:nvSpPr>
+        <p:spPr bwMode="auto">
+          <a:xfrm>
+            <a:off x="1069975" y="769937"/>
+            <a:ext cx="304800" cy="304801"/>
+          </a:xfrm>
+          <a:prstGeom prst="rect">
+            <a:avLst/>
+          </a:prstGeom>
+          <a:noFill/>
+          <a:extLst>
+            <a:ext uri="{909E8E84-426E-40DD-AFC4-6F175D3DCCD1}">
+              <a14:hiddenFill xmlns:a14="http://schemas.microsoft.com/office/drawing/2010/main">
+                <a:solidFill>
+                  <a:srgbClr val="FFFFFF"/>
+                </a:solidFill>
+              </a14:hiddenFill>
+            </a:ext>
+          </a:extLst>
+        </p:spPr>
+        <p:txBody>
+          <a:bodyPr vert="horz" wrap="square" lIns="91440" tIns="45720" rIns="91440" bIns="45720" numCol="1" anchor="t" anchorCtr="0" compatLnSpc="1">
+            <a:prstTxWarp prst="textNoShape">
+              <a:avLst/>
+            </a:prstTxWarp>
+          </a:bodyPr>
+          <a:lstStyle/>
+          <a:p>
+            <a:pPr algn="l" rtl="0"/>
+            <a:endParaRPr lang="ru-RU"/>
+          </a:p>
+        </p:txBody>
+      </p:sp>
+      <p:sp>
+        <p:nvSpPr>
+          <p:cNvPr id="10" name="AutoShape 2" descr="image-3.png"/>
+          <p:cNvSpPr>
+            <a:spLocks noChangeAspect="1" noChangeArrowheads="1"/>
+          </p:cNvSpPr>
+          <p:nvPr/>
+        </p:nvSpPr>
+        <p:spPr bwMode="auto">
+          <a:xfrm>
+            <a:off x="1222375" y="922337"/>
+            <a:ext cx="304800" cy="304801"/>
+          </a:xfrm>
+          <a:prstGeom prst="rect">
+            <a:avLst/>
+          </a:prstGeom>
+          <a:noFill/>
+          <a:extLst>
+            <a:ext uri="{909E8E84-426E-40DD-AFC4-6F175D3DCCD1}">
+              <a14:hiddenFill xmlns:a14="http://schemas.microsoft.com/office/drawing/2010/main">
+                <a:solidFill>
+                  <a:srgbClr val="FFFFFF"/>
+                </a:solidFill>
+              </a14:hiddenFill>
+            </a:ext>
+          </a:extLst>
+        </p:spPr>
+        <p:txBody>
+          <a:bodyPr vert="horz" wrap="square" lIns="91440" tIns="45720" rIns="91440" bIns="45720" numCol="1" anchor="t" anchorCtr="0" compatLnSpc="1">
+            <a:prstTxWarp prst="textNoShape">
+              <a:avLst/>
+            </a:prstTxWarp>
+          </a:bodyPr>
+          <a:lstStyle/>
+          <a:p>
+            <a:pPr algn="l" rtl="0"/>
+            <a:endParaRPr lang="ru-RU"/>
+          </a:p>
+        </p:txBody>
+      </p:sp>
+      <p:pic>
+        <p:nvPicPr>
+          <p:cNvPr id="11" name="Рисунок 10"/>
+          <p:cNvPicPr>
+            <a:picLocks noChangeAspect="1"/>
+          </p:cNvPicPr>
+          <p:nvPr/>
+        </p:nvPicPr>
+        <p:blipFill>
+          <a:blip r:embed="rId2"/>
+          <a:stretch>
+            <a:fillRect/>
+          </a:stretch>
+        </p:blipFill>
+        <p:spPr>
+          <a:xfrm>
+            <a:off x="307975" y="1784350"/>
+            <a:ext cx="6690186" cy="4370387"/>
+          </a:xfrm>
+          <a:prstGeom prst="rect">
+            <a:avLst/>
+          </a:prstGeom>
+        </p:spPr>
+      </p:pic>
+    </p:spTree>
+    <p:extLst>
+      <p:ext uri="{BB962C8B-B14F-4D97-AF65-F5344CB8AC3E}">
+        <p14:creationId xmlns:p14="http://schemas.microsoft.com/office/powerpoint/2010/main" val="2557801481"/>
+      </p:ext>
+    </p:extLst>
+  </p:cSld>
+  <p:clrMapOvr>
+    <a:masterClrMapping/>
+  </p:clrMapOvr>
+  <mc:AlternateContent xmlns:mc="http://schemas.openxmlformats.org/markup-compatibility/2006" xmlns:p14="http://schemas.microsoft.com/office/powerpoint/2010/main">
+    <mc:Choice Requires="p14">
+      <p:transition spd="slow" p14:dur="2000"/>
+    </mc:Choice>
+    <mc:Fallback xmlns="">
+      <p:transition spd="slow"/>
+    </mc:Fallback>
+  </mc:AlternateContent>
+  <p:timing>
+    <p:tnLst>
+      <p:par>
+        <p:cTn id="1" dur="indefinite" restart="never" nodeType="tmRoot"/>
+      </p:par>
+    </p:tnLst>
+  </p:timing>
+</p:sld>
+</file>
+
+<file path=ppt/slides/slide35.xml><?xml version="1.0" encoding="utf-8"?>
+<p:sld xmlns:a="http://schemas.openxmlformats.org/drawingml/2006/main" xmlns:r="http://schemas.openxmlformats.org/officeDocument/2006/relationships" xmlns:p="http://schemas.openxmlformats.org/presentationml/2006/main" show="0">
+  <p:cSld>
+    <p:spTree>
+      <p:nvGrpSpPr>
+        <p:cNvPr id="1" name=""/>
+        <p:cNvGrpSpPr/>
+        <p:nvPr/>
+      </p:nvGrpSpPr>
+      <p:grpSpPr>
+        <a:xfrm>
+          <a:off x="0" y="0"/>
+          <a:ext cx="0" cy="0"/>
+          <a:chOff x="0" y="0"/>
+          <a:chExt cx="0" cy="0"/>
+        </a:xfrm>
+      </p:grpSpPr>
+      <p:sp>
+        <p:nvSpPr>
+          <p:cNvPr id="2" name="Заголовок 1"/>
+          <p:cNvSpPr>
+            <a:spLocks noGrp="1"/>
+          </p:cNvSpPr>
+          <p:nvPr>
+            <p:ph type="title"/>
+          </p:nvPr>
+        </p:nvSpPr>
+        <p:spPr>
+          <a:xfrm>
+            <a:off x="838200" y="365125"/>
+            <a:ext cx="10515600" cy="711645"/>
+          </a:xfrm>
+        </p:spPr>
+        <p:txBody>
           <a:bodyPr>
             <a:normAutofit/>
           </a:bodyPr>
@@ -19537,11 +19430,11 @@
   <p:clrMapOvr>
     <a:masterClrMapping/>
   </p:clrMapOvr>
-  <mc:AlternateContent xmlns:mc="http://schemas.openxmlformats.org/markup-compatibility/2006">
-    <mc:Choice xmlns:p14="http://schemas.microsoft.com/office/powerpoint/2010/main" Requires="p14">
+  <mc:AlternateContent xmlns:mc="http://schemas.openxmlformats.org/markup-compatibility/2006" xmlns:p14="http://schemas.microsoft.com/office/powerpoint/2010/main">
+    <mc:Choice Requires="p14">
       <p:transition spd="slow" p14:dur="2000"/>
     </mc:Choice>
-    <mc:Fallback>
+    <mc:Fallback xmlns="">
       <p:transition spd="slow"/>
     </mc:Fallback>
   </mc:AlternateContent>
@@ -20306,7 +20199,7 @@
           <a:bodyPr/>
           <a:lstStyle/>
           <a:p>
-            <a:pPr algn="l" rtl="0"/>
+            <a:pPr algn="ctr" rtl="0"/>
             <a:r>
               <a:rPr lang="ru-RU" b="1" dirty="0"/>
               <a:t>Обнаружение аномалий. </a:t>
@@ -20315,126 +20208,6 @@
               <a:rPr lang="en-US" b="1" dirty="0"/>
               <a:t>Пример</a:t>
             </a:r>
-          </a:p>
-        </p:txBody>
-      </p:sp>
-      <p:sp>
-        <p:nvSpPr>
-          <p:cNvPr id="5" name="AutoShape 3" descr="image.png"/>
-          <p:cNvSpPr>
-            <a:spLocks noChangeAspect="1" noChangeArrowheads="1"/>
-          </p:cNvSpPr>
-          <p:nvPr/>
-        </p:nvSpPr>
-        <p:spPr bwMode="auto">
-          <a:xfrm>
-            <a:off x="155575" y="-144463"/>
-            <a:ext cx="304800" cy="304801"/>
-          </a:xfrm>
-          <a:prstGeom prst="rect">
-            <a:avLst/>
-          </a:prstGeom>
-          <a:noFill/>
-          <a:extLst>
-            <a:ext uri="{909E8E84-426E-40DD-AFC4-6F175D3DCCD1}">
-              <a14:hiddenFill xmlns:a14="http://schemas.microsoft.com/office/drawing/2010/main">
-                <a:solidFill>
-                  <a:srgbClr val="FFFFFF"/>
-                </a:solidFill>
-              </a14:hiddenFill>
-            </a:ext>
-          </a:extLst>
-        </p:spPr>
-        <p:txBody>
-          <a:bodyPr vert="horz" wrap="square" lIns="91440" tIns="45720" rIns="91440" bIns="45720" numCol="1" anchor="t" anchorCtr="0" compatLnSpc="1">
-            <a:prstTxWarp prst="textNoShape">
-              <a:avLst/>
-            </a:prstTxWarp>
-          </a:bodyPr>
-          <a:lstStyle/>
-          <a:p>
-            <a:pPr algn="l" rtl="0"/>
-            <a:endParaRPr lang="ru-RU"/>
-          </a:p>
-        </p:txBody>
-      </p:sp>
-      <p:sp>
-        <p:nvSpPr>
-          <p:cNvPr id="4" name="AutoShape 2" descr="image.png"/>
-          <p:cNvSpPr>
-            <a:spLocks noChangeAspect="1" noChangeArrowheads="1"/>
-          </p:cNvSpPr>
-          <p:nvPr/>
-        </p:nvSpPr>
-        <p:spPr bwMode="auto">
-          <a:xfrm>
-            <a:off x="307975" y="7937"/>
-            <a:ext cx="304800" cy="304801"/>
-          </a:xfrm>
-          <a:prstGeom prst="rect">
-            <a:avLst/>
-          </a:prstGeom>
-          <a:noFill/>
-          <a:extLst>
-            <a:ext uri="{909E8E84-426E-40DD-AFC4-6F175D3DCCD1}">
-              <a14:hiddenFill xmlns:a14="http://schemas.microsoft.com/office/drawing/2010/main">
-                <a:solidFill>
-                  <a:srgbClr val="FFFFFF"/>
-                </a:solidFill>
-              </a14:hiddenFill>
-            </a:ext>
-          </a:extLst>
-        </p:spPr>
-        <p:txBody>
-          <a:bodyPr vert="horz" wrap="square" lIns="91440" tIns="45720" rIns="91440" bIns="45720" numCol="1" anchor="t" anchorCtr="0" compatLnSpc="1">
-            <a:prstTxWarp prst="textNoShape">
-              <a:avLst/>
-            </a:prstTxWarp>
-          </a:bodyPr>
-          <a:lstStyle/>
-          <a:p>
-            <a:pPr algn="l" rtl="0"/>
-            <a:endParaRPr lang="ru-RU"/>
-          </a:p>
-        </p:txBody>
-      </p:sp>
-      <p:sp>
-        <p:nvSpPr>
-          <p:cNvPr id="7" name="AutoShape 2" descr="image.png"/>
-          <p:cNvSpPr>
-            <a:spLocks noChangeAspect="1" noChangeArrowheads="1"/>
-          </p:cNvSpPr>
-          <p:nvPr/>
-        </p:nvSpPr>
-        <p:spPr bwMode="auto">
-          <a:xfrm>
-            <a:off x="460375" y="160337"/>
-            <a:ext cx="304800" cy="304801"/>
-          </a:xfrm>
-          <a:prstGeom prst="rect">
-            <a:avLst/>
-          </a:prstGeom>
-          <a:noFill/>
-          <a:extLst>
-            <a:ext uri="{909E8E84-426E-40DD-AFC4-6F175D3DCCD1}">
-              <a14:hiddenFill xmlns:a14="http://schemas.microsoft.com/office/drawing/2010/main">
-                <a:solidFill>
-                  <a:srgbClr val="FFFFFF"/>
-                </a:solidFill>
-              </a14:hiddenFill>
-            </a:ext>
-          </a:extLst>
-        </p:spPr>
-        <p:txBody>
-          <a:bodyPr vert="horz" wrap="square" lIns="91440" tIns="45720" rIns="91440" bIns="45720" numCol="1" anchor="t" anchorCtr="0" compatLnSpc="1">
-            <a:prstTxWarp prst="textNoShape">
-              <a:avLst/>
-            </a:prstTxWarp>
-          </a:bodyPr>
-          <a:lstStyle/>
-          <a:p>
-            <a:pPr algn="l" rtl="0"/>
-            <a:endParaRPr lang="ru-RU"/>
           </a:p>
         </p:txBody>
       </p:sp>
@@ -21125,11 +20898,7 @@
             </a:r>
             <a:r>
               <a:rPr lang="ru-RU" sz="2400" dirty="0" smtClean="0"/>
-              <a:t> – Гомогенный участок ВР, сохраняющий поведение (тип или непрерывность</a:t>
-            </a:r>
-            <a:r>
-              <a:rPr lang="ru-RU" sz="2400" dirty="0" smtClean="0"/>
-              <a:t> тренда, паттерны сезонности </a:t>
+              <a:t> – Гомогенный участок ВР, сохраняющий поведение (тип или непрерывность тренда, паттерны сезонности </a:t>
             </a:r>
             <a:r>
               <a:rPr lang="ru-RU" sz="2400" dirty="0" err="1" smtClean="0"/>
@@ -21137,11 +20906,7 @@
             </a:r>
             <a:r>
               <a:rPr lang="ru-RU" sz="2400" dirty="0" smtClean="0"/>
-              <a:t>)</a:t>
-            </a:r>
-            <a:r>
-              <a:rPr lang="ru-RU" sz="2400" dirty="0" smtClean="0"/>
-              <a:t>.</a:t>
+              <a:t>).</a:t>
             </a:r>
           </a:p>
           <a:p>
@@ -21290,7 +21055,7 @@
           <a:bodyPr/>
           <a:lstStyle/>
           <a:p>
-            <a:pPr algn="l" rtl="0"/>
+            <a:pPr algn="ctr" rtl="0"/>
             <a:r>
               <a:rPr lang="en-US" b="1" dirty="0" err="1"/>
               <a:t>Обнаружение</a:t>
@@ -21379,46 +21144,6 @@
         <p:spPr bwMode="auto">
           <a:xfrm>
             <a:off x="155575" y="-144463"/>
-            <a:ext cx="304800" cy="304801"/>
-          </a:xfrm>
-          <a:prstGeom prst="rect">
-            <a:avLst/>
-          </a:prstGeom>
-          <a:noFill/>
-          <a:extLst>
-            <a:ext uri="{909E8E84-426E-40DD-AFC4-6F175D3DCCD1}">
-              <a14:hiddenFill xmlns:a14="http://schemas.microsoft.com/office/drawing/2010/main">
-                <a:solidFill>
-                  <a:srgbClr val="FFFFFF"/>
-                </a:solidFill>
-              </a14:hiddenFill>
-            </a:ext>
-          </a:extLst>
-        </p:spPr>
-        <p:txBody>
-          <a:bodyPr vert="horz" wrap="square" lIns="91440" tIns="45720" rIns="91440" bIns="45720" numCol="1" anchor="t" anchorCtr="0" compatLnSpc="1">
-            <a:prstTxWarp prst="textNoShape">
-              <a:avLst/>
-            </a:prstTxWarp>
-          </a:bodyPr>
-          <a:lstStyle/>
-          <a:p>
-            <a:pPr algn="l" rtl="0"/>
-            <a:endParaRPr lang="ru-RU"/>
-          </a:p>
-        </p:txBody>
-      </p:sp>
-      <p:sp>
-        <p:nvSpPr>
-          <p:cNvPr id="4" name="AutoShape 2" descr="image.png"/>
-          <p:cNvSpPr>
-            <a:spLocks noChangeAspect="1" noChangeArrowheads="1"/>
-          </p:cNvSpPr>
-          <p:nvPr/>
-        </p:nvSpPr>
-        <p:spPr bwMode="auto">
-          <a:xfrm>
-            <a:off x="307975" y="7937"/>
             <a:ext cx="304800" cy="304801"/>
           </a:xfrm>
           <a:prstGeom prst="rect">
@@ -21603,7 +21328,7 @@
         </p:nvSpPr>
         <p:spPr>
           <a:xfrm>
-            <a:off x="765175" y="251697"/>
+            <a:off x="917575" y="282083"/>
             <a:ext cx="10515600" cy="711645"/>
           </a:xfrm>
         </p:spPr>
@@ -21611,7 +21336,7 @@
           <a:bodyPr/>
           <a:lstStyle/>
           <a:p>
-            <a:pPr algn="l" rtl="0"/>
+            <a:pPr algn="ctr" rtl="0"/>
             <a:r>
               <a:rPr lang="ru-RU" b="1" dirty="0"/>
               <a:t>Обнаружение аномалий. </a:t>
@@ -21620,126 +21345,6 @@
               <a:rPr lang="en-US" b="1" dirty="0"/>
               <a:t>Методы</a:t>
             </a:r>
-          </a:p>
-        </p:txBody>
-      </p:sp>
-      <p:sp>
-        <p:nvSpPr>
-          <p:cNvPr id="5" name="AutoShape 3" descr="image.png"/>
-          <p:cNvSpPr>
-            <a:spLocks noChangeAspect="1" noChangeArrowheads="1"/>
-          </p:cNvSpPr>
-          <p:nvPr/>
-        </p:nvSpPr>
-        <p:spPr bwMode="auto">
-          <a:xfrm>
-            <a:off x="155575" y="-144463"/>
-            <a:ext cx="304800" cy="304801"/>
-          </a:xfrm>
-          <a:prstGeom prst="rect">
-            <a:avLst/>
-          </a:prstGeom>
-          <a:noFill/>
-          <a:extLst>
-            <a:ext uri="{909E8E84-426E-40DD-AFC4-6F175D3DCCD1}">
-              <a14:hiddenFill xmlns:a14="http://schemas.microsoft.com/office/drawing/2010/main">
-                <a:solidFill>
-                  <a:srgbClr val="FFFFFF"/>
-                </a:solidFill>
-              </a14:hiddenFill>
-            </a:ext>
-          </a:extLst>
-        </p:spPr>
-        <p:txBody>
-          <a:bodyPr vert="horz" wrap="square" lIns="91440" tIns="45720" rIns="91440" bIns="45720" numCol="1" anchor="t" anchorCtr="0" compatLnSpc="1">
-            <a:prstTxWarp prst="textNoShape">
-              <a:avLst/>
-            </a:prstTxWarp>
-          </a:bodyPr>
-          <a:lstStyle/>
-          <a:p>
-            <a:pPr algn="l" rtl="0"/>
-            <a:endParaRPr lang="ru-RU" dirty="0"/>
-          </a:p>
-        </p:txBody>
-      </p:sp>
-      <p:sp>
-        <p:nvSpPr>
-          <p:cNvPr id="4" name="AutoShape 2" descr="image.png"/>
-          <p:cNvSpPr>
-            <a:spLocks noChangeAspect="1" noChangeArrowheads="1"/>
-          </p:cNvSpPr>
-          <p:nvPr/>
-        </p:nvSpPr>
-        <p:spPr bwMode="auto">
-          <a:xfrm>
-            <a:off x="307975" y="7937"/>
-            <a:ext cx="304800" cy="304801"/>
-          </a:xfrm>
-          <a:prstGeom prst="rect">
-            <a:avLst/>
-          </a:prstGeom>
-          <a:noFill/>
-          <a:extLst>
-            <a:ext uri="{909E8E84-426E-40DD-AFC4-6F175D3DCCD1}">
-              <a14:hiddenFill xmlns:a14="http://schemas.microsoft.com/office/drawing/2010/main">
-                <a:solidFill>
-                  <a:srgbClr val="FFFFFF"/>
-                </a:solidFill>
-              </a14:hiddenFill>
-            </a:ext>
-          </a:extLst>
-        </p:spPr>
-        <p:txBody>
-          <a:bodyPr vert="horz" wrap="square" lIns="91440" tIns="45720" rIns="91440" bIns="45720" numCol="1" anchor="t" anchorCtr="0" compatLnSpc="1">
-            <a:prstTxWarp prst="textNoShape">
-              <a:avLst/>
-            </a:prstTxWarp>
-          </a:bodyPr>
-          <a:lstStyle/>
-          <a:p>
-            <a:pPr algn="l" rtl="0"/>
-            <a:endParaRPr lang="ru-RU" dirty="0"/>
-          </a:p>
-        </p:txBody>
-      </p:sp>
-      <p:sp>
-        <p:nvSpPr>
-          <p:cNvPr id="7" name="AutoShape 2" descr="image.png"/>
-          <p:cNvSpPr>
-            <a:spLocks noChangeAspect="1" noChangeArrowheads="1"/>
-          </p:cNvSpPr>
-          <p:nvPr/>
-        </p:nvSpPr>
-        <p:spPr bwMode="auto">
-          <a:xfrm>
-            <a:off x="460375" y="160337"/>
-            <a:ext cx="304800" cy="304801"/>
-          </a:xfrm>
-          <a:prstGeom prst="rect">
-            <a:avLst/>
-          </a:prstGeom>
-          <a:noFill/>
-          <a:extLst>
-            <a:ext uri="{909E8E84-426E-40DD-AFC4-6F175D3DCCD1}">
-              <a14:hiddenFill xmlns:a14="http://schemas.microsoft.com/office/drawing/2010/main">
-                <a:solidFill>
-                  <a:srgbClr val="FFFFFF"/>
-                </a:solidFill>
-              </a14:hiddenFill>
-            </a:ext>
-          </a:extLst>
-        </p:spPr>
-        <p:txBody>
-          <a:bodyPr vert="horz" wrap="square" lIns="91440" tIns="45720" rIns="91440" bIns="45720" numCol="1" anchor="t" anchorCtr="0" compatLnSpc="1">
-            <a:prstTxWarp prst="textNoShape">
-              <a:avLst/>
-            </a:prstTxWarp>
-          </a:bodyPr>
-          <a:lstStyle/>
-          <a:p>
-            <a:pPr algn="l" rtl="0"/>
-            <a:endParaRPr lang="ru-RU" dirty="0"/>
           </a:p>
         </p:txBody>
       </p:sp>
@@ -21755,8 +21360,8 @@
         </p:nvSpPr>
         <p:spPr>
           <a:xfrm>
-            <a:off x="385797" y="1004348"/>
-            <a:ext cx="10741025" cy="5100193"/>
+            <a:off x="307975" y="922336"/>
+            <a:ext cx="11410949" cy="5545139"/>
           </a:xfrm>
         </p:spPr>
         <p:txBody>
@@ -22096,126 +21701,6 @@
           <a:p>
             <a:pPr algn="l" rtl="0"/>
             <a:endParaRPr lang="en-US" sz="2200" dirty="0"/>
-          </a:p>
-        </p:txBody>
-      </p:sp>
-      <p:sp>
-        <p:nvSpPr>
-          <p:cNvPr id="9" name="AutoShape 2" descr="image.png"/>
-          <p:cNvSpPr>
-            <a:spLocks noChangeAspect="1" noChangeArrowheads="1"/>
-          </p:cNvSpPr>
-          <p:nvPr/>
-        </p:nvSpPr>
-        <p:spPr bwMode="auto">
-          <a:xfrm>
-            <a:off x="612775" y="312737"/>
-            <a:ext cx="304800" cy="304801"/>
-          </a:xfrm>
-          <a:prstGeom prst="rect">
-            <a:avLst/>
-          </a:prstGeom>
-          <a:noFill/>
-          <a:extLst>
-            <a:ext uri="{909E8E84-426E-40DD-AFC4-6F175D3DCCD1}">
-              <a14:hiddenFill xmlns:a14="http://schemas.microsoft.com/office/drawing/2010/main">
-                <a:solidFill>
-                  <a:srgbClr val="FFFFFF"/>
-                </a:solidFill>
-              </a14:hiddenFill>
-            </a:ext>
-          </a:extLst>
-        </p:spPr>
-        <p:txBody>
-          <a:bodyPr vert="horz" wrap="square" lIns="91440" tIns="45720" rIns="91440" bIns="45720" numCol="1" anchor="t" anchorCtr="0" compatLnSpc="1">
-            <a:prstTxWarp prst="textNoShape">
-              <a:avLst/>
-            </a:prstTxWarp>
-          </a:bodyPr>
-          <a:lstStyle/>
-          <a:p>
-            <a:pPr algn="l" rtl="0"/>
-            <a:endParaRPr lang="ru-RU" dirty="0"/>
-          </a:p>
-        </p:txBody>
-      </p:sp>
-      <p:sp>
-        <p:nvSpPr>
-          <p:cNvPr id="12" name="AutoShape 4" descr="image.png"/>
-          <p:cNvSpPr>
-            <a:spLocks noChangeAspect="1" noChangeArrowheads="1"/>
-          </p:cNvSpPr>
-          <p:nvPr/>
-        </p:nvSpPr>
-        <p:spPr bwMode="auto">
-          <a:xfrm>
-            <a:off x="765175" y="465137"/>
-            <a:ext cx="304800" cy="304801"/>
-          </a:xfrm>
-          <a:prstGeom prst="rect">
-            <a:avLst/>
-          </a:prstGeom>
-          <a:noFill/>
-          <a:extLst>
-            <a:ext uri="{909E8E84-426E-40DD-AFC4-6F175D3DCCD1}">
-              <a14:hiddenFill xmlns:a14="http://schemas.microsoft.com/office/drawing/2010/main">
-                <a:solidFill>
-                  <a:srgbClr val="FFFFFF"/>
-                </a:solidFill>
-              </a14:hiddenFill>
-            </a:ext>
-          </a:extLst>
-        </p:spPr>
-        <p:txBody>
-          <a:bodyPr vert="horz" wrap="square" lIns="91440" tIns="45720" rIns="91440" bIns="45720" numCol="1" anchor="t" anchorCtr="0" compatLnSpc="1">
-            <a:prstTxWarp prst="textNoShape">
-              <a:avLst/>
-            </a:prstTxWarp>
-          </a:bodyPr>
-          <a:lstStyle/>
-          <a:p>
-            <a:pPr algn="l" rtl="0"/>
-            <a:endParaRPr lang="ru-RU" dirty="0"/>
-          </a:p>
-        </p:txBody>
-      </p:sp>
-      <p:sp>
-        <p:nvSpPr>
-          <p:cNvPr id="3" name="AutoShape 2" descr="image.png"/>
-          <p:cNvSpPr>
-            <a:spLocks noChangeAspect="1" noChangeArrowheads="1"/>
-          </p:cNvSpPr>
-          <p:nvPr/>
-        </p:nvSpPr>
-        <p:spPr bwMode="auto">
-          <a:xfrm>
-            <a:off x="917575" y="617537"/>
-            <a:ext cx="304800" cy="304801"/>
-          </a:xfrm>
-          <a:prstGeom prst="rect">
-            <a:avLst/>
-          </a:prstGeom>
-          <a:noFill/>
-          <a:extLst>
-            <a:ext uri="{909E8E84-426E-40DD-AFC4-6F175D3DCCD1}">
-              <a14:hiddenFill xmlns:a14="http://schemas.microsoft.com/office/drawing/2010/main">
-                <a:solidFill>
-                  <a:srgbClr val="FFFFFF"/>
-                </a:solidFill>
-              </a14:hiddenFill>
-            </a:ext>
-          </a:extLst>
-        </p:spPr>
-        <p:txBody>
-          <a:bodyPr vert="horz" wrap="square" lIns="91440" tIns="45720" rIns="91440" bIns="45720" numCol="1" anchor="t" anchorCtr="0" compatLnSpc="1">
-            <a:prstTxWarp prst="textNoShape">
-              <a:avLst/>
-            </a:prstTxWarp>
-          </a:bodyPr>
-          <a:lstStyle/>
-          <a:p>
-            <a:pPr algn="l" rtl="0"/>
-            <a:endParaRPr lang="ru-RU" dirty="0"/>
           </a:p>
         </p:txBody>
       </p:sp>
